--- a/artifacts/AI-Inference-Developer-Portfolio.pptx
+++ b/artifacts/AI-Inference-Developer-Portfolio.pptx
@@ -17,6 +17,8 @@
     <p:sldId id="265" r:id="rId16"/>
     <p:sldId id="266" r:id="rId17"/>
     <p:sldId id="267" r:id="rId18"/>
+    <p:sldId id="268" r:id="rId19"/>
+    <p:sldId id="269" r:id="rId20"/>
   </p:sldIdLst>
   <p:sldSz cx="12191695" cy="6858000" type="screen4x3"/>
   <p:notesSz cx="6858000" cy="9144000"/>
@@ -3145,7 +3147,7 @@
                 <a:latin typeface="Noto Sans KR"/>
                 <a:ea typeface="Noto Sans KR"/>
               </a:rPr>
-              <a:t>AI DEVELOPER · LLMOPS · INFERENCE ENGINEERING</a:t>
+              <a:t>AI DEVELOPER · LLMOPS · AGENT ENGINEERING</a:t>
             </a:r>
           </a:p>
         </p:txBody>
@@ -3251,7 +3253,7 @@
                 <a:latin typeface="Noto Sans KR"/>
                 <a:ea typeface="Noto Sans KR"/>
               </a:rPr>
-              <a:t>김대균 · 운영 가능한 LLM과 한국어 음성 추론을 측정 가능한 시스템으로 구현했습니다.</a:t>
+              <a:t>김대균 · AI 추론을 만들고, 측정하고, 운영하며, 증거 기반 Agent로 자동화했습니다.</a:t>
             </a:r>
           </a:p>
         </p:txBody>
@@ -3441,7 +3443,7 @@
         <p:spPr>
           <a:xfrm>
             <a:off x="4800600" y="4919472"/>
-            <a:ext cx="1920240" cy="393192"/>
+            <a:ext cx="1645920" cy="393192"/>
           </a:xfrm>
           <a:prstGeom prst="roundRect">
             <a:avLst/>
@@ -3486,7 +3488,7 @@
         <p:spPr>
           <a:xfrm>
             <a:off x="4901184" y="5038344"/>
-            <a:ext cx="1719072" cy="155448"/>
+            <a:ext cx="1444752" cy="155448"/>
           </a:xfrm>
           <a:prstGeom prst="rect">
             <a:avLst/>
@@ -3515,14 +3517,102 @@
                 <a:latin typeface="Noto Sans KR"/>
                 <a:ea typeface="Noto Sans KR"/>
               </a:rPr>
-              <a:t>Korean ASR Benchmark</a:t>
-            </a:r>
-          </a:p>
-        </p:txBody>
-      </p:sp>
-      <p:sp>
-        <p:nvSpPr>
-          <p:cNvPr id="11" name="TextBox 10"/>
+              <a:t>Korean ASR</a:t>
+            </a:r>
+          </a:p>
+        </p:txBody>
+      </p:sp>
+      <p:sp>
+        <p:nvSpPr>
+          <p:cNvPr id="11" name="Rounded Rectangle 10"/>
+          <p:cNvSpPr/>
+          <p:nvPr/>
+        </p:nvSpPr>
+        <p:spPr>
+          <a:xfrm>
+            <a:off x="6592824" y="4919472"/>
+            <a:ext cx="1645920" cy="393192"/>
+          </a:xfrm>
+          <a:prstGeom prst="roundRect">
+            <a:avLst/>
+          </a:prstGeom>
+          <a:solidFill>
+            <a:srgbClr val="07111F"/>
+          </a:solidFill>
+          <a:ln>
+            <a:solidFill>
+              <a:srgbClr val="203550"/>
+            </a:solidFill>
+          </a:ln>
+        </p:spPr>
+        <p:style>
+          <a:lnRef idx="1">
+            <a:schemeClr val="accent1"/>
+          </a:lnRef>
+          <a:fillRef idx="3">
+            <a:schemeClr val="accent1"/>
+          </a:fillRef>
+          <a:effectRef idx="2">
+            <a:schemeClr val="accent1"/>
+          </a:effectRef>
+          <a:fontRef idx="minor">
+            <a:schemeClr val="lt1"/>
+          </a:fontRef>
+        </p:style>
+        <p:txBody>
+          <a:bodyPr rtlCol="0" anchor="ctr"/>
+          <a:lstStyle/>
+          <a:p>
+            <a:pPr algn="ctr"/>
+          </a:p>
+        </p:txBody>
+      </p:sp>
+      <p:sp>
+        <p:nvSpPr>
+          <p:cNvPr id="12" name="TextBox 11"/>
+          <p:cNvSpPr txBox="1"/>
+          <p:nvPr/>
+        </p:nvSpPr>
+        <p:spPr>
+          <a:xfrm>
+            <a:off x="6693408" y="5038344"/>
+            <a:ext cx="1444752" cy="155448"/>
+          </a:xfrm>
+          <a:prstGeom prst="rect">
+            <a:avLst/>
+          </a:prstGeom>
+          <a:noFill/>
+        </p:spPr>
+        <p:txBody>
+          <a:bodyPr wrap="none" lIns="18288" rIns="18288" tIns="18288" bIns="18288" anchor="t">
+            <a:spAutoFit/>
+          </a:bodyPr>
+          <a:lstStyle/>
+          <a:p>
+            <a:pPr algn="ctr">
+              <a:lnSpc>
+                <a:spcPct val="105000"/>
+              </a:lnSpc>
+              <a:spcAft>
+                <a:spcPts val="0"/>
+              </a:spcAft>
+            </a:pPr>
+            <a:r>
+              <a:rPr sz="950" b="1" lang="ko-KR">
+                <a:solidFill>
+                  <a:srgbClr val="9AF56D"/>
+                </a:solidFill>
+                <a:latin typeface="Noto Sans KR"/>
+                <a:ea typeface="Noto Sans KR"/>
+              </a:rPr>
+              <a:t>EvidenceOps Agent</a:t>
+            </a:r>
+          </a:p>
+        </p:txBody>
+      </p:sp>
+      <p:sp>
+        <p:nvSpPr>
+          <p:cNvPr id="13" name="TextBox 12"/>
           <p:cNvSpPr txBox="1"/>
           <p:nvPr/>
         </p:nvSpPr>
@@ -3627,7 +3717,7 @@
                 <a:latin typeface="Noto Sans KR"/>
                 <a:ea typeface="Noto Sans KR"/>
               </a:rPr>
-              <a:t>DEVELOPER OWNERSHIP</a:t>
+              <a:t>EVIDENCEOPS · VERIFIED RESULT</a:t>
             </a:r>
           </a:p>
         </p:txBody>
@@ -3670,7 +3760,7 @@
                 <a:latin typeface="Noto Sans KR"/>
                 <a:ea typeface="Noto Sans KR"/>
               </a:rPr>
-              <a:t>제가 직접 닫은 문제</a:t>
+              <a:t>실행보다 중요한 것은 증거와 중단 경계</a:t>
             </a:r>
           </a:p>
         </p:txBody>
@@ -3713,7 +3803,7 @@
                 <a:latin typeface="Noto Sans KR"/>
                 <a:ea typeface="Noto Sans KR"/>
               </a:rPr>
-              <a:t>구현 범위는 모델 호출이 아니라 데이터·서빙·측정·운영 자동화 전체입니다.</a:t>
+              <a:t>세 프로젝트의 계약을 한 큐에서 검증하고 실행 사건을 SHA-256 hash chain으로 연결했습니다.</a:t>
             </a:r>
           </a:p>
         </p:txBody>
@@ -3761,26 +3851,642 @@
           </a:p>
         </p:txBody>
       </p:sp>
-      <p:sp>
-        <p:nvSpPr>
-          <p:cNvPr id="6" name="Rounded Rectangle 5"/>
+      <p:graphicFrame>
+        <p:nvGraphicFramePr>
+          <p:cNvPr id="6" name="Table 5"/>
+          <p:cNvGraphicFramePr>
+            <a:graphicFrameLocks noGrp="1"/>
+          </p:cNvGraphicFramePr>
+          <p:nvPr/>
+        </p:nvGraphicFramePr>
+        <p:xfrm>
+          <a:off x="658368" y="1901952"/>
+          <a:ext cx="10881360" cy="3584448"/>
+        </p:xfrm>
+        <a:graphic>
+          <a:graphicData uri="http://schemas.openxmlformats.org/drawingml/2006/table">
+            <a:tbl>
+              <a:tblPr firstRow="1" bandRow="1">
+                <a:tableStyleId>{5C22544A-7EE6-4342-B048-85BDC9FD1C3A}</a:tableStyleId>
+              </a:tblPr>
+              <a:tblGrid>
+                <a:gridCol w="2720340"/>
+                <a:gridCol w="2720340"/>
+                <a:gridCol w="2720340"/>
+                <a:gridCol w="2720340"/>
+              </a:tblGrid>
+              <a:tr h="597408">
+                <a:tc>
+                  <a:txBody>
+                    <a:bodyPr/>
+                    <a:lstStyle/>
+                    <a:p>
+                      <a:pPr algn="l"/>
+                      <a:r>
+                        <a:rPr sz="1050" b="1" lang="ko-KR">
+                          <a:solidFill>
+                            <a:srgbClr val="F3F7FD"/>
+                          </a:solidFill>
+                          <a:latin typeface="Noto Sans KR"/>
+                          <a:ea typeface="Noto Sans KR"/>
+                        </a:rPr>
+                        <a:t>항목</a:t>
+                      </a:r>
+                    </a:p>
+                  </a:txBody>
+                  <a:tcPr marL="82296" marR="82296" marT="45720" marB="45720">
+                    <a:solidFill>
+                      <a:srgbClr val="10263A"/>
+                    </a:solidFill>
+                  </a:tcPr>
+                </a:tc>
+                <a:tc>
+                  <a:txBody>
+                    <a:bodyPr/>
+                    <a:lstStyle/>
+                    <a:p>
+                      <a:pPr algn="ctr"/>
+                      <a:r>
+                        <a:rPr sz="1050" b="1" lang="ko-KR">
+                          <a:solidFill>
+                            <a:srgbClr val="F3F7FD"/>
+                          </a:solidFill>
+                          <a:latin typeface="DejaVu Sans Mono"/>
+                          <a:ea typeface="DejaVu Sans Mono"/>
+                        </a:rPr>
+                        <a:t>구현 계약</a:t>
+                      </a:r>
+                    </a:p>
+                  </a:txBody>
+                  <a:tcPr marL="82296" marR="82296" marT="45720" marB="45720">
+                    <a:solidFill>
+                      <a:srgbClr val="10263A"/>
+                    </a:solidFill>
+                  </a:tcPr>
+                </a:tc>
+                <a:tc>
+                  <a:txBody>
+                    <a:bodyPr/>
+                    <a:lstStyle/>
+                    <a:p>
+                      <a:pPr algn="ctr"/>
+                      <a:r>
+                        <a:rPr sz="1050" b="1" lang="ko-KR">
+                          <a:solidFill>
+                            <a:srgbClr val="F3F7FD"/>
+                          </a:solidFill>
+                          <a:latin typeface="DejaVu Sans Mono"/>
+                          <a:ea typeface="DejaVu Sans Mono"/>
+                        </a:rPr>
+                        <a:t>실측 결과</a:t>
+                      </a:r>
+                    </a:p>
+                  </a:txBody>
+                  <a:tcPr marL="82296" marR="82296" marT="45720" marB="45720">
+                    <a:solidFill>
+                      <a:srgbClr val="10263A"/>
+                    </a:solidFill>
+                  </a:tcPr>
+                </a:tc>
+                <a:tc>
+                  <a:txBody>
+                    <a:bodyPr/>
+                    <a:lstStyle/>
+                    <a:p>
+                      <a:pPr algn="ctr"/>
+                      <a:r>
+                        <a:rPr sz="1050" b="1" lang="ko-KR">
+                          <a:solidFill>
+                            <a:srgbClr val="F3F7FD"/>
+                          </a:solidFill>
+                          <a:latin typeface="DejaVu Sans Mono"/>
+                          <a:ea typeface="DejaVu Sans Mono"/>
+                        </a:rPr>
+                        <a:t>Failure boundary</a:t>
+                      </a:r>
+                    </a:p>
+                  </a:txBody>
+                  <a:tcPr marL="82296" marR="82296" marT="45720" marB="45720">
+                    <a:solidFill>
+                      <a:srgbClr val="10263A"/>
+                    </a:solidFill>
+                  </a:tcPr>
+                </a:tc>
+              </a:tr>
+              <a:tr h="597408">
+                <a:tc>
+                  <a:txBody>
+                    <a:bodyPr/>
+                    <a:lstStyle/>
+                    <a:p>
+                      <a:pPr algn="l"/>
+                      <a:r>
+                        <a:rPr sz="1050" b="0" lang="ko-KR">
+                          <a:solidFill>
+                            <a:srgbClr val="F3F7FD"/>
+                          </a:solidFill>
+                          <a:latin typeface="Noto Sans KR"/>
+                          <a:ea typeface="Noto Sans KR"/>
+                        </a:rPr>
+                        <a:t>Agent run</a:t>
+                      </a:r>
+                    </a:p>
+                  </a:txBody>
+                  <a:tcPr marL="82296" marR="82296" marT="45720" marB="45720">
+                    <a:solidFill>
+                      <a:srgbClr val="0E1D30"/>
+                    </a:solidFill>
+                  </a:tcPr>
+                </a:tc>
+                <a:tc>
+                  <a:txBody>
+                    <a:bodyPr/>
+                    <a:lstStyle/>
+                    <a:p>
+                      <a:pPr algn="ctr"/>
+                      <a:r>
+                        <a:rPr sz="1050" b="0" lang="ko-KR">
+                          <a:solidFill>
+                            <a:srgbClr val="9AF56D"/>
+                          </a:solidFill>
+                          <a:latin typeface="DejaVu Sans Mono"/>
+                          <a:ea typeface="DejaVu Sans Mono"/>
+                        </a:rPr>
+                        <a:t>10-state machine + checkpoint</a:t>
+                      </a:r>
+                    </a:p>
+                  </a:txBody>
+                  <a:tcPr marL="82296" marR="82296" marT="45720" marB="45720">
+                    <a:solidFill>
+                      <a:srgbClr val="0E1D30"/>
+                    </a:solidFill>
+                  </a:tcPr>
+                </a:tc>
+                <a:tc>
+                  <a:txBody>
+                    <a:bodyPr/>
+                    <a:lstStyle/>
+                    <a:p>
+                      <a:pPr algn="ctr"/>
+                      <a:r>
+                        <a:rPr sz="1050" b="0" lang="ko-KR">
+                          <a:solidFill>
+                            <a:srgbClr val="9AF56D"/>
+                          </a:solidFill>
+                          <a:latin typeface="DejaVu Sans Mono"/>
+                          <a:ea typeface="DejaVu Sans Mono"/>
+                        </a:rPr>
+                        <a:t>6 / 6 jobs PASS</a:t>
+                      </a:r>
+                    </a:p>
+                  </a:txBody>
+                  <a:tcPr marL="82296" marR="82296" marT="45720" marB="45720">
+                    <a:solidFill>
+                      <a:srgbClr val="0E1D30"/>
+                    </a:solidFill>
+                  </a:tcPr>
+                </a:tc>
+                <a:tc>
+                  <a:txBody>
+                    <a:bodyPr/>
+                    <a:lstStyle/>
+                    <a:p>
+                      <a:pPr algn="ctr"/>
+                      <a:r>
+                        <a:rPr sz="1050" b="0" lang="ko-KR">
+                          <a:solidFill>
+                            <a:srgbClr val="9AF56D"/>
+                          </a:solidFill>
+                          <a:latin typeface="DejaVu Sans Mono"/>
+                          <a:ea typeface="DejaVu Sans Mono"/>
+                        </a:rPr>
+                        <a:t>완료 job 재실행 금지</a:t>
+                      </a:r>
+                    </a:p>
+                  </a:txBody>
+                  <a:tcPr marL="82296" marR="82296" marT="45720" marB="45720">
+                    <a:solidFill>
+                      <a:srgbClr val="0E1D30"/>
+                    </a:solidFill>
+                  </a:tcPr>
+                </a:tc>
+              </a:tr>
+              <a:tr h="597408">
+                <a:tc>
+                  <a:txBody>
+                    <a:bodyPr/>
+                    <a:lstStyle/>
+                    <a:p>
+                      <a:pPr algn="l"/>
+                      <a:r>
+                        <a:rPr sz="1050" b="0" lang="ko-KR">
+                          <a:solidFill>
+                            <a:srgbClr val="F3F7FD"/>
+                          </a:solidFill>
+                          <a:latin typeface="Noto Sans KR"/>
+                          <a:ea typeface="Noto Sans KR"/>
+                        </a:rPr>
+                        <a:t>Execution</a:t>
+                      </a:r>
+                    </a:p>
+                  </a:txBody>
+                  <a:tcPr marL="82296" marR="82296" marT="45720" marB="45720">
+                    <a:solidFill>
+                      <a:srgbClr val="0E1D30"/>
+                    </a:solidFill>
+                  </a:tcPr>
+                </a:tc>
+                <a:tc>
+                  <a:txBody>
+                    <a:bodyPr/>
+                    <a:lstStyle/>
+                    <a:p>
+                      <a:pPr algn="ctr"/>
+                      <a:r>
+                        <a:rPr sz="1050" b="0" lang="ko-KR">
+                          <a:solidFill>
+                            <a:srgbClr val="9AF56D"/>
+                          </a:solidFill>
+                          <a:latin typeface="DejaVu Sans Mono"/>
+                          <a:ea typeface="DejaVu Sans Mono"/>
+                        </a:rPr>
+                        <a:t>sequential queue + detach</a:t>
+                      </a:r>
+                    </a:p>
+                  </a:txBody>
+                  <a:tcPr marL="82296" marR="82296" marT="45720" marB="45720">
+                    <a:solidFill>
+                      <a:srgbClr val="0E1D30"/>
+                    </a:solidFill>
+                  </a:tcPr>
+                </a:tc>
+                <a:tc>
+                  <a:txBody>
+                    <a:bodyPr/>
+                    <a:lstStyle/>
+                    <a:p>
+                      <a:pPr algn="ctr"/>
+                      <a:r>
+                        <a:rPr sz="1050" b="0" lang="ko-KR">
+                          <a:solidFill>
+                            <a:srgbClr val="9AF56D"/>
+                          </a:solidFill>
+                          <a:latin typeface="DejaVu Sans Mono"/>
+                          <a:ea typeface="DejaVu Sans Mono"/>
+                        </a:rPr>
+                        <a:t>14.460s</a:t>
+                      </a:r>
+                    </a:p>
+                  </a:txBody>
+                  <a:tcPr marL="82296" marR="82296" marT="45720" marB="45720">
+                    <a:solidFill>
+                      <a:srgbClr val="0E1D30"/>
+                    </a:solidFill>
+                  </a:tcPr>
+                </a:tc>
+                <a:tc>
+                  <a:txBody>
+                    <a:bodyPr/>
+                    <a:lstStyle/>
+                    <a:p>
+                      <a:pPr algn="ctr"/>
+                      <a:r>
+                        <a:rPr sz="1050" b="0" lang="ko-KR">
+                          <a:solidFill>
+                            <a:srgbClr val="9AF56D"/>
+                          </a:solidFill>
+                          <a:latin typeface="DejaVu Sans Mono"/>
+                          <a:ea typeface="DejaVu Sans Mono"/>
+                        </a:rPr>
+                        <a:t>interruption 후 resume</a:t>
+                      </a:r>
+                    </a:p>
+                  </a:txBody>
+                  <a:tcPr marL="82296" marR="82296" marT="45720" marB="45720">
+                    <a:solidFill>
+                      <a:srgbClr val="0E1D30"/>
+                    </a:solidFill>
+                  </a:tcPr>
+                </a:tc>
+              </a:tr>
+              <a:tr h="597408">
+                <a:tc>
+                  <a:txBody>
+                    <a:bodyPr/>
+                    <a:lstStyle/>
+                    <a:p>
+                      <a:pPr algn="l"/>
+                      <a:r>
+                        <a:rPr sz="1050" b="0" lang="ko-KR">
+                          <a:solidFill>
+                            <a:srgbClr val="F3F7FD"/>
+                          </a:solidFill>
+                          <a:latin typeface="Noto Sans KR"/>
+                          <a:ea typeface="Noto Sans KR"/>
+                        </a:rPr>
+                        <a:t>Resource</a:t>
+                      </a:r>
+                    </a:p>
+                  </a:txBody>
+                  <a:tcPr marL="82296" marR="82296" marT="45720" marB="45720">
+                    <a:solidFill>
+                      <a:srgbClr val="0E1D30"/>
+                    </a:solidFill>
+                  </a:tcPr>
+                </a:tc>
+                <a:tc>
+                  <a:txBody>
+                    <a:bodyPr/>
+                    <a:lstStyle/>
+                    <a:p>
+                      <a:pPr algn="ctr"/>
+                      <a:r>
+                        <a:rPr sz="1050" b="0" lang="ko-KR">
+                          <a:solidFill>
+                            <a:srgbClr val="9AF56D"/>
+                          </a:solidFill>
+                          <a:latin typeface="DejaVu Sans Mono"/>
+                          <a:ea typeface="DejaVu Sans Mono"/>
+                        </a:rPr>
+                        <a:t>physical GPU 1 exclusive</a:t>
+                      </a:r>
+                    </a:p>
+                  </a:txBody>
+                  <a:tcPr marL="82296" marR="82296" marT="45720" marB="45720">
+                    <a:solidFill>
+                      <a:srgbClr val="0E1D30"/>
+                    </a:solidFill>
+                  </a:tcPr>
+                </a:tc>
+                <a:tc>
+                  <a:txBody>
+                    <a:bodyPr/>
+                    <a:lstStyle/>
+                    <a:p>
+                      <a:pPr algn="ctr"/>
+                      <a:r>
+                        <a:rPr sz="1050" b="0" lang="ko-KR">
+                          <a:solidFill>
+                            <a:srgbClr val="9AF56D"/>
+                          </a:solidFill>
+                          <a:latin typeface="DejaVu Sans Mono"/>
+                          <a:ea typeface="DejaVu Sans Mono"/>
+                        </a:rPr>
+                        <a:t>GPU executions 0</a:t>
+                      </a:r>
+                    </a:p>
+                  </a:txBody>
+                  <a:tcPr marL="82296" marR="82296" marT="45720" marB="45720">
+                    <a:solidFill>
+                      <a:srgbClr val="0E1D30"/>
+                    </a:solidFill>
+                  </a:tcPr>
+                </a:tc>
+                <a:tc>
+                  <a:txBody>
+                    <a:bodyPr/>
+                    <a:lstStyle/>
+                    <a:p>
+                      <a:pPr algn="ctr"/>
+                      <a:r>
+                        <a:rPr sz="1050" b="0" lang="ko-KR">
+                          <a:solidFill>
+                            <a:srgbClr val="9AF56D"/>
+                          </a:solidFill>
+                          <a:latin typeface="DejaVu Sans Mono"/>
+                          <a:ea typeface="DejaVu Sans Mono"/>
+                        </a:rPr>
+                        <a:t>CPU에서 CUDA 비노출</a:t>
+                      </a:r>
+                    </a:p>
+                  </a:txBody>
+                  <a:tcPr marL="82296" marR="82296" marT="45720" marB="45720">
+                    <a:solidFill>
+                      <a:srgbClr val="0E1D30"/>
+                    </a:solidFill>
+                  </a:tcPr>
+                </a:tc>
+              </a:tr>
+              <a:tr h="597408">
+                <a:tc>
+                  <a:txBody>
+                    <a:bodyPr/>
+                    <a:lstStyle/>
+                    <a:p>
+                      <a:pPr algn="l"/>
+                      <a:r>
+                        <a:rPr sz="1050" b="0" lang="ko-KR">
+                          <a:solidFill>
+                            <a:srgbClr val="F3F7FD"/>
+                          </a:solidFill>
+                          <a:latin typeface="Noto Sans KR"/>
+                          <a:ea typeface="Noto Sans KR"/>
+                        </a:rPr>
+                        <a:t>Evidence</a:t>
+                      </a:r>
+                    </a:p>
+                  </a:txBody>
+                  <a:tcPr marL="82296" marR="82296" marT="45720" marB="45720">
+                    <a:solidFill>
+                      <a:srgbClr val="0E1D30"/>
+                    </a:solidFill>
+                  </a:tcPr>
+                </a:tc>
+                <a:tc>
+                  <a:txBody>
+                    <a:bodyPr/>
+                    <a:lstStyle/>
+                    <a:p>
+                      <a:pPr algn="ctr"/>
+                      <a:r>
+                        <a:rPr sz="1050" b="0" lang="ko-KR">
+                          <a:solidFill>
+                            <a:srgbClr val="9AF56D"/>
+                          </a:solidFill>
+                          <a:latin typeface="DejaVu Sans Mono"/>
+                          <a:ea typeface="DejaVu Sans Mono"/>
+                        </a:rPr>
+                        <a:t>log hash + audit chain</a:t>
+                      </a:r>
+                    </a:p>
+                  </a:txBody>
+                  <a:tcPr marL="82296" marR="82296" marT="45720" marB="45720">
+                    <a:solidFill>
+                      <a:srgbClr val="0E1D30"/>
+                    </a:solidFill>
+                  </a:tcPr>
+                </a:tc>
+                <a:tc>
+                  <a:txBody>
+                    <a:bodyPr/>
+                    <a:lstStyle/>
+                    <a:p>
+                      <a:pPr algn="ctr"/>
+                      <a:r>
+                        <a:rPr sz="1050" b="0" lang="ko-KR">
+                          <a:solidFill>
+                            <a:srgbClr val="9AF56D"/>
+                          </a:solidFill>
+                          <a:latin typeface="DejaVu Sans Mono"/>
+                          <a:ea typeface="DejaVu Sans Mono"/>
+                        </a:rPr>
+                        <a:t>VERIFIED</a:t>
+                      </a:r>
+                    </a:p>
+                  </a:txBody>
+                  <a:tcPr marL="82296" marR="82296" marT="45720" marB="45720">
+                    <a:solidFill>
+                      <a:srgbClr val="0E1D30"/>
+                    </a:solidFill>
+                  </a:tcPr>
+                </a:tc>
+                <a:tc>
+                  <a:txBody>
+                    <a:bodyPr/>
+                    <a:lstStyle/>
+                    <a:p>
+                      <a:pPr algn="ctr"/>
+                      <a:r>
+                        <a:rPr sz="1050" b="0" lang="ko-KR">
+                          <a:solidFill>
+                            <a:srgbClr val="9AF56D"/>
+                          </a:solidFill>
+                          <a:latin typeface="DejaVu Sans Mono"/>
+                          <a:ea typeface="DejaVu Sans Mono"/>
+                        </a:rPr>
+                        <a:t>변조 시 chain 검증 실패</a:t>
+                      </a:r>
+                    </a:p>
+                  </a:txBody>
+                  <a:tcPr marL="82296" marR="82296" marT="45720" marB="45720">
+                    <a:solidFill>
+                      <a:srgbClr val="0E1D30"/>
+                    </a:solidFill>
+                  </a:tcPr>
+                </a:tc>
+              </a:tr>
+              <a:tr h="597408">
+                <a:tc>
+                  <a:txBody>
+                    <a:bodyPr/>
+                    <a:lstStyle/>
+                    <a:p>
+                      <a:pPr algn="l"/>
+                      <a:r>
+                        <a:rPr sz="1050" b="0" lang="ko-KR">
+                          <a:solidFill>
+                            <a:srgbClr val="F3F7FD"/>
+                          </a:solidFill>
+                          <a:latin typeface="Noto Sans KR"/>
+                          <a:ea typeface="Noto Sans KR"/>
+                        </a:rPr>
+                        <a:t>Interface</a:t>
+                      </a:r>
+                    </a:p>
+                  </a:txBody>
+                  <a:tcPr marL="82296" marR="82296" marT="45720" marB="45720">
+                    <a:solidFill>
+                      <a:srgbClr val="0E1D30"/>
+                    </a:solidFill>
+                  </a:tcPr>
+                </a:tc>
+                <a:tc>
+                  <a:txBody>
+                    <a:bodyPr/>
+                    <a:lstStyle/>
+                    <a:p>
+                      <a:pPr algn="ctr"/>
+                      <a:r>
+                        <a:rPr sz="1050" b="0" lang="ko-KR">
+                          <a:solidFill>
+                            <a:srgbClr val="9AF56D"/>
+                          </a:solidFill>
+                          <a:latin typeface="DejaVu Sans Mono"/>
+                          <a:ea typeface="DejaVu Sans Mono"/>
+                        </a:rPr>
+                        <a:t>CLI + MCP v2</a:t>
+                      </a:r>
+                    </a:p>
+                  </a:txBody>
+                  <a:tcPr marL="82296" marR="82296" marT="45720" marB="45720">
+                    <a:solidFill>
+                      <a:srgbClr val="0E1D30"/>
+                    </a:solidFill>
+                  </a:tcPr>
+                </a:tc>
+                <a:tc>
+                  <a:txBody>
+                    <a:bodyPr/>
+                    <a:lstStyle/>
+                    <a:p>
+                      <a:pPr algn="ctr"/>
+                      <a:r>
+                        <a:rPr sz="1050" b="0" lang="ko-KR">
+                          <a:solidFill>
+                            <a:srgbClr val="9AF56D"/>
+                          </a:solidFill>
+                          <a:latin typeface="DejaVu Sans Mono"/>
+                          <a:ea typeface="DejaVu Sans Mono"/>
+                        </a:rPr>
+                        <a:t>7 tools</a:t>
+                      </a:r>
+                    </a:p>
+                  </a:txBody>
+                  <a:tcPr marL="82296" marR="82296" marT="45720" marB="45720">
+                    <a:solidFill>
+                      <a:srgbClr val="0E1D30"/>
+                    </a:solidFill>
+                  </a:tcPr>
+                </a:tc>
+                <a:tc>
+                  <a:txBody>
+                    <a:bodyPr/>
+                    <a:lstStyle/>
+                    <a:p>
+                      <a:pPr algn="ctr"/>
+                      <a:r>
+                        <a:rPr sz="1050" b="0" lang="ko-KR">
+                          <a:solidFill>
+                            <a:srgbClr val="9AF56D"/>
+                          </a:solidFill>
+                          <a:latin typeface="DejaVu Sans Mono"/>
+                          <a:ea typeface="DejaVu Sans Mono"/>
+                        </a:rPr>
+                        <a:t>policy 우회 경로 없음</a:t>
+                      </a:r>
+                    </a:p>
+                  </a:txBody>
+                  <a:tcPr marL="82296" marR="82296" marT="45720" marB="45720">
+                    <a:solidFill>
+                      <a:srgbClr val="0E1D30"/>
+                    </a:solidFill>
+                  </a:tcPr>
+                </a:tc>
+              </a:tr>
+            </a:tbl>
+          </a:graphicData>
+        </a:graphic>
+      </p:graphicFrame>
+      <p:sp>
+        <p:nvSpPr>
+          <p:cNvPr id="7" name="Rounded Rectangle 6"/>
           <p:cNvSpPr/>
           <p:nvPr/>
         </p:nvSpPr>
         <p:spPr>
           <a:xfrm>
-            <a:off x="658368" y="2011680"/>
-            <a:ext cx="3502152" cy="3246120"/>
+            <a:off x="658368" y="5779008"/>
+            <a:ext cx="10881360" cy="502920"/>
           </a:xfrm>
           <a:prstGeom prst="roundRect">
             <a:avLst/>
           </a:prstGeom>
           <a:solidFill>
-            <a:srgbClr val="10263A"/>
+            <a:srgbClr val="07111F"/>
           </a:solidFill>
-          <a:ln>
+          <a:ln w="15240">
             <a:solidFill>
-              <a:srgbClr val="203550"/>
+              <a:srgbClr val="FFC857"/>
             </a:solidFill>
           </a:ln>
         </p:spPr>
@@ -3808,14 +4514,14 @@
       </p:sp>
       <p:sp>
         <p:nvSpPr>
-          <p:cNvPr id="7" name="TextBox 6"/>
-          <p:cNvSpPr txBox="1"/>
-          <p:nvPr/>
-        </p:nvSpPr>
-        <p:spPr>
-          <a:xfrm>
-            <a:off x="868680" y="2258568"/>
-            <a:ext cx="3063240" cy="228600"/>
+          <p:cNvPr id="8" name="TextBox 7"/>
+          <p:cNvSpPr txBox="1"/>
+          <p:nvPr/>
+        </p:nvSpPr>
+        <p:spPr>
+          <a:xfrm>
+            <a:off x="859536" y="5907024"/>
+            <a:ext cx="10469880" cy="210312"/>
           </a:xfrm>
           <a:prstGeom prst="rect">
             <a:avLst/>
@@ -3837,28 +4543,28 @@
               </a:spcAft>
             </a:pPr>
             <a:r>
-              <a:rPr sz="1000" b="1" lang="ko-KR">
-                <a:solidFill>
-                  <a:srgbClr val="38D6FF"/>
+              <a:rPr sz="1150" b="1" lang="ko-KR">
+                <a:solidFill>
+                  <a:srgbClr val="FFC857"/>
                 </a:solidFill>
                 <a:latin typeface="Noto Sans KR"/>
                 <a:ea typeface="Noto Sans KR"/>
               </a:rPr>
-              <a:t>Inference</a:t>
-            </a:r>
-          </a:p>
-        </p:txBody>
-      </p:sp>
-      <p:sp>
-        <p:nvSpPr>
-          <p:cNvPr id="8" name="TextBox 7"/>
-          <p:cNvSpPr txBox="1"/>
-          <p:nvPr/>
-        </p:nvSpPr>
-        <p:spPr>
-          <a:xfrm>
-            <a:off x="868680" y="2788920"/>
-            <a:ext cx="3063240" cy="475488"/>
+              <a:t>NEEDS_ATTENTION은 자동 재시도하지 않으며 사람이 확인 · LLM triage NOT_NEEDED</a:t>
+            </a:r>
+          </a:p>
+        </p:txBody>
+      </p:sp>
+      <p:sp>
+        <p:nvSpPr>
+          <p:cNvPr id="9" name="TextBox 8"/>
+          <p:cNvSpPr txBox="1"/>
+          <p:nvPr/>
+        </p:nvSpPr>
+        <p:spPr>
+          <a:xfrm>
+            <a:off x="658368" y="6510528"/>
+            <a:ext cx="4754880" cy="164592"/>
           </a:xfrm>
           <a:prstGeom prst="rect">
             <a:avLst/>
@@ -3880,582 +4586,13 @@
               </a:spcAft>
             </a:pPr>
             <a:r>
-              <a:rPr sz="2700" b="1" lang="ko-KR">
-                <a:solidFill>
-                  <a:srgbClr val="F3F7FD"/>
+              <a:rPr sz="850" b="0" lang="ko-KR">
+                <a:solidFill>
+                  <a:srgbClr val="9DB0C7"/>
                 </a:solidFill>
                 <a:latin typeface="Noto Sans KR"/>
                 <a:ea typeface="Noto Sans KR"/>
               </a:rPr>
-              <a:t>Runtime</a:t>
-            </a:r>
-          </a:p>
-        </p:txBody>
-      </p:sp>
-      <p:sp>
-        <p:nvSpPr>
-          <p:cNvPr id="9" name="TextBox 8"/>
-          <p:cNvSpPr txBox="1"/>
-          <p:nvPr/>
-        </p:nvSpPr>
-        <p:spPr>
-          <a:xfrm>
-            <a:off x="868680" y="3502152"/>
-            <a:ext cx="3017520" cy="1078992"/>
-          </a:xfrm>
-          <a:prstGeom prst="rect">
-            <a:avLst/>
-          </a:prstGeom>
-          <a:noFill/>
-        </p:spPr>
-        <p:txBody>
-          <a:bodyPr wrap="none" lIns="18288" rIns="18288" tIns="18288" bIns="18288" anchor="t">
-            <a:spAutoFit/>
-          </a:bodyPr>
-          <a:lstStyle/>
-          <a:p>
-            <a:pPr algn="l">
-              <a:lnSpc>
-                <a:spcPct val="105000"/>
-              </a:lnSpc>
-              <a:spcAft>
-                <a:spcPts val="0"/>
-              </a:spcAft>
-            </a:pPr>
-            <a:r>
-              <a:rPr sz="1500" b="0" lang="ko-KR">
-                <a:solidFill>
-                  <a:srgbClr val="9DB0C7"/>
-                </a:solidFill>
-                <a:latin typeface="Noto Sans KR"/>
-                <a:ea typeface="Noto Sans KR"/>
-              </a:rPr>
-              <a:t>vLLM·Transformers, single-GPU scheduling, memory budget, TTFT·RTF</a:t>
-            </a:r>
-          </a:p>
-        </p:txBody>
-      </p:sp>
-      <p:sp>
-        <p:nvSpPr>
-          <p:cNvPr id="10" name="Rectangle 9"/>
-          <p:cNvSpPr/>
-          <p:nvPr/>
-        </p:nvSpPr>
-        <p:spPr>
-          <a:xfrm>
-            <a:off x="868680" y="4873752"/>
-            <a:ext cx="914400" cy="45720"/>
-          </a:xfrm>
-          <a:prstGeom prst="rect">
-            <a:avLst/>
-          </a:prstGeom>
-          <a:solidFill>
-            <a:srgbClr val="38D6FF"/>
-          </a:solidFill>
-          <a:ln>
-            <a:solidFill>
-              <a:srgbClr val="38D6FF"/>
-            </a:solidFill>
-          </a:ln>
-        </p:spPr>
-        <p:style>
-          <a:lnRef idx="1">
-            <a:schemeClr val="accent1"/>
-          </a:lnRef>
-          <a:fillRef idx="3">
-            <a:schemeClr val="accent1"/>
-          </a:fillRef>
-          <a:effectRef idx="2">
-            <a:schemeClr val="accent1"/>
-          </a:effectRef>
-          <a:fontRef idx="minor">
-            <a:schemeClr val="lt1"/>
-          </a:fontRef>
-        </p:style>
-        <p:txBody>
-          <a:bodyPr rtlCol="0" anchor="ctr"/>
-          <a:lstStyle/>
-          <a:p>
-            <a:pPr algn="ctr"/>
-          </a:p>
-        </p:txBody>
-      </p:sp>
-      <p:sp>
-        <p:nvSpPr>
-          <p:cNvPr id="11" name="Rounded Rectangle 10"/>
-          <p:cNvSpPr/>
-          <p:nvPr/>
-        </p:nvSpPr>
-        <p:spPr>
-          <a:xfrm>
-            <a:off x="4343400" y="2011680"/>
-            <a:ext cx="3502152" cy="3246120"/>
-          </a:xfrm>
-          <a:prstGeom prst="roundRect">
-            <a:avLst/>
-          </a:prstGeom>
-          <a:solidFill>
-            <a:srgbClr val="10263A"/>
-          </a:solidFill>
-          <a:ln>
-            <a:solidFill>
-              <a:srgbClr val="203550"/>
-            </a:solidFill>
-          </a:ln>
-        </p:spPr>
-        <p:style>
-          <a:lnRef idx="1">
-            <a:schemeClr val="accent1"/>
-          </a:lnRef>
-          <a:fillRef idx="3">
-            <a:schemeClr val="accent1"/>
-          </a:fillRef>
-          <a:effectRef idx="2">
-            <a:schemeClr val="accent1"/>
-          </a:effectRef>
-          <a:fontRef idx="minor">
-            <a:schemeClr val="lt1"/>
-          </a:fontRef>
-        </p:style>
-        <p:txBody>
-          <a:bodyPr rtlCol="0" anchor="ctr"/>
-          <a:lstStyle/>
-          <a:p>
-            <a:pPr algn="ctr"/>
-          </a:p>
-        </p:txBody>
-      </p:sp>
-      <p:sp>
-        <p:nvSpPr>
-          <p:cNvPr id="12" name="TextBox 11"/>
-          <p:cNvSpPr txBox="1"/>
-          <p:nvPr/>
-        </p:nvSpPr>
-        <p:spPr>
-          <a:xfrm>
-            <a:off x="4553712" y="2258568"/>
-            <a:ext cx="3063240" cy="228600"/>
-          </a:xfrm>
-          <a:prstGeom prst="rect">
-            <a:avLst/>
-          </a:prstGeom>
-          <a:noFill/>
-        </p:spPr>
-        <p:txBody>
-          <a:bodyPr wrap="none" lIns="18288" rIns="18288" tIns="18288" bIns="18288" anchor="t">
-            <a:spAutoFit/>
-          </a:bodyPr>
-          <a:lstStyle/>
-          <a:p>
-            <a:pPr algn="l">
-              <a:lnSpc>
-                <a:spcPct val="105000"/>
-              </a:lnSpc>
-              <a:spcAft>
-                <a:spcPts val="0"/>
-              </a:spcAft>
-            </a:pPr>
-            <a:r>
-              <a:rPr sz="1000" b="1" lang="ko-KR">
-                <a:solidFill>
-                  <a:srgbClr val="9AF56D"/>
-                </a:solidFill>
-                <a:latin typeface="Noto Sans KR"/>
-                <a:ea typeface="Noto Sans KR"/>
-              </a:rPr>
-              <a:t>Evaluation</a:t>
-            </a:r>
-          </a:p>
-        </p:txBody>
-      </p:sp>
-      <p:sp>
-        <p:nvSpPr>
-          <p:cNvPr id="13" name="TextBox 12"/>
-          <p:cNvSpPr txBox="1"/>
-          <p:nvPr/>
-        </p:nvSpPr>
-        <p:spPr>
-          <a:xfrm>
-            <a:off x="4553712" y="2788920"/>
-            <a:ext cx="3063240" cy="475488"/>
-          </a:xfrm>
-          <a:prstGeom prst="rect">
-            <a:avLst/>
-          </a:prstGeom>
-          <a:noFill/>
-        </p:spPr>
-        <p:txBody>
-          <a:bodyPr wrap="none" lIns="18288" rIns="18288" tIns="18288" bIns="18288" anchor="t">
-            <a:spAutoFit/>
-          </a:bodyPr>
-          <a:lstStyle/>
-          <a:p>
-            <a:pPr algn="l">
-              <a:lnSpc>
-                <a:spcPct val="105000"/>
-              </a:lnSpc>
-              <a:spcAft>
-                <a:spcPts val="0"/>
-              </a:spcAft>
-            </a:pPr>
-            <a:r>
-              <a:rPr sz="2700" b="1" lang="ko-KR">
-                <a:solidFill>
-                  <a:srgbClr val="F3F7FD"/>
-                </a:solidFill>
-                <a:latin typeface="Noto Sans KR"/>
-                <a:ea typeface="Noto Sans KR"/>
-              </a:rPr>
-              <a:t>Evidence</a:t>
-            </a:r>
-          </a:p>
-        </p:txBody>
-      </p:sp>
-      <p:sp>
-        <p:nvSpPr>
-          <p:cNvPr id="14" name="TextBox 13"/>
-          <p:cNvSpPr txBox="1"/>
-          <p:nvPr/>
-        </p:nvSpPr>
-        <p:spPr>
-          <a:xfrm>
-            <a:off x="4553712" y="3502152"/>
-            <a:ext cx="3017520" cy="1078992"/>
-          </a:xfrm>
-          <a:prstGeom prst="rect">
-            <a:avLst/>
-          </a:prstGeom>
-          <a:noFill/>
-        </p:spPr>
-        <p:txBody>
-          <a:bodyPr wrap="none" lIns="18288" rIns="18288" tIns="18288" bIns="18288" anchor="t">
-            <a:spAutoFit/>
-          </a:bodyPr>
-          <a:lstStyle/>
-          <a:p>
-            <a:pPr algn="l">
-              <a:lnSpc>
-                <a:spcPct val="105000"/>
-              </a:lnSpc>
-              <a:spcAft>
-                <a:spcPts val="0"/>
-              </a:spcAft>
-            </a:pPr>
-            <a:r>
-              <a:rPr sz="1500" b="0" lang="ko-KR">
-                <a:solidFill>
-                  <a:srgbClr val="9DB0C7"/>
-                </a:solidFill>
-                <a:latin typeface="Noto Sans KR"/>
-                <a:ea typeface="Noto Sans KR"/>
-              </a:rPr>
-              <a:t>RAG quality·ACL·injection, WER·CER·entity, immutable provenance</a:t>
-            </a:r>
-          </a:p>
-        </p:txBody>
-      </p:sp>
-      <p:sp>
-        <p:nvSpPr>
-          <p:cNvPr id="15" name="Rectangle 14"/>
-          <p:cNvSpPr/>
-          <p:nvPr/>
-        </p:nvSpPr>
-        <p:spPr>
-          <a:xfrm>
-            <a:off x="4553712" y="4873752"/>
-            <a:ext cx="914400" cy="45720"/>
-          </a:xfrm>
-          <a:prstGeom prst="rect">
-            <a:avLst/>
-          </a:prstGeom>
-          <a:solidFill>
-            <a:srgbClr val="9AF56D"/>
-          </a:solidFill>
-          <a:ln>
-            <a:solidFill>
-              <a:srgbClr val="9AF56D"/>
-            </a:solidFill>
-          </a:ln>
-        </p:spPr>
-        <p:style>
-          <a:lnRef idx="1">
-            <a:schemeClr val="accent1"/>
-          </a:lnRef>
-          <a:fillRef idx="3">
-            <a:schemeClr val="accent1"/>
-          </a:fillRef>
-          <a:effectRef idx="2">
-            <a:schemeClr val="accent1"/>
-          </a:effectRef>
-          <a:fontRef idx="minor">
-            <a:schemeClr val="lt1"/>
-          </a:fontRef>
-        </p:style>
-        <p:txBody>
-          <a:bodyPr rtlCol="0" anchor="ctr"/>
-          <a:lstStyle/>
-          <a:p>
-            <a:pPr algn="ctr"/>
-          </a:p>
-        </p:txBody>
-      </p:sp>
-      <p:sp>
-        <p:nvSpPr>
-          <p:cNvPr id="16" name="Rounded Rectangle 15"/>
-          <p:cNvSpPr/>
-          <p:nvPr/>
-        </p:nvSpPr>
-        <p:spPr>
-          <a:xfrm>
-            <a:off x="8028432" y="2011680"/>
-            <a:ext cx="3502152" cy="3246120"/>
-          </a:xfrm>
-          <a:prstGeom prst="roundRect">
-            <a:avLst/>
-          </a:prstGeom>
-          <a:solidFill>
-            <a:srgbClr val="10263A"/>
-          </a:solidFill>
-          <a:ln>
-            <a:solidFill>
-              <a:srgbClr val="203550"/>
-            </a:solidFill>
-          </a:ln>
-        </p:spPr>
-        <p:style>
-          <a:lnRef idx="1">
-            <a:schemeClr val="accent1"/>
-          </a:lnRef>
-          <a:fillRef idx="3">
-            <a:schemeClr val="accent1"/>
-          </a:fillRef>
-          <a:effectRef idx="2">
-            <a:schemeClr val="accent1"/>
-          </a:effectRef>
-          <a:fontRef idx="minor">
-            <a:schemeClr val="lt1"/>
-          </a:fontRef>
-        </p:style>
-        <p:txBody>
-          <a:bodyPr rtlCol="0" anchor="ctr"/>
-          <a:lstStyle/>
-          <a:p>
-            <a:pPr algn="ctr"/>
-          </a:p>
-        </p:txBody>
-      </p:sp>
-      <p:sp>
-        <p:nvSpPr>
-          <p:cNvPr id="17" name="TextBox 16"/>
-          <p:cNvSpPr txBox="1"/>
-          <p:nvPr/>
-        </p:nvSpPr>
-        <p:spPr>
-          <a:xfrm>
-            <a:off x="8238744" y="2258568"/>
-            <a:ext cx="3063240" cy="228600"/>
-          </a:xfrm>
-          <a:prstGeom prst="rect">
-            <a:avLst/>
-          </a:prstGeom>
-          <a:noFill/>
-        </p:spPr>
-        <p:txBody>
-          <a:bodyPr wrap="none" lIns="18288" rIns="18288" tIns="18288" bIns="18288" anchor="t">
-            <a:spAutoFit/>
-          </a:bodyPr>
-          <a:lstStyle/>
-          <a:p>
-            <a:pPr algn="l">
-              <a:lnSpc>
-                <a:spcPct val="105000"/>
-              </a:lnSpc>
-              <a:spcAft>
-                <a:spcPts val="0"/>
-              </a:spcAft>
-            </a:pPr>
-            <a:r>
-              <a:rPr sz="1000" b="1" lang="ko-KR">
-                <a:solidFill>
-                  <a:srgbClr val="FFC857"/>
-                </a:solidFill>
-                <a:latin typeface="Noto Sans KR"/>
-                <a:ea typeface="Noto Sans KR"/>
-              </a:rPr>
-              <a:t>Operations</a:t>
-            </a:r>
-          </a:p>
-        </p:txBody>
-      </p:sp>
-      <p:sp>
-        <p:nvSpPr>
-          <p:cNvPr id="18" name="TextBox 17"/>
-          <p:cNvSpPr txBox="1"/>
-          <p:nvPr/>
-        </p:nvSpPr>
-        <p:spPr>
-          <a:xfrm>
-            <a:off x="8238744" y="2788920"/>
-            <a:ext cx="3063240" cy="475488"/>
-          </a:xfrm>
-          <a:prstGeom prst="rect">
-            <a:avLst/>
-          </a:prstGeom>
-          <a:noFill/>
-        </p:spPr>
-        <p:txBody>
-          <a:bodyPr wrap="none" lIns="18288" rIns="18288" tIns="18288" bIns="18288" anchor="t">
-            <a:spAutoFit/>
-          </a:bodyPr>
-          <a:lstStyle/>
-          <a:p>
-            <a:pPr algn="l">
-              <a:lnSpc>
-                <a:spcPct val="105000"/>
-              </a:lnSpc>
-              <a:spcAft>
-                <a:spcPts val="0"/>
-              </a:spcAft>
-            </a:pPr>
-            <a:r>
-              <a:rPr sz="2700" b="1" lang="ko-KR">
-                <a:solidFill>
-                  <a:srgbClr val="F3F7FD"/>
-                </a:solidFill>
-                <a:latin typeface="Noto Sans KR"/>
-                <a:ea typeface="Noto Sans KR"/>
-              </a:rPr>
-              <a:t>Safety</a:t>
-            </a:r>
-          </a:p>
-        </p:txBody>
-      </p:sp>
-      <p:sp>
-        <p:nvSpPr>
-          <p:cNvPr id="19" name="TextBox 18"/>
-          <p:cNvSpPr txBox="1"/>
-          <p:nvPr/>
-        </p:nvSpPr>
-        <p:spPr>
-          <a:xfrm>
-            <a:off x="8238744" y="3502152"/>
-            <a:ext cx="3017520" cy="1078992"/>
-          </a:xfrm>
-          <a:prstGeom prst="rect">
-            <a:avLst/>
-          </a:prstGeom>
-          <a:noFill/>
-        </p:spPr>
-        <p:txBody>
-          <a:bodyPr wrap="none" lIns="18288" rIns="18288" tIns="18288" bIns="18288" anchor="t">
-            <a:spAutoFit/>
-          </a:bodyPr>
-          <a:lstStyle/>
-          <a:p>
-            <a:pPr algn="l">
-              <a:lnSpc>
-                <a:spcPct val="105000"/>
-              </a:lnSpc>
-              <a:spcAft>
-                <a:spcPts val="0"/>
-              </a:spcAft>
-            </a:pPr>
-            <a:r>
-              <a:rPr sz="1500" b="0" lang="ko-KR">
-                <a:solidFill>
-                  <a:srgbClr val="9DB0C7"/>
-                </a:solidFill>
-                <a:latin typeface="Noto Sans KR"/>
-                <a:ea typeface="Noto Sans KR"/>
-              </a:rPr>
-              <a:t>Docker Compose, metrics·alerts, regression gate, incident·rollback, CI</a:t>
-            </a:r>
-          </a:p>
-        </p:txBody>
-      </p:sp>
-      <p:sp>
-        <p:nvSpPr>
-          <p:cNvPr id="20" name="Rectangle 19"/>
-          <p:cNvSpPr/>
-          <p:nvPr/>
-        </p:nvSpPr>
-        <p:spPr>
-          <a:xfrm>
-            <a:off x="8238744" y="4873752"/>
-            <a:ext cx="914400" cy="45720"/>
-          </a:xfrm>
-          <a:prstGeom prst="rect">
-            <a:avLst/>
-          </a:prstGeom>
-          <a:solidFill>
-            <a:srgbClr val="FFC857"/>
-          </a:solidFill>
-          <a:ln>
-            <a:solidFill>
-              <a:srgbClr val="FFC857"/>
-            </a:solidFill>
-          </a:ln>
-        </p:spPr>
-        <p:style>
-          <a:lnRef idx="1">
-            <a:schemeClr val="accent1"/>
-          </a:lnRef>
-          <a:fillRef idx="3">
-            <a:schemeClr val="accent1"/>
-          </a:fillRef>
-          <a:effectRef idx="2">
-            <a:schemeClr val="accent1"/>
-          </a:effectRef>
-          <a:fontRef idx="minor">
-            <a:schemeClr val="lt1"/>
-          </a:fontRef>
-        </p:style>
-        <p:txBody>
-          <a:bodyPr rtlCol="0" anchor="ctr"/>
-          <a:lstStyle/>
-          <a:p>
-            <a:pPr algn="ctr"/>
-          </a:p>
-        </p:txBody>
-      </p:sp>
-      <p:sp>
-        <p:nvSpPr>
-          <p:cNvPr id="21" name="TextBox 20"/>
-          <p:cNvSpPr txBox="1"/>
-          <p:nvPr/>
-        </p:nvSpPr>
-        <p:spPr>
-          <a:xfrm>
-            <a:off x="658368" y="6510528"/>
-            <a:ext cx="4754880" cy="164592"/>
-          </a:xfrm>
-          <a:prstGeom prst="rect">
-            <a:avLst/>
-          </a:prstGeom>
-          <a:noFill/>
-        </p:spPr>
-        <p:txBody>
-          <a:bodyPr wrap="none" lIns="18288" rIns="18288" tIns="18288" bIns="18288" anchor="t">
-            <a:spAutoFit/>
-          </a:bodyPr>
-          <a:lstStyle/>
-          <a:p>
-            <a:pPr algn="l">
-              <a:lnSpc>
-                <a:spcPct val="105000"/>
-              </a:lnSpc>
-              <a:spcAft>
-                <a:spcPts val="0"/>
-              </a:spcAft>
-            </a:pPr>
-            <a:r>
-              <a:rPr sz="850" b="0" lang="ko-KR">
-                <a:solidFill>
-                  <a:srgbClr val="9DB0C7"/>
-                </a:solidFill>
-                <a:latin typeface="Noto Sans KR"/>
-                <a:ea typeface="Noto Sans KR"/>
-              </a:rPr>
               <a:t>김대균 · AI Inference Portfolio</a:t>
             </a:r>
           </a:p>
@@ -4463,7 +4600,7 @@
       </p:sp>
       <p:sp>
         <p:nvSpPr>
-          <p:cNvPr id="22" name="TextBox 21"/>
+          <p:cNvPr id="10" name="TextBox 9"/>
           <p:cNvSpPr txBox="1"/>
           <p:nvPr/>
         </p:nvSpPr>
@@ -4568,7 +4705,7 @@
                 <a:latin typeface="Noto Sans KR"/>
                 <a:ea typeface="Noto Sans KR"/>
               </a:rPr>
-              <a:t>VALIDATION STATUS</a:t>
+              <a:t>ENGINEERING CONTRACTS</a:t>
             </a:r>
           </a:p>
         </p:txBody>
@@ -4611,7 +4748,7 @@
                 <a:latin typeface="Noto Sans KR"/>
                 <a:ea typeface="Noto Sans KR"/>
               </a:rPr>
-              <a:t>현재 완성 상태</a:t>
+              <a:t>재현성을 코드로 강제</a:t>
             </a:r>
           </a:p>
         </p:txBody>
@@ -4654,7 +4791,7 @@
                 <a:latin typeface="Noto Sans KR"/>
                 <a:ea typeface="Noto Sans KR"/>
               </a:rPr>
-              <a:t>채용 담당자가 바로 열어보고, 개발자가 명령으로 다시 검증할 수 있습니다.</a:t>
+              <a:t>좋은 숫자보다 그 숫자가 어디서 왔는지 다시 확인할 수 있게 만들었습니다.</a:t>
             </a:r>
           </a:p>
         </p:txBody>
@@ -4726,7 +4863,2057 @@
                 <a:gridCol w="2720340"/>
                 <a:gridCol w="2720340"/>
               </a:tblGrid>
-              <a:tr h="896112">
+              <a:tr h="716889">
+                <a:tc>
+                  <a:txBody>
+                    <a:bodyPr/>
+                    <a:lstStyle/>
+                    <a:p>
+                      <a:pPr algn="l"/>
+                      <a:r>
+                        <a:rPr sz="1050" b="1" lang="ko-KR">
+                          <a:solidFill>
+                            <a:srgbClr val="F3F7FD"/>
+                          </a:solidFill>
+                          <a:latin typeface="Noto Sans KR"/>
+                          <a:ea typeface="Noto Sans KR"/>
+                        </a:rPr>
+                        <a:t>프로젝트</a:t>
+                      </a:r>
+                    </a:p>
+                  </a:txBody>
+                  <a:tcPr marL="82296" marR="82296" marT="45720" marB="45720">
+                    <a:solidFill>
+                      <a:srgbClr val="10263A"/>
+                    </a:solidFill>
+                  </a:tcPr>
+                </a:tc>
+                <a:tc>
+                  <a:txBody>
+                    <a:bodyPr/>
+                    <a:lstStyle/>
+                    <a:p>
+                      <a:pPr algn="ctr"/>
+                      <a:r>
+                        <a:rPr sz="1050" b="1" lang="ko-KR">
+                          <a:solidFill>
+                            <a:srgbClr val="F3F7FD"/>
+                          </a:solidFill>
+                          <a:latin typeface="DejaVu Sans Mono"/>
+                          <a:ea typeface="DejaVu Sans Mono"/>
+                        </a:rPr>
+                        <a:t>입력 계약</a:t>
+                      </a:r>
+                    </a:p>
+                  </a:txBody>
+                  <a:tcPr marL="82296" marR="82296" marT="45720" marB="45720">
+                    <a:solidFill>
+                      <a:srgbClr val="10263A"/>
+                    </a:solidFill>
+                  </a:tcPr>
+                </a:tc>
+                <a:tc>
+                  <a:txBody>
+                    <a:bodyPr/>
+                    <a:lstStyle/>
+                    <a:p>
+                      <a:pPr algn="ctr"/>
+                      <a:r>
+                        <a:rPr sz="1050" b="1" lang="ko-KR">
+                          <a:solidFill>
+                            <a:srgbClr val="F3F7FD"/>
+                          </a:solidFill>
+                          <a:latin typeface="DejaVu Sans Mono"/>
+                          <a:ea typeface="DejaVu Sans Mono"/>
+                        </a:rPr>
+                        <a:t>검증</a:t>
+                      </a:r>
+                    </a:p>
+                  </a:txBody>
+                  <a:tcPr marL="82296" marR="82296" marT="45720" marB="45720">
+                    <a:solidFill>
+                      <a:srgbClr val="10263A"/>
+                    </a:solidFill>
+                  </a:tcPr>
+                </a:tc>
+                <a:tc>
+                  <a:txBody>
+                    <a:bodyPr/>
+                    <a:lstStyle/>
+                    <a:p>
+                      <a:pPr algn="ctr"/>
+                      <a:r>
+                        <a:rPr sz="1050" b="1" lang="ko-KR">
+                          <a:solidFill>
+                            <a:srgbClr val="F3F7FD"/>
+                          </a:solidFill>
+                          <a:latin typeface="DejaVu Sans Mono"/>
+                          <a:ea typeface="DejaVu Sans Mono"/>
+                        </a:rPr>
+                        <a:t>산출물</a:t>
+                      </a:r>
+                    </a:p>
+                  </a:txBody>
+                  <a:tcPr marL="82296" marR="82296" marT="45720" marB="45720">
+                    <a:solidFill>
+                      <a:srgbClr val="10263A"/>
+                    </a:solidFill>
+                  </a:tcPr>
+                </a:tc>
+              </a:tr>
+              <a:tr h="716889">
+                <a:tc>
+                  <a:txBody>
+                    <a:bodyPr/>
+                    <a:lstStyle/>
+                    <a:p>
+                      <a:pPr algn="l"/>
+                      <a:r>
+                        <a:rPr sz="1050" b="0" lang="ko-KR">
+                          <a:solidFill>
+                            <a:srgbClr val="F3F7FD"/>
+                          </a:solidFill>
+                          <a:latin typeface="Noto Sans KR"/>
+                          <a:ea typeface="Noto Sans KR"/>
+                        </a:rPr>
+                        <a:t>FinLLM Lab</a:t>
+                      </a:r>
+                    </a:p>
+                  </a:txBody>
+                  <a:tcPr marL="82296" marR="82296" marT="45720" marB="45720">
+                    <a:solidFill>
+                      <a:srgbClr val="0E1D30"/>
+                    </a:solidFill>
+                  </a:tcPr>
+                </a:tc>
+                <a:tc>
+                  <a:txBody>
+                    <a:bodyPr/>
+                    <a:lstStyle/>
+                    <a:p>
+                      <a:pPr algn="ctr"/>
+                      <a:r>
+                        <a:rPr sz="1050" b="0" lang="ko-KR">
+                          <a:solidFill>
+                            <a:srgbClr val="9AF56D"/>
+                          </a:solidFill>
+                          <a:latin typeface="DejaVu Sans Mono"/>
+                          <a:ea typeface="DejaVu Sans Mono"/>
+                        </a:rPr>
+                        <a:t>model·tokenizer revision, ACL corpus</a:t>
+                      </a:r>
+                    </a:p>
+                  </a:txBody>
+                  <a:tcPr marL="82296" marR="82296" marT="45720" marB="45720">
+                    <a:solidFill>
+                      <a:srgbClr val="0E1D30"/>
+                    </a:solidFill>
+                  </a:tcPr>
+                </a:tc>
+                <a:tc>
+                  <a:txBody>
+                    <a:bodyPr/>
+                    <a:lstStyle/>
+                    <a:p>
+                      <a:pPr algn="ctr"/>
+                      <a:r>
+                        <a:rPr sz="1050" b="0" lang="ko-KR">
+                          <a:solidFill>
+                            <a:srgbClr val="9AF56D"/>
+                          </a:solidFill>
+                          <a:latin typeface="DejaVu Sans Mono"/>
+                          <a:ea typeface="DejaVu Sans Mono"/>
+                        </a:rPr>
+                        <a:t>schema + 11-stage gate</a:t>
+                      </a:r>
+                    </a:p>
+                  </a:txBody>
+                  <a:tcPr marL="82296" marR="82296" marT="45720" marB="45720">
+                    <a:solidFill>
+                      <a:srgbClr val="0E1D30"/>
+                    </a:solidFill>
+                  </a:tcPr>
+                </a:tc>
+                <a:tc>
+                  <a:txBody>
+                    <a:bodyPr/>
+                    <a:lstStyle/>
+                    <a:p>
+                      <a:pPr algn="ctr"/>
+                      <a:r>
+                        <a:rPr sz="1050" b="0" lang="ko-KR">
+                          <a:solidFill>
+                            <a:srgbClr val="9AF56D"/>
+                          </a:solidFill>
+                          <a:latin typeface="DejaVu Sans Mono"/>
+                          <a:ea typeface="DejaVu Sans Mono"/>
+                        </a:rPr>
+                        <a:t>result JSON · ADR · incident</a:t>
+                      </a:r>
+                    </a:p>
+                  </a:txBody>
+                  <a:tcPr marL="82296" marR="82296" marT="45720" marB="45720">
+                    <a:solidFill>
+                      <a:srgbClr val="0E1D30"/>
+                    </a:solidFill>
+                  </a:tcPr>
+                </a:tc>
+              </a:tr>
+              <a:tr h="716889">
+                <a:tc>
+                  <a:txBody>
+                    <a:bodyPr/>
+                    <a:lstStyle/>
+                    <a:p>
+                      <a:pPr algn="l"/>
+                      <a:r>
+                        <a:rPr sz="1050" b="0" lang="ko-KR">
+                          <a:solidFill>
+                            <a:srgbClr val="F3F7FD"/>
+                          </a:solidFill>
+                          <a:latin typeface="Noto Sans KR"/>
+                          <a:ea typeface="Noto Sans KR"/>
+                        </a:rPr>
+                        <a:t>Quantization Autopsy</a:t>
+                      </a:r>
+                    </a:p>
+                  </a:txBody>
+                  <a:tcPr marL="82296" marR="82296" marT="45720" marB="45720">
+                    <a:solidFill>
+                      <a:srgbClr val="0E1D30"/>
+                    </a:solidFill>
+                  </a:tcPr>
+                </a:tc>
+                <a:tc>
+                  <a:txBody>
+                    <a:bodyPr/>
+                    <a:lstStyle/>
+                    <a:p>
+                      <a:pPr algn="ctr"/>
+                      <a:r>
+                        <a:rPr sz="1050" b="0" lang="ko-KR">
+                          <a:solidFill>
+                            <a:srgbClr val="9AF56D"/>
+                          </a:solidFill>
+                          <a:latin typeface="DejaVu Sans Mono"/>
+                          <a:ea typeface="DejaVu Sans Mono"/>
+                        </a:rPr>
+                        <a:t>18 immutable runs</a:t>
+                      </a:r>
+                    </a:p>
+                  </a:txBody>
+                  <a:tcPr marL="82296" marR="82296" marT="45720" marB="45720">
+                    <a:solidFill>
+                      <a:srgbClr val="0E1D30"/>
+                    </a:solidFill>
+                  </a:tcPr>
+                </a:tc>
+                <a:tc>
+                  <a:txBody>
+                    <a:bodyPr/>
+                    <a:lstStyle/>
+                    <a:p>
+                      <a:pPr algn="ctr"/>
+                      <a:r>
+                        <a:rPr sz="1050" b="0" lang="ko-KR">
+                          <a:solidFill>
+                            <a:srgbClr val="9AF56D"/>
+                          </a:solidFill>
+                          <a:latin typeface="DejaVu Sans Mono"/>
+                          <a:ea typeface="DejaVu Sans Mono"/>
+                        </a:rPr>
+                        <a:t>3회 반복·provenance</a:t>
+                      </a:r>
+                    </a:p>
+                  </a:txBody>
+                  <a:tcPr marL="82296" marR="82296" marT="45720" marB="45720">
+                    <a:solidFill>
+                      <a:srgbClr val="0E1D30"/>
+                    </a:solidFill>
+                  </a:tcPr>
+                </a:tc>
+                <a:tc>
+                  <a:txBody>
+                    <a:bodyPr/>
+                    <a:lstStyle/>
+                    <a:p>
+                      <a:pPr algn="ctr"/>
+                      <a:r>
+                        <a:rPr sz="1050" b="0" lang="ko-KR">
+                          <a:solidFill>
+                            <a:srgbClr val="9AF56D"/>
+                          </a:solidFill>
+                          <a:latin typeface="DejaVu Sans Mono"/>
+                          <a:ea typeface="DejaVu Sans Mono"/>
+                        </a:rPr>
+                        <a:t>JSON · CSV · Markdown · HTML</a:t>
+                      </a:r>
+                    </a:p>
+                  </a:txBody>
+                  <a:tcPr marL="82296" marR="82296" marT="45720" marB="45720">
+                    <a:solidFill>
+                      <a:srgbClr val="0E1D30"/>
+                    </a:solidFill>
+                  </a:tcPr>
+                </a:tc>
+              </a:tr>
+              <a:tr h="716889">
+                <a:tc>
+                  <a:txBody>
+                    <a:bodyPr/>
+                    <a:lstStyle/>
+                    <a:p>
+                      <a:pPr algn="l"/>
+                      <a:r>
+                        <a:rPr sz="1050" b="0" lang="ko-KR">
+                          <a:solidFill>
+                            <a:srgbClr val="F3F7FD"/>
+                          </a:solidFill>
+                          <a:latin typeface="Noto Sans KR"/>
+                          <a:ea typeface="Noto Sans KR"/>
+                        </a:rPr>
+                        <a:t>K-VoiceBench</a:t>
+                      </a:r>
+                    </a:p>
+                  </a:txBody>
+                  <a:tcPr marL="82296" marR="82296" marT="45720" marB="45720">
+                    <a:solidFill>
+                      <a:srgbClr val="0E1D30"/>
+                    </a:solidFill>
+                  </a:tcPr>
+                </a:tc>
+                <a:tc>
+                  <a:txBody>
+                    <a:bodyPr/>
+                    <a:lstStyle/>
+                    <a:p>
+                      <a:pPr algn="ctr"/>
+                      <a:r>
+                        <a:rPr sz="1050" b="0" lang="ko-KR">
+                          <a:solidFill>
+                            <a:srgbClr val="9AF56D"/>
+                          </a:solidFill>
+                          <a:latin typeface="DejaVu Sans Mono"/>
+                          <a:ea typeface="DejaVu Sans Mono"/>
+                        </a:rPr>
+                        <a:t>audio manifest·GPU visibility</a:t>
+                      </a:r>
+                    </a:p>
+                  </a:txBody>
+                  <a:tcPr marL="82296" marR="82296" marT="45720" marB="45720">
+                    <a:solidFill>
+                      <a:srgbClr val="0E1D30"/>
+                    </a:solidFill>
+                  </a:tcPr>
+                </a:tc>
+                <a:tc>
+                  <a:txBody>
+                    <a:bodyPr/>
+                    <a:lstStyle/>
+                    <a:p>
+                      <a:pPr algn="ctr"/>
+                      <a:r>
+                        <a:rPr sz="1050" b="0" lang="ko-KR">
+                          <a:solidFill>
+                            <a:srgbClr val="9AF56D"/>
+                          </a:solidFill>
+                          <a:latin typeface="DejaVu Sans Mono"/>
+                          <a:ea typeface="DejaVu Sans Mono"/>
+                        </a:rPr>
+                        <a:t>WER/CER/entity contract</a:t>
+                      </a:r>
+                    </a:p>
+                  </a:txBody>
+                  <a:tcPr marL="82296" marR="82296" marT="45720" marB="45720">
+                    <a:solidFill>
+                      <a:srgbClr val="0E1D30"/>
+                    </a:solidFill>
+                  </a:tcPr>
+                </a:tc>
+                <a:tc>
+                  <a:txBody>
+                    <a:bodyPr/>
+                    <a:lstStyle/>
+                    <a:p>
+                      <a:pPr algn="ctr"/>
+                      <a:r>
+                        <a:rPr sz="1050" b="0" lang="ko-KR">
+                          <a:solidFill>
+                            <a:srgbClr val="9AF56D"/>
+                          </a:solidFill>
+                          <a:latin typeface="DejaVu Sans Mono"/>
+                          <a:ea typeface="DejaVu Sans Mono"/>
+                        </a:rPr>
+                        <a:t>result JSON · HTML · CI</a:t>
+                      </a:r>
+                    </a:p>
+                  </a:txBody>
+                  <a:tcPr marL="82296" marR="82296" marT="45720" marB="45720">
+                    <a:solidFill>
+                      <a:srgbClr val="0E1D30"/>
+                    </a:solidFill>
+                  </a:tcPr>
+                </a:tc>
+              </a:tr>
+              <a:tr h="716892">
+                <a:tc>
+                  <a:txBody>
+                    <a:bodyPr/>
+                    <a:lstStyle/>
+                    <a:p>
+                      <a:pPr algn="l"/>
+                      <a:r>
+                        <a:rPr sz="1050" b="0" lang="ko-KR">
+                          <a:solidFill>
+                            <a:srgbClr val="F3F7FD"/>
+                          </a:solidFill>
+                          <a:latin typeface="Noto Sans KR"/>
+                          <a:ea typeface="Noto Sans KR"/>
+                        </a:rPr>
+                        <a:t>EvidenceOps Agent</a:t>
+                      </a:r>
+                    </a:p>
+                  </a:txBody>
+                  <a:tcPr marL="82296" marR="82296" marT="45720" marB="45720">
+                    <a:solidFill>
+                      <a:srgbClr val="0E1D30"/>
+                    </a:solidFill>
+                  </a:tcPr>
+                </a:tc>
+                <a:tc>
+                  <a:txBody>
+                    <a:bodyPr/>
+                    <a:lstStyle/>
+                    <a:p>
+                      <a:pPr algn="ctr"/>
+                      <a:r>
+                        <a:rPr sz="1050" b="0" lang="ko-KR">
+                          <a:solidFill>
+                            <a:srgbClr val="9AF56D"/>
+                          </a:solidFill>
+                          <a:latin typeface="DejaVu Sans Mono"/>
+                          <a:ea typeface="DejaVu Sans Mono"/>
+                        </a:rPr>
+                        <a:t>experiment spec·argv allowlist</a:t>
+                      </a:r>
+                    </a:p>
+                  </a:txBody>
+                  <a:tcPr marL="82296" marR="82296" marT="45720" marB="45720">
+                    <a:solidFill>
+                      <a:srgbClr val="0E1D30"/>
+                    </a:solidFill>
+                  </a:tcPr>
+                </a:tc>
+                <a:tc>
+                  <a:txBody>
+                    <a:bodyPr/>
+                    <a:lstStyle/>
+                    <a:p>
+                      <a:pPr algn="ctr"/>
+                      <a:r>
+                        <a:rPr sz="1050" b="0" lang="ko-KR">
+                          <a:solidFill>
+                            <a:srgbClr val="9AF56D"/>
+                          </a:solidFill>
+                          <a:latin typeface="DejaVu Sans Mono"/>
+                          <a:ea typeface="DejaVu Sans Mono"/>
+                        </a:rPr>
+                        <a:t>checkpoint + hash chain</a:t>
+                      </a:r>
+                    </a:p>
+                  </a:txBody>
+                  <a:tcPr marL="82296" marR="82296" marT="45720" marB="45720">
+                    <a:solidFill>
+                      <a:srgbClr val="0E1D30"/>
+                    </a:solidFill>
+                  </a:tcPr>
+                </a:tc>
+                <a:tc>
+                  <a:txBody>
+                    <a:bodyPr/>
+                    <a:lstStyle/>
+                    <a:p>
+                      <a:pPr algn="ctr"/>
+                      <a:r>
+                        <a:rPr sz="1050" b="0" lang="ko-KR">
+                          <a:solidFill>
+                            <a:srgbClr val="9AF56D"/>
+                          </a:solidFill>
+                          <a:latin typeface="DejaVu Sans Mono"/>
+                          <a:ea typeface="DejaVu Sans Mono"/>
+                        </a:rPr>
+                        <a:t>JSON · HTML · MCP · CI</a:t>
+                      </a:r>
+                    </a:p>
+                  </a:txBody>
+                  <a:tcPr marL="82296" marR="82296" marT="45720" marB="45720">
+                    <a:solidFill>
+                      <a:srgbClr val="0E1D30"/>
+                    </a:solidFill>
+                  </a:tcPr>
+                </a:tc>
+              </a:tr>
+            </a:tbl>
+          </a:graphicData>
+        </a:graphic>
+      </p:graphicFrame>
+      <p:sp>
+        <p:nvSpPr>
+          <p:cNvPr id="7" name="Rounded Rectangle 6"/>
+          <p:cNvSpPr/>
+          <p:nvPr/>
+        </p:nvSpPr>
+        <p:spPr>
+          <a:xfrm>
+            <a:off x="658368" y="5779008"/>
+            <a:ext cx="10881360" cy="502920"/>
+          </a:xfrm>
+          <a:prstGeom prst="roundRect">
+            <a:avLst/>
+          </a:prstGeom>
+          <a:solidFill>
+            <a:srgbClr val="07111F"/>
+          </a:solidFill>
+          <a:ln w="15240">
+            <a:solidFill>
+              <a:srgbClr val="FFC857"/>
+            </a:solidFill>
+          </a:ln>
+        </p:spPr>
+        <p:style>
+          <a:lnRef idx="1">
+            <a:schemeClr val="accent1"/>
+          </a:lnRef>
+          <a:fillRef idx="3">
+            <a:schemeClr val="accent1"/>
+          </a:fillRef>
+          <a:effectRef idx="2">
+            <a:schemeClr val="accent1"/>
+          </a:effectRef>
+          <a:fontRef idx="minor">
+            <a:schemeClr val="lt1"/>
+          </a:fontRef>
+        </p:style>
+        <p:txBody>
+          <a:bodyPr rtlCol="0" anchor="ctr"/>
+          <a:lstStyle/>
+          <a:p>
+            <a:pPr algn="ctr"/>
+          </a:p>
+        </p:txBody>
+      </p:sp>
+      <p:sp>
+        <p:nvSpPr>
+          <p:cNvPr id="8" name="TextBox 7"/>
+          <p:cNvSpPr txBox="1"/>
+          <p:nvPr/>
+        </p:nvSpPr>
+        <p:spPr>
+          <a:xfrm>
+            <a:off x="859536" y="5907024"/>
+            <a:ext cx="10469880" cy="210312"/>
+          </a:xfrm>
+          <a:prstGeom prst="rect">
+            <a:avLst/>
+          </a:prstGeom>
+          <a:noFill/>
+        </p:spPr>
+        <p:txBody>
+          <a:bodyPr wrap="none" lIns="18288" rIns="18288" tIns="18288" bIns="18288" anchor="t">
+            <a:spAutoFit/>
+          </a:bodyPr>
+          <a:lstStyle/>
+          <a:p>
+            <a:pPr algn="l">
+              <a:lnSpc>
+                <a:spcPct val="105000"/>
+              </a:lnSpc>
+              <a:spcAft>
+                <a:spcPts val="0"/>
+              </a:spcAft>
+            </a:pPr>
+            <a:r>
+              <a:rPr sz="1150" b="1" lang="ko-KR">
+                <a:solidFill>
+                  <a:srgbClr val="FFC857"/>
+                </a:solidFill>
+                <a:latin typeface="Noto Sans KR"/>
+                <a:ea typeface="Noto Sans KR"/>
+              </a:rPr>
+              <a:t>미실행 항목은 PASS로 바꾸지 않고 NOT_EXECUTED / NOT_EVALUATED로 남김</a:t>
+            </a:r>
+          </a:p>
+        </p:txBody>
+      </p:sp>
+      <p:sp>
+        <p:nvSpPr>
+          <p:cNvPr id="9" name="TextBox 8"/>
+          <p:cNvSpPr txBox="1"/>
+          <p:nvPr/>
+        </p:nvSpPr>
+        <p:spPr>
+          <a:xfrm>
+            <a:off x="658368" y="6510528"/>
+            <a:ext cx="4754880" cy="164592"/>
+          </a:xfrm>
+          <a:prstGeom prst="rect">
+            <a:avLst/>
+          </a:prstGeom>
+          <a:noFill/>
+        </p:spPr>
+        <p:txBody>
+          <a:bodyPr wrap="none" lIns="18288" rIns="18288" tIns="18288" bIns="18288" anchor="t">
+            <a:spAutoFit/>
+          </a:bodyPr>
+          <a:lstStyle/>
+          <a:p>
+            <a:pPr algn="l">
+              <a:lnSpc>
+                <a:spcPct val="105000"/>
+              </a:lnSpc>
+              <a:spcAft>
+                <a:spcPts val="0"/>
+              </a:spcAft>
+            </a:pPr>
+            <a:r>
+              <a:rPr sz="850" b="0" lang="ko-KR">
+                <a:solidFill>
+                  <a:srgbClr val="9DB0C7"/>
+                </a:solidFill>
+                <a:latin typeface="Noto Sans KR"/>
+                <a:ea typeface="Noto Sans KR"/>
+              </a:rPr>
+              <a:t>김대균 · AI Inference Portfolio</a:t>
+            </a:r>
+          </a:p>
+        </p:txBody>
+      </p:sp>
+      <p:sp>
+        <p:nvSpPr>
+          <p:cNvPr id="10" name="TextBox 9"/>
+          <p:cNvSpPr txBox="1"/>
+          <p:nvPr/>
+        </p:nvSpPr>
+        <p:spPr>
+          <a:xfrm>
+            <a:off x="10972800" y="6510528"/>
+            <a:ext cx="548640" cy="164592"/>
+          </a:xfrm>
+          <a:prstGeom prst="rect">
+            <a:avLst/>
+          </a:prstGeom>
+          <a:noFill/>
+        </p:spPr>
+        <p:txBody>
+          <a:bodyPr wrap="none" lIns="18288" rIns="18288" tIns="18288" bIns="18288" anchor="t">
+            <a:spAutoFit/>
+          </a:bodyPr>
+          <a:lstStyle/>
+          <a:p>
+            <a:pPr algn="r">
+              <a:lnSpc>
+                <a:spcPct val="105000"/>
+              </a:lnSpc>
+              <a:spcAft>
+                <a:spcPts val="0"/>
+              </a:spcAft>
+            </a:pPr>
+            <a:r>
+              <a:rPr sz="850" b="0" lang="ko-KR">
+                <a:solidFill>
+                  <a:srgbClr val="9DB0C7"/>
+                </a:solidFill>
+                <a:latin typeface="DejaVu Sans Mono"/>
+                <a:ea typeface="DejaVu Sans Mono"/>
+              </a:rPr>
+              <a:t>11</a:t>
+            </a:r>
+          </a:p>
+        </p:txBody>
+      </p:sp>
+    </p:spTree>
+  </p:cSld>
+  <p:clrMapOvr>
+    <a:masterClrMapping/>
+  </p:clrMapOvr>
+</p:sld>
+</file>
+
+<file path=ppt/slides/slide12.xml><?xml version="1.0" encoding="utf-8"?>
+<p:sld xmlns:a="http://schemas.openxmlformats.org/drawingml/2006/main" xmlns:p="http://schemas.openxmlformats.org/presentationml/2006/main" xmlns:r="http://schemas.openxmlformats.org/officeDocument/2006/relationships">
+  <p:cSld>
+    <p:bg>
+      <p:bgPr>
+        <a:solidFill>
+          <a:srgbClr val="07111F"/>
+        </a:solidFill>
+        <a:effectLst/>
+      </p:bgPr>
+    </p:bg>
+    <p:spTree>
+      <p:nvGrpSpPr>
+        <p:cNvPr id="1" name=""/>
+        <p:cNvGrpSpPr/>
+        <p:nvPr/>
+      </p:nvGrpSpPr>
+      <p:grpSpPr/>
+      <p:sp>
+        <p:nvSpPr>
+          <p:cNvPr id="2" name="TextBox 1"/>
+          <p:cNvSpPr txBox="1"/>
+          <p:nvPr/>
+        </p:nvSpPr>
+        <p:spPr>
+          <a:xfrm>
+            <a:off x="658368" y="347472"/>
+            <a:ext cx="8046720" cy="256032"/>
+          </a:xfrm>
+          <a:prstGeom prst="rect">
+            <a:avLst/>
+          </a:prstGeom>
+          <a:noFill/>
+        </p:spPr>
+        <p:txBody>
+          <a:bodyPr wrap="none" lIns="18288" rIns="18288" tIns="18288" bIns="18288" anchor="t">
+            <a:spAutoFit/>
+          </a:bodyPr>
+          <a:lstStyle/>
+          <a:p>
+            <a:pPr algn="l">
+              <a:lnSpc>
+                <a:spcPct val="105000"/>
+              </a:lnSpc>
+              <a:spcAft>
+                <a:spcPts val="0"/>
+              </a:spcAft>
+            </a:pPr>
+            <a:r>
+              <a:rPr sz="1000" b="1" lang="ko-KR">
+                <a:solidFill>
+                  <a:srgbClr val="38D6FF"/>
+                </a:solidFill>
+                <a:latin typeface="Noto Sans KR"/>
+                <a:ea typeface="Noto Sans KR"/>
+              </a:rPr>
+              <a:t>DEVELOPER OWNERSHIP</a:t>
+            </a:r>
+          </a:p>
+        </p:txBody>
+      </p:sp>
+      <p:sp>
+        <p:nvSpPr>
+          <p:cNvPr id="3" name="TextBox 2"/>
+          <p:cNvSpPr txBox="1"/>
+          <p:nvPr/>
+        </p:nvSpPr>
+        <p:spPr>
+          <a:xfrm>
+            <a:off x="658368" y="694944"/>
+            <a:ext cx="10881360" cy="530352"/>
+          </a:xfrm>
+          <a:prstGeom prst="rect">
+            <a:avLst/>
+          </a:prstGeom>
+          <a:noFill/>
+        </p:spPr>
+        <p:txBody>
+          <a:bodyPr wrap="none" lIns="18288" rIns="18288" tIns="18288" bIns="18288" anchor="t">
+            <a:spAutoFit/>
+          </a:bodyPr>
+          <a:lstStyle/>
+          <a:p>
+            <a:pPr algn="l">
+              <a:lnSpc>
+                <a:spcPct val="105000"/>
+              </a:lnSpc>
+              <a:spcAft>
+                <a:spcPts val="0"/>
+              </a:spcAft>
+            </a:pPr>
+            <a:r>
+              <a:rPr sz="2900" b="1" lang="ko-KR">
+                <a:solidFill>
+                  <a:srgbClr val="F3F7FD"/>
+                </a:solidFill>
+                <a:latin typeface="Noto Sans KR"/>
+                <a:ea typeface="Noto Sans KR"/>
+              </a:rPr>
+              <a:t>제가 직접 닫은 문제</a:t>
+            </a:r>
+          </a:p>
+        </p:txBody>
+      </p:sp>
+      <p:sp>
+        <p:nvSpPr>
+          <p:cNvPr id="4" name="TextBox 3"/>
+          <p:cNvSpPr txBox="1"/>
+          <p:nvPr/>
+        </p:nvSpPr>
+        <p:spPr>
+          <a:xfrm>
+            <a:off x="658368" y="1261872"/>
+            <a:ext cx="10881360" cy="530352"/>
+          </a:xfrm>
+          <a:prstGeom prst="rect">
+            <a:avLst/>
+          </a:prstGeom>
+          <a:noFill/>
+        </p:spPr>
+        <p:txBody>
+          <a:bodyPr wrap="none" lIns="18288" rIns="18288" tIns="18288" bIns="18288" anchor="t">
+            <a:spAutoFit/>
+          </a:bodyPr>
+          <a:lstStyle/>
+          <a:p>
+            <a:pPr algn="l">
+              <a:lnSpc>
+                <a:spcPct val="105000"/>
+              </a:lnSpc>
+              <a:spcAft>
+                <a:spcPts val="0"/>
+              </a:spcAft>
+            </a:pPr>
+            <a:r>
+              <a:rPr sz="1500" b="0" lang="ko-KR">
+                <a:solidFill>
+                  <a:srgbClr val="9DB0C7"/>
+                </a:solidFill>
+                <a:latin typeface="Noto Sans KR"/>
+                <a:ea typeface="Noto Sans KR"/>
+              </a:rPr>
+              <a:t>구현 범위는 모델 호출이 아니라 데이터·서빙·측정·운영 자동화 전체입니다.</a:t>
+            </a:r>
+          </a:p>
+        </p:txBody>
+      </p:sp>
+      <p:sp>
+        <p:nvSpPr>
+          <p:cNvPr id="5" name="TextBox 4"/>
+          <p:cNvSpPr txBox="1"/>
+          <p:nvPr/>
+        </p:nvSpPr>
+        <p:spPr>
+          <a:xfrm>
+            <a:off x="10789920" y="347472"/>
+            <a:ext cx="731520" cy="228600"/>
+          </a:xfrm>
+          <a:prstGeom prst="rect">
+            <a:avLst/>
+          </a:prstGeom>
+          <a:noFill/>
+        </p:spPr>
+        <p:txBody>
+          <a:bodyPr wrap="none" lIns="18288" rIns="18288" tIns="18288" bIns="18288" anchor="t">
+            <a:spAutoFit/>
+          </a:bodyPr>
+          <a:lstStyle/>
+          <a:p>
+            <a:pPr algn="r">
+              <a:lnSpc>
+                <a:spcPct val="105000"/>
+              </a:lnSpc>
+              <a:spcAft>
+                <a:spcPts val="0"/>
+              </a:spcAft>
+            </a:pPr>
+            <a:r>
+              <a:rPr sz="1000" b="0" lang="ko-KR">
+                <a:solidFill>
+                  <a:srgbClr val="9DB0C7"/>
+                </a:solidFill>
+                <a:latin typeface="DejaVu Sans Mono"/>
+                <a:ea typeface="DejaVu Sans Mono"/>
+              </a:rPr>
+              <a:t>12</a:t>
+            </a:r>
+          </a:p>
+        </p:txBody>
+      </p:sp>
+      <p:sp>
+        <p:nvSpPr>
+          <p:cNvPr id="6" name="Rounded Rectangle 5"/>
+          <p:cNvSpPr/>
+          <p:nvPr/>
+        </p:nvSpPr>
+        <p:spPr>
+          <a:xfrm>
+            <a:off x="658368" y="1901952"/>
+            <a:ext cx="5349240" cy="1572768"/>
+          </a:xfrm>
+          <a:prstGeom prst="roundRect">
+            <a:avLst/>
+          </a:prstGeom>
+          <a:solidFill>
+            <a:srgbClr val="10263A"/>
+          </a:solidFill>
+          <a:ln>
+            <a:solidFill>
+              <a:srgbClr val="203550"/>
+            </a:solidFill>
+          </a:ln>
+        </p:spPr>
+        <p:style>
+          <a:lnRef idx="1">
+            <a:schemeClr val="accent1"/>
+          </a:lnRef>
+          <a:fillRef idx="3">
+            <a:schemeClr val="accent1"/>
+          </a:fillRef>
+          <a:effectRef idx="2">
+            <a:schemeClr val="accent1"/>
+          </a:effectRef>
+          <a:fontRef idx="minor">
+            <a:schemeClr val="lt1"/>
+          </a:fontRef>
+        </p:style>
+        <p:txBody>
+          <a:bodyPr rtlCol="0" anchor="ctr"/>
+          <a:lstStyle/>
+          <a:p>
+            <a:pPr algn="ctr"/>
+          </a:p>
+        </p:txBody>
+      </p:sp>
+      <p:sp>
+        <p:nvSpPr>
+          <p:cNvPr id="7" name="TextBox 6"/>
+          <p:cNvSpPr txBox="1"/>
+          <p:nvPr/>
+        </p:nvSpPr>
+        <p:spPr>
+          <a:xfrm>
+            <a:off x="868680" y="2103120"/>
+            <a:ext cx="4928616" cy="201168"/>
+          </a:xfrm>
+          <a:prstGeom prst="rect">
+            <a:avLst/>
+          </a:prstGeom>
+          <a:noFill/>
+        </p:spPr>
+        <p:txBody>
+          <a:bodyPr wrap="none" lIns="18288" rIns="18288" tIns="18288" bIns="18288" anchor="t">
+            <a:spAutoFit/>
+          </a:bodyPr>
+          <a:lstStyle/>
+          <a:p>
+            <a:pPr algn="l">
+              <a:lnSpc>
+                <a:spcPct val="105000"/>
+              </a:lnSpc>
+              <a:spcAft>
+                <a:spcPts val="0"/>
+              </a:spcAft>
+            </a:pPr>
+            <a:r>
+              <a:rPr sz="950" b="1" lang="ko-KR">
+                <a:solidFill>
+                  <a:srgbClr val="38D6FF"/>
+                </a:solidFill>
+                <a:latin typeface="Noto Sans KR"/>
+                <a:ea typeface="Noto Sans KR"/>
+              </a:rPr>
+              <a:t>Inference</a:t>
+            </a:r>
+          </a:p>
+        </p:txBody>
+      </p:sp>
+      <p:sp>
+        <p:nvSpPr>
+          <p:cNvPr id="8" name="TextBox 7"/>
+          <p:cNvSpPr txBox="1"/>
+          <p:nvPr/>
+        </p:nvSpPr>
+        <p:spPr>
+          <a:xfrm>
+            <a:off x="868680" y="2432304"/>
+            <a:ext cx="1371600" cy="310896"/>
+          </a:xfrm>
+          <a:prstGeom prst="rect">
+            <a:avLst/>
+          </a:prstGeom>
+          <a:noFill/>
+        </p:spPr>
+        <p:txBody>
+          <a:bodyPr wrap="none" lIns="18288" rIns="18288" tIns="18288" bIns="18288" anchor="t">
+            <a:spAutoFit/>
+          </a:bodyPr>
+          <a:lstStyle/>
+          <a:p>
+            <a:pPr algn="l">
+              <a:lnSpc>
+                <a:spcPct val="105000"/>
+              </a:lnSpc>
+              <a:spcAft>
+                <a:spcPts val="0"/>
+              </a:spcAft>
+            </a:pPr>
+            <a:r>
+              <a:rPr sz="1900" b="1" lang="ko-KR">
+                <a:solidFill>
+                  <a:srgbClr val="F3F7FD"/>
+                </a:solidFill>
+                <a:latin typeface="Noto Sans KR"/>
+                <a:ea typeface="Noto Sans KR"/>
+              </a:rPr>
+              <a:t>Runtime</a:t>
+            </a:r>
+          </a:p>
+        </p:txBody>
+      </p:sp>
+      <p:sp>
+        <p:nvSpPr>
+          <p:cNvPr id="9" name="TextBox 8"/>
+          <p:cNvSpPr txBox="1"/>
+          <p:nvPr/>
+        </p:nvSpPr>
+        <p:spPr>
+          <a:xfrm>
+            <a:off x="2258568" y="2386584"/>
+            <a:ext cx="3538727" cy="731520"/>
+          </a:xfrm>
+          <a:prstGeom prst="rect">
+            <a:avLst/>
+          </a:prstGeom>
+          <a:noFill/>
+        </p:spPr>
+        <p:txBody>
+          <a:bodyPr wrap="none" lIns="18288" rIns="18288" tIns="18288" bIns="18288" anchor="t">
+            <a:spAutoFit/>
+          </a:bodyPr>
+          <a:lstStyle/>
+          <a:p>
+            <a:pPr algn="l">
+              <a:lnSpc>
+                <a:spcPct val="105000"/>
+              </a:lnSpc>
+              <a:spcAft>
+                <a:spcPts val="0"/>
+              </a:spcAft>
+            </a:pPr>
+            <a:r>
+              <a:rPr sz="1150" b="0" lang="ko-KR">
+                <a:solidFill>
+                  <a:srgbClr val="9DB0C7"/>
+                </a:solidFill>
+                <a:latin typeface="Noto Sans KR"/>
+                <a:ea typeface="Noto Sans KR"/>
+              </a:rPr>
+              <a:t>vLLM·Transformers, single-GPU scheduling, memory budget, TTFT·RTF</a:t>
+            </a:r>
+          </a:p>
+        </p:txBody>
+      </p:sp>
+      <p:sp>
+        <p:nvSpPr>
+          <p:cNvPr id="10" name="Rectangle 9"/>
+          <p:cNvSpPr/>
+          <p:nvPr/>
+        </p:nvSpPr>
+        <p:spPr>
+          <a:xfrm>
+            <a:off x="868680" y="3246120"/>
+            <a:ext cx="786384" cy="36576"/>
+          </a:xfrm>
+          <a:prstGeom prst="rect">
+            <a:avLst/>
+          </a:prstGeom>
+          <a:solidFill>
+            <a:srgbClr val="38D6FF"/>
+          </a:solidFill>
+          <a:ln>
+            <a:solidFill>
+              <a:srgbClr val="38D6FF"/>
+            </a:solidFill>
+          </a:ln>
+        </p:spPr>
+        <p:style>
+          <a:lnRef idx="1">
+            <a:schemeClr val="accent1"/>
+          </a:lnRef>
+          <a:fillRef idx="3">
+            <a:schemeClr val="accent1"/>
+          </a:fillRef>
+          <a:effectRef idx="2">
+            <a:schemeClr val="accent1"/>
+          </a:effectRef>
+          <a:fontRef idx="minor">
+            <a:schemeClr val="lt1"/>
+          </a:fontRef>
+        </p:style>
+        <p:txBody>
+          <a:bodyPr rtlCol="0" anchor="ctr"/>
+          <a:lstStyle/>
+          <a:p>
+            <a:pPr algn="ctr"/>
+          </a:p>
+        </p:txBody>
+      </p:sp>
+      <p:sp>
+        <p:nvSpPr>
+          <p:cNvPr id="11" name="Rounded Rectangle 10"/>
+          <p:cNvSpPr/>
+          <p:nvPr/>
+        </p:nvSpPr>
+        <p:spPr>
+          <a:xfrm>
+            <a:off x="6190488" y="1901952"/>
+            <a:ext cx="5349240" cy="1572768"/>
+          </a:xfrm>
+          <a:prstGeom prst="roundRect">
+            <a:avLst/>
+          </a:prstGeom>
+          <a:solidFill>
+            <a:srgbClr val="10263A"/>
+          </a:solidFill>
+          <a:ln>
+            <a:solidFill>
+              <a:srgbClr val="203550"/>
+            </a:solidFill>
+          </a:ln>
+        </p:spPr>
+        <p:style>
+          <a:lnRef idx="1">
+            <a:schemeClr val="accent1"/>
+          </a:lnRef>
+          <a:fillRef idx="3">
+            <a:schemeClr val="accent1"/>
+          </a:fillRef>
+          <a:effectRef idx="2">
+            <a:schemeClr val="accent1"/>
+          </a:effectRef>
+          <a:fontRef idx="minor">
+            <a:schemeClr val="lt1"/>
+          </a:fontRef>
+        </p:style>
+        <p:txBody>
+          <a:bodyPr rtlCol="0" anchor="ctr"/>
+          <a:lstStyle/>
+          <a:p>
+            <a:pPr algn="ctr"/>
+          </a:p>
+        </p:txBody>
+      </p:sp>
+      <p:sp>
+        <p:nvSpPr>
+          <p:cNvPr id="12" name="TextBox 11"/>
+          <p:cNvSpPr txBox="1"/>
+          <p:nvPr/>
+        </p:nvSpPr>
+        <p:spPr>
+          <a:xfrm>
+            <a:off x="6400800" y="2103120"/>
+            <a:ext cx="4928616" cy="201168"/>
+          </a:xfrm>
+          <a:prstGeom prst="rect">
+            <a:avLst/>
+          </a:prstGeom>
+          <a:noFill/>
+        </p:spPr>
+        <p:txBody>
+          <a:bodyPr wrap="none" lIns="18288" rIns="18288" tIns="18288" bIns="18288" anchor="t">
+            <a:spAutoFit/>
+          </a:bodyPr>
+          <a:lstStyle/>
+          <a:p>
+            <a:pPr algn="l">
+              <a:lnSpc>
+                <a:spcPct val="105000"/>
+              </a:lnSpc>
+              <a:spcAft>
+                <a:spcPts val="0"/>
+              </a:spcAft>
+            </a:pPr>
+            <a:r>
+              <a:rPr sz="950" b="1" lang="ko-KR">
+                <a:solidFill>
+                  <a:srgbClr val="9AF56D"/>
+                </a:solidFill>
+                <a:latin typeface="Noto Sans KR"/>
+                <a:ea typeface="Noto Sans KR"/>
+              </a:rPr>
+              <a:t>Evaluation</a:t>
+            </a:r>
+          </a:p>
+        </p:txBody>
+      </p:sp>
+      <p:sp>
+        <p:nvSpPr>
+          <p:cNvPr id="13" name="TextBox 12"/>
+          <p:cNvSpPr txBox="1"/>
+          <p:nvPr/>
+        </p:nvSpPr>
+        <p:spPr>
+          <a:xfrm>
+            <a:off x="6400800" y="2432304"/>
+            <a:ext cx="1371600" cy="310896"/>
+          </a:xfrm>
+          <a:prstGeom prst="rect">
+            <a:avLst/>
+          </a:prstGeom>
+          <a:noFill/>
+        </p:spPr>
+        <p:txBody>
+          <a:bodyPr wrap="none" lIns="18288" rIns="18288" tIns="18288" bIns="18288" anchor="t">
+            <a:spAutoFit/>
+          </a:bodyPr>
+          <a:lstStyle/>
+          <a:p>
+            <a:pPr algn="l">
+              <a:lnSpc>
+                <a:spcPct val="105000"/>
+              </a:lnSpc>
+              <a:spcAft>
+                <a:spcPts val="0"/>
+              </a:spcAft>
+            </a:pPr>
+            <a:r>
+              <a:rPr sz="1900" b="1" lang="ko-KR">
+                <a:solidFill>
+                  <a:srgbClr val="F3F7FD"/>
+                </a:solidFill>
+                <a:latin typeface="Noto Sans KR"/>
+                <a:ea typeface="Noto Sans KR"/>
+              </a:rPr>
+              <a:t>Evidence</a:t>
+            </a:r>
+          </a:p>
+        </p:txBody>
+      </p:sp>
+      <p:sp>
+        <p:nvSpPr>
+          <p:cNvPr id="14" name="TextBox 13"/>
+          <p:cNvSpPr txBox="1"/>
+          <p:nvPr/>
+        </p:nvSpPr>
+        <p:spPr>
+          <a:xfrm>
+            <a:off x="7790688" y="2386584"/>
+            <a:ext cx="3538727" cy="731520"/>
+          </a:xfrm>
+          <a:prstGeom prst="rect">
+            <a:avLst/>
+          </a:prstGeom>
+          <a:noFill/>
+        </p:spPr>
+        <p:txBody>
+          <a:bodyPr wrap="none" lIns="18288" rIns="18288" tIns="18288" bIns="18288" anchor="t">
+            <a:spAutoFit/>
+          </a:bodyPr>
+          <a:lstStyle/>
+          <a:p>
+            <a:pPr algn="l">
+              <a:lnSpc>
+                <a:spcPct val="105000"/>
+              </a:lnSpc>
+              <a:spcAft>
+                <a:spcPts val="0"/>
+              </a:spcAft>
+            </a:pPr>
+            <a:r>
+              <a:rPr sz="1150" b="0" lang="ko-KR">
+                <a:solidFill>
+                  <a:srgbClr val="9DB0C7"/>
+                </a:solidFill>
+                <a:latin typeface="Noto Sans KR"/>
+                <a:ea typeface="Noto Sans KR"/>
+              </a:rPr>
+              <a:t>RAG quality·ACL·injection, WER·CER·entity, immutable provenance</a:t>
+            </a:r>
+          </a:p>
+        </p:txBody>
+      </p:sp>
+      <p:sp>
+        <p:nvSpPr>
+          <p:cNvPr id="15" name="Rectangle 14"/>
+          <p:cNvSpPr/>
+          <p:nvPr/>
+        </p:nvSpPr>
+        <p:spPr>
+          <a:xfrm>
+            <a:off x="6400800" y="3246120"/>
+            <a:ext cx="786384" cy="36576"/>
+          </a:xfrm>
+          <a:prstGeom prst="rect">
+            <a:avLst/>
+          </a:prstGeom>
+          <a:solidFill>
+            <a:srgbClr val="9AF56D"/>
+          </a:solidFill>
+          <a:ln>
+            <a:solidFill>
+              <a:srgbClr val="9AF56D"/>
+            </a:solidFill>
+          </a:ln>
+        </p:spPr>
+        <p:style>
+          <a:lnRef idx="1">
+            <a:schemeClr val="accent1"/>
+          </a:lnRef>
+          <a:fillRef idx="3">
+            <a:schemeClr val="accent1"/>
+          </a:fillRef>
+          <a:effectRef idx="2">
+            <a:schemeClr val="accent1"/>
+          </a:effectRef>
+          <a:fontRef idx="minor">
+            <a:schemeClr val="lt1"/>
+          </a:fontRef>
+        </p:style>
+        <p:txBody>
+          <a:bodyPr rtlCol="0" anchor="ctr"/>
+          <a:lstStyle/>
+          <a:p>
+            <a:pPr algn="ctr"/>
+          </a:p>
+        </p:txBody>
+      </p:sp>
+      <p:sp>
+        <p:nvSpPr>
+          <p:cNvPr id="16" name="Rounded Rectangle 15"/>
+          <p:cNvSpPr/>
+          <p:nvPr/>
+        </p:nvSpPr>
+        <p:spPr>
+          <a:xfrm>
+            <a:off x="658368" y="3730752"/>
+            <a:ext cx="5349240" cy="1572768"/>
+          </a:xfrm>
+          <a:prstGeom prst="roundRect">
+            <a:avLst/>
+          </a:prstGeom>
+          <a:solidFill>
+            <a:srgbClr val="10263A"/>
+          </a:solidFill>
+          <a:ln>
+            <a:solidFill>
+              <a:srgbClr val="203550"/>
+            </a:solidFill>
+          </a:ln>
+        </p:spPr>
+        <p:style>
+          <a:lnRef idx="1">
+            <a:schemeClr val="accent1"/>
+          </a:lnRef>
+          <a:fillRef idx="3">
+            <a:schemeClr val="accent1"/>
+          </a:fillRef>
+          <a:effectRef idx="2">
+            <a:schemeClr val="accent1"/>
+          </a:effectRef>
+          <a:fontRef idx="minor">
+            <a:schemeClr val="lt1"/>
+          </a:fontRef>
+        </p:style>
+        <p:txBody>
+          <a:bodyPr rtlCol="0" anchor="ctr"/>
+          <a:lstStyle/>
+          <a:p>
+            <a:pPr algn="ctr"/>
+          </a:p>
+        </p:txBody>
+      </p:sp>
+      <p:sp>
+        <p:nvSpPr>
+          <p:cNvPr id="17" name="TextBox 16"/>
+          <p:cNvSpPr txBox="1"/>
+          <p:nvPr/>
+        </p:nvSpPr>
+        <p:spPr>
+          <a:xfrm>
+            <a:off x="868680" y="3931920"/>
+            <a:ext cx="4928616" cy="201168"/>
+          </a:xfrm>
+          <a:prstGeom prst="rect">
+            <a:avLst/>
+          </a:prstGeom>
+          <a:noFill/>
+        </p:spPr>
+        <p:txBody>
+          <a:bodyPr wrap="none" lIns="18288" rIns="18288" tIns="18288" bIns="18288" anchor="t">
+            <a:spAutoFit/>
+          </a:bodyPr>
+          <a:lstStyle/>
+          <a:p>
+            <a:pPr algn="l">
+              <a:lnSpc>
+                <a:spcPct val="105000"/>
+              </a:lnSpc>
+              <a:spcAft>
+                <a:spcPts val="0"/>
+              </a:spcAft>
+            </a:pPr>
+            <a:r>
+              <a:rPr sz="950" b="1" lang="ko-KR">
+                <a:solidFill>
+                  <a:srgbClr val="FFC857"/>
+                </a:solidFill>
+                <a:latin typeface="Noto Sans KR"/>
+                <a:ea typeface="Noto Sans KR"/>
+              </a:rPr>
+              <a:t>Operations</a:t>
+            </a:r>
+          </a:p>
+        </p:txBody>
+      </p:sp>
+      <p:sp>
+        <p:nvSpPr>
+          <p:cNvPr id="18" name="TextBox 17"/>
+          <p:cNvSpPr txBox="1"/>
+          <p:nvPr/>
+        </p:nvSpPr>
+        <p:spPr>
+          <a:xfrm>
+            <a:off x="868680" y="4261104"/>
+            <a:ext cx="1371600" cy="310896"/>
+          </a:xfrm>
+          <a:prstGeom prst="rect">
+            <a:avLst/>
+          </a:prstGeom>
+          <a:noFill/>
+        </p:spPr>
+        <p:txBody>
+          <a:bodyPr wrap="none" lIns="18288" rIns="18288" tIns="18288" bIns="18288" anchor="t">
+            <a:spAutoFit/>
+          </a:bodyPr>
+          <a:lstStyle/>
+          <a:p>
+            <a:pPr algn="l">
+              <a:lnSpc>
+                <a:spcPct val="105000"/>
+              </a:lnSpc>
+              <a:spcAft>
+                <a:spcPts val="0"/>
+              </a:spcAft>
+            </a:pPr>
+            <a:r>
+              <a:rPr sz="1900" b="1" lang="ko-KR">
+                <a:solidFill>
+                  <a:srgbClr val="F3F7FD"/>
+                </a:solidFill>
+                <a:latin typeface="Noto Sans KR"/>
+                <a:ea typeface="Noto Sans KR"/>
+              </a:rPr>
+              <a:t>Safety</a:t>
+            </a:r>
+          </a:p>
+        </p:txBody>
+      </p:sp>
+      <p:sp>
+        <p:nvSpPr>
+          <p:cNvPr id="19" name="TextBox 18"/>
+          <p:cNvSpPr txBox="1"/>
+          <p:nvPr/>
+        </p:nvSpPr>
+        <p:spPr>
+          <a:xfrm>
+            <a:off x="2258568" y="4215384"/>
+            <a:ext cx="3538727" cy="731520"/>
+          </a:xfrm>
+          <a:prstGeom prst="rect">
+            <a:avLst/>
+          </a:prstGeom>
+          <a:noFill/>
+        </p:spPr>
+        <p:txBody>
+          <a:bodyPr wrap="none" lIns="18288" rIns="18288" tIns="18288" bIns="18288" anchor="t">
+            <a:spAutoFit/>
+          </a:bodyPr>
+          <a:lstStyle/>
+          <a:p>
+            <a:pPr algn="l">
+              <a:lnSpc>
+                <a:spcPct val="105000"/>
+              </a:lnSpc>
+              <a:spcAft>
+                <a:spcPts val="0"/>
+              </a:spcAft>
+            </a:pPr>
+            <a:r>
+              <a:rPr sz="1150" b="0" lang="ko-KR">
+                <a:solidFill>
+                  <a:srgbClr val="9DB0C7"/>
+                </a:solidFill>
+                <a:latin typeface="Noto Sans KR"/>
+                <a:ea typeface="Noto Sans KR"/>
+              </a:rPr>
+              <a:t>Docker Compose, metrics·alerts, regression gate, incident·rollback, CI</a:t>
+            </a:r>
+          </a:p>
+        </p:txBody>
+      </p:sp>
+      <p:sp>
+        <p:nvSpPr>
+          <p:cNvPr id="20" name="Rectangle 19"/>
+          <p:cNvSpPr/>
+          <p:nvPr/>
+        </p:nvSpPr>
+        <p:spPr>
+          <a:xfrm>
+            <a:off x="868680" y="5074920"/>
+            <a:ext cx="786384" cy="36576"/>
+          </a:xfrm>
+          <a:prstGeom prst="rect">
+            <a:avLst/>
+          </a:prstGeom>
+          <a:solidFill>
+            <a:srgbClr val="FFC857"/>
+          </a:solidFill>
+          <a:ln>
+            <a:solidFill>
+              <a:srgbClr val="FFC857"/>
+            </a:solidFill>
+          </a:ln>
+        </p:spPr>
+        <p:style>
+          <a:lnRef idx="1">
+            <a:schemeClr val="accent1"/>
+          </a:lnRef>
+          <a:fillRef idx="3">
+            <a:schemeClr val="accent1"/>
+          </a:fillRef>
+          <a:effectRef idx="2">
+            <a:schemeClr val="accent1"/>
+          </a:effectRef>
+          <a:fontRef idx="minor">
+            <a:schemeClr val="lt1"/>
+          </a:fontRef>
+        </p:style>
+        <p:txBody>
+          <a:bodyPr rtlCol="0" anchor="ctr"/>
+          <a:lstStyle/>
+          <a:p>
+            <a:pPr algn="ctr"/>
+          </a:p>
+        </p:txBody>
+      </p:sp>
+      <p:sp>
+        <p:nvSpPr>
+          <p:cNvPr id="21" name="Rounded Rectangle 20"/>
+          <p:cNvSpPr/>
+          <p:nvPr/>
+        </p:nvSpPr>
+        <p:spPr>
+          <a:xfrm>
+            <a:off x="6190488" y="3730752"/>
+            <a:ext cx="5349240" cy="1572768"/>
+          </a:xfrm>
+          <a:prstGeom prst="roundRect">
+            <a:avLst/>
+          </a:prstGeom>
+          <a:solidFill>
+            <a:srgbClr val="10263A"/>
+          </a:solidFill>
+          <a:ln>
+            <a:solidFill>
+              <a:srgbClr val="203550"/>
+            </a:solidFill>
+          </a:ln>
+        </p:spPr>
+        <p:style>
+          <a:lnRef idx="1">
+            <a:schemeClr val="accent1"/>
+          </a:lnRef>
+          <a:fillRef idx="3">
+            <a:schemeClr val="accent1"/>
+          </a:fillRef>
+          <a:effectRef idx="2">
+            <a:schemeClr val="accent1"/>
+          </a:effectRef>
+          <a:fontRef idx="minor">
+            <a:schemeClr val="lt1"/>
+          </a:fontRef>
+        </p:style>
+        <p:txBody>
+          <a:bodyPr rtlCol="0" anchor="ctr"/>
+          <a:lstStyle/>
+          <a:p>
+            <a:pPr algn="ctr"/>
+          </a:p>
+        </p:txBody>
+      </p:sp>
+      <p:sp>
+        <p:nvSpPr>
+          <p:cNvPr id="22" name="TextBox 21"/>
+          <p:cNvSpPr txBox="1"/>
+          <p:nvPr/>
+        </p:nvSpPr>
+        <p:spPr>
+          <a:xfrm>
+            <a:off x="6400800" y="3931920"/>
+            <a:ext cx="4928616" cy="201168"/>
+          </a:xfrm>
+          <a:prstGeom prst="rect">
+            <a:avLst/>
+          </a:prstGeom>
+          <a:noFill/>
+        </p:spPr>
+        <p:txBody>
+          <a:bodyPr wrap="none" lIns="18288" rIns="18288" tIns="18288" bIns="18288" anchor="t">
+            <a:spAutoFit/>
+          </a:bodyPr>
+          <a:lstStyle/>
+          <a:p>
+            <a:pPr algn="l">
+              <a:lnSpc>
+                <a:spcPct val="105000"/>
+              </a:lnSpc>
+              <a:spcAft>
+                <a:spcPts val="0"/>
+              </a:spcAft>
+            </a:pPr>
+            <a:r>
+              <a:rPr sz="950" b="1" lang="ko-KR">
+                <a:solidFill>
+                  <a:srgbClr val="38D6FF"/>
+                </a:solidFill>
+                <a:latin typeface="Noto Sans KR"/>
+                <a:ea typeface="Noto Sans KR"/>
+              </a:rPr>
+              <a:t>AgentOps</a:t>
+            </a:r>
+          </a:p>
+        </p:txBody>
+      </p:sp>
+      <p:sp>
+        <p:nvSpPr>
+          <p:cNvPr id="23" name="TextBox 22"/>
+          <p:cNvSpPr txBox="1"/>
+          <p:nvPr/>
+        </p:nvSpPr>
+        <p:spPr>
+          <a:xfrm>
+            <a:off x="6400800" y="4261104"/>
+            <a:ext cx="1371600" cy="310896"/>
+          </a:xfrm>
+          <a:prstGeom prst="rect">
+            <a:avLst/>
+          </a:prstGeom>
+          <a:noFill/>
+        </p:spPr>
+        <p:txBody>
+          <a:bodyPr wrap="none" lIns="18288" rIns="18288" tIns="18288" bIns="18288" anchor="t">
+            <a:spAutoFit/>
+          </a:bodyPr>
+          <a:lstStyle/>
+          <a:p>
+            <a:pPr algn="l">
+              <a:lnSpc>
+                <a:spcPct val="105000"/>
+              </a:lnSpc>
+              <a:spcAft>
+                <a:spcPts val="0"/>
+              </a:spcAft>
+            </a:pPr>
+            <a:r>
+              <a:rPr sz="1900" b="1" lang="ko-KR">
+                <a:solidFill>
+                  <a:srgbClr val="F3F7FD"/>
+                </a:solidFill>
+                <a:latin typeface="Noto Sans KR"/>
+                <a:ea typeface="Noto Sans KR"/>
+              </a:rPr>
+              <a:t>Automation</a:t>
+            </a:r>
+          </a:p>
+        </p:txBody>
+      </p:sp>
+      <p:sp>
+        <p:nvSpPr>
+          <p:cNvPr id="24" name="TextBox 23"/>
+          <p:cNvSpPr txBox="1"/>
+          <p:nvPr/>
+        </p:nvSpPr>
+        <p:spPr>
+          <a:xfrm>
+            <a:off x="7790688" y="4215384"/>
+            <a:ext cx="3538727" cy="731520"/>
+          </a:xfrm>
+          <a:prstGeom prst="rect">
+            <a:avLst/>
+          </a:prstGeom>
+          <a:noFill/>
+        </p:spPr>
+        <p:txBody>
+          <a:bodyPr wrap="none" lIns="18288" rIns="18288" tIns="18288" bIns="18288" anchor="t">
+            <a:spAutoFit/>
+          </a:bodyPr>
+          <a:lstStyle/>
+          <a:p>
+            <a:pPr algn="l">
+              <a:lnSpc>
+                <a:spcPct val="105000"/>
+              </a:lnSpc>
+              <a:spcAft>
+                <a:spcPts val="0"/>
+              </a:spcAft>
+            </a:pPr>
+            <a:r>
+              <a:rPr sz="1150" b="0" lang="ko-KR">
+                <a:solidFill>
+                  <a:srgbClr val="9DB0C7"/>
+                </a:solidFill>
+                <a:latin typeface="Noto Sans KR"/>
+                <a:ea typeface="Noto Sans KR"/>
+              </a:rPr>
+              <a:t>policy gate, state machine, checkpoint·resume, MCP, tamper-evident audit</a:t>
+            </a:r>
+          </a:p>
+        </p:txBody>
+      </p:sp>
+      <p:sp>
+        <p:nvSpPr>
+          <p:cNvPr id="25" name="Rectangle 24"/>
+          <p:cNvSpPr/>
+          <p:nvPr/>
+        </p:nvSpPr>
+        <p:spPr>
+          <a:xfrm>
+            <a:off x="6400800" y="5074920"/>
+            <a:ext cx="786384" cy="36576"/>
+          </a:xfrm>
+          <a:prstGeom prst="rect">
+            <a:avLst/>
+          </a:prstGeom>
+          <a:solidFill>
+            <a:srgbClr val="38D6FF"/>
+          </a:solidFill>
+          <a:ln>
+            <a:solidFill>
+              <a:srgbClr val="38D6FF"/>
+            </a:solidFill>
+          </a:ln>
+        </p:spPr>
+        <p:style>
+          <a:lnRef idx="1">
+            <a:schemeClr val="accent1"/>
+          </a:lnRef>
+          <a:fillRef idx="3">
+            <a:schemeClr val="accent1"/>
+          </a:fillRef>
+          <a:effectRef idx="2">
+            <a:schemeClr val="accent1"/>
+          </a:effectRef>
+          <a:fontRef idx="minor">
+            <a:schemeClr val="lt1"/>
+          </a:fontRef>
+        </p:style>
+        <p:txBody>
+          <a:bodyPr rtlCol="0" anchor="ctr"/>
+          <a:lstStyle/>
+          <a:p>
+            <a:pPr algn="ctr"/>
+          </a:p>
+        </p:txBody>
+      </p:sp>
+      <p:sp>
+        <p:nvSpPr>
+          <p:cNvPr id="26" name="TextBox 25"/>
+          <p:cNvSpPr txBox="1"/>
+          <p:nvPr/>
+        </p:nvSpPr>
+        <p:spPr>
+          <a:xfrm>
+            <a:off x="658368" y="6510528"/>
+            <a:ext cx="4754880" cy="164592"/>
+          </a:xfrm>
+          <a:prstGeom prst="rect">
+            <a:avLst/>
+          </a:prstGeom>
+          <a:noFill/>
+        </p:spPr>
+        <p:txBody>
+          <a:bodyPr wrap="none" lIns="18288" rIns="18288" tIns="18288" bIns="18288" anchor="t">
+            <a:spAutoFit/>
+          </a:bodyPr>
+          <a:lstStyle/>
+          <a:p>
+            <a:pPr algn="l">
+              <a:lnSpc>
+                <a:spcPct val="105000"/>
+              </a:lnSpc>
+              <a:spcAft>
+                <a:spcPts val="0"/>
+              </a:spcAft>
+            </a:pPr>
+            <a:r>
+              <a:rPr sz="850" b="0" lang="ko-KR">
+                <a:solidFill>
+                  <a:srgbClr val="9DB0C7"/>
+                </a:solidFill>
+                <a:latin typeface="Noto Sans KR"/>
+                <a:ea typeface="Noto Sans KR"/>
+              </a:rPr>
+              <a:t>김대균 · AI Inference Portfolio</a:t>
+            </a:r>
+          </a:p>
+        </p:txBody>
+      </p:sp>
+      <p:sp>
+        <p:nvSpPr>
+          <p:cNvPr id="27" name="TextBox 26"/>
+          <p:cNvSpPr txBox="1"/>
+          <p:nvPr/>
+        </p:nvSpPr>
+        <p:spPr>
+          <a:xfrm>
+            <a:off x="10972800" y="6510528"/>
+            <a:ext cx="548640" cy="164592"/>
+          </a:xfrm>
+          <a:prstGeom prst="rect">
+            <a:avLst/>
+          </a:prstGeom>
+          <a:noFill/>
+        </p:spPr>
+        <p:txBody>
+          <a:bodyPr wrap="none" lIns="18288" rIns="18288" tIns="18288" bIns="18288" anchor="t">
+            <a:spAutoFit/>
+          </a:bodyPr>
+          <a:lstStyle/>
+          <a:p>
+            <a:pPr algn="r">
+              <a:lnSpc>
+                <a:spcPct val="105000"/>
+              </a:lnSpc>
+              <a:spcAft>
+                <a:spcPts val="0"/>
+              </a:spcAft>
+            </a:pPr>
+            <a:r>
+              <a:rPr sz="850" b="0" lang="ko-KR">
+                <a:solidFill>
+                  <a:srgbClr val="9DB0C7"/>
+                </a:solidFill>
+                <a:latin typeface="DejaVu Sans Mono"/>
+                <a:ea typeface="DejaVu Sans Mono"/>
+              </a:rPr>
+              <a:t>12</a:t>
+            </a:r>
+          </a:p>
+        </p:txBody>
+      </p:sp>
+    </p:spTree>
+  </p:cSld>
+  <p:clrMapOvr>
+    <a:masterClrMapping/>
+  </p:clrMapOvr>
+</p:sld>
+</file>
+
+<file path=ppt/slides/slide13.xml><?xml version="1.0" encoding="utf-8"?>
+<p:sld xmlns:a="http://schemas.openxmlformats.org/drawingml/2006/main" xmlns:p="http://schemas.openxmlformats.org/presentationml/2006/main" xmlns:r="http://schemas.openxmlformats.org/officeDocument/2006/relationships">
+  <p:cSld>
+    <p:bg>
+      <p:bgPr>
+        <a:solidFill>
+          <a:srgbClr val="07111F"/>
+        </a:solidFill>
+        <a:effectLst/>
+      </p:bgPr>
+    </p:bg>
+    <p:spTree>
+      <p:nvGrpSpPr>
+        <p:cNvPr id="1" name=""/>
+        <p:cNvGrpSpPr/>
+        <p:nvPr/>
+      </p:nvGrpSpPr>
+      <p:grpSpPr/>
+      <p:sp>
+        <p:nvSpPr>
+          <p:cNvPr id="2" name="TextBox 1"/>
+          <p:cNvSpPr txBox="1"/>
+          <p:nvPr/>
+        </p:nvSpPr>
+        <p:spPr>
+          <a:xfrm>
+            <a:off x="658368" y="347472"/>
+            <a:ext cx="8046720" cy="256032"/>
+          </a:xfrm>
+          <a:prstGeom prst="rect">
+            <a:avLst/>
+          </a:prstGeom>
+          <a:noFill/>
+        </p:spPr>
+        <p:txBody>
+          <a:bodyPr wrap="none" lIns="18288" rIns="18288" tIns="18288" bIns="18288" anchor="t">
+            <a:spAutoFit/>
+          </a:bodyPr>
+          <a:lstStyle/>
+          <a:p>
+            <a:pPr algn="l">
+              <a:lnSpc>
+                <a:spcPct val="105000"/>
+              </a:lnSpc>
+              <a:spcAft>
+                <a:spcPts val="0"/>
+              </a:spcAft>
+            </a:pPr>
+            <a:r>
+              <a:rPr sz="1000" b="1" lang="ko-KR">
+                <a:solidFill>
+                  <a:srgbClr val="38D6FF"/>
+                </a:solidFill>
+                <a:latin typeface="Noto Sans KR"/>
+                <a:ea typeface="Noto Sans KR"/>
+              </a:rPr>
+              <a:t>VALIDATION STATUS</a:t>
+            </a:r>
+          </a:p>
+        </p:txBody>
+      </p:sp>
+      <p:sp>
+        <p:nvSpPr>
+          <p:cNvPr id="3" name="TextBox 2"/>
+          <p:cNvSpPr txBox="1"/>
+          <p:nvPr/>
+        </p:nvSpPr>
+        <p:spPr>
+          <a:xfrm>
+            <a:off x="658368" y="694944"/>
+            <a:ext cx="10881360" cy="530352"/>
+          </a:xfrm>
+          <a:prstGeom prst="rect">
+            <a:avLst/>
+          </a:prstGeom>
+          <a:noFill/>
+        </p:spPr>
+        <p:txBody>
+          <a:bodyPr wrap="none" lIns="18288" rIns="18288" tIns="18288" bIns="18288" anchor="t">
+            <a:spAutoFit/>
+          </a:bodyPr>
+          <a:lstStyle/>
+          <a:p>
+            <a:pPr algn="l">
+              <a:lnSpc>
+                <a:spcPct val="105000"/>
+              </a:lnSpc>
+              <a:spcAft>
+                <a:spcPts val="0"/>
+              </a:spcAft>
+            </a:pPr>
+            <a:r>
+              <a:rPr sz="2900" b="1" lang="ko-KR">
+                <a:solidFill>
+                  <a:srgbClr val="F3F7FD"/>
+                </a:solidFill>
+                <a:latin typeface="Noto Sans KR"/>
+                <a:ea typeface="Noto Sans KR"/>
+              </a:rPr>
+              <a:t>현재 완성 상태</a:t>
+            </a:r>
+          </a:p>
+        </p:txBody>
+      </p:sp>
+      <p:sp>
+        <p:nvSpPr>
+          <p:cNvPr id="4" name="TextBox 3"/>
+          <p:cNvSpPr txBox="1"/>
+          <p:nvPr/>
+        </p:nvSpPr>
+        <p:spPr>
+          <a:xfrm>
+            <a:off x="658368" y="1261872"/>
+            <a:ext cx="10881360" cy="530352"/>
+          </a:xfrm>
+          <a:prstGeom prst="rect">
+            <a:avLst/>
+          </a:prstGeom>
+          <a:noFill/>
+        </p:spPr>
+        <p:txBody>
+          <a:bodyPr wrap="none" lIns="18288" rIns="18288" tIns="18288" bIns="18288" anchor="t">
+            <a:spAutoFit/>
+          </a:bodyPr>
+          <a:lstStyle/>
+          <a:p>
+            <a:pPr algn="l">
+              <a:lnSpc>
+                <a:spcPct val="105000"/>
+              </a:lnSpc>
+              <a:spcAft>
+                <a:spcPts val="0"/>
+              </a:spcAft>
+            </a:pPr>
+            <a:r>
+              <a:rPr sz="1500" b="0" lang="ko-KR">
+                <a:solidFill>
+                  <a:srgbClr val="9DB0C7"/>
+                </a:solidFill>
+                <a:latin typeface="Noto Sans KR"/>
+                <a:ea typeface="Noto Sans KR"/>
+              </a:rPr>
+              <a:t>채용 담당자가 바로 열어보고, 개발자가 명령으로 다시 검증할 수 있습니다.</a:t>
+            </a:r>
+          </a:p>
+        </p:txBody>
+      </p:sp>
+      <p:sp>
+        <p:nvSpPr>
+          <p:cNvPr id="5" name="TextBox 4"/>
+          <p:cNvSpPr txBox="1"/>
+          <p:nvPr/>
+        </p:nvSpPr>
+        <p:spPr>
+          <a:xfrm>
+            <a:off x="10789920" y="347472"/>
+            <a:ext cx="731520" cy="228600"/>
+          </a:xfrm>
+          <a:prstGeom prst="rect">
+            <a:avLst/>
+          </a:prstGeom>
+          <a:noFill/>
+        </p:spPr>
+        <p:txBody>
+          <a:bodyPr wrap="none" lIns="18288" rIns="18288" tIns="18288" bIns="18288" anchor="t">
+            <a:spAutoFit/>
+          </a:bodyPr>
+          <a:lstStyle/>
+          <a:p>
+            <a:pPr algn="r">
+              <a:lnSpc>
+                <a:spcPct val="105000"/>
+              </a:lnSpc>
+              <a:spcAft>
+                <a:spcPts val="0"/>
+              </a:spcAft>
+            </a:pPr>
+            <a:r>
+              <a:rPr sz="1000" b="0" lang="ko-KR">
+                <a:solidFill>
+                  <a:srgbClr val="9DB0C7"/>
+                </a:solidFill>
+                <a:latin typeface="DejaVu Sans Mono"/>
+                <a:ea typeface="DejaVu Sans Mono"/>
+              </a:rPr>
+              <a:t>13</a:t>
+            </a:r>
+          </a:p>
+        </p:txBody>
+      </p:sp>
+      <p:graphicFrame>
+        <p:nvGraphicFramePr>
+          <p:cNvPr id="6" name="Table 5"/>
+          <p:cNvGraphicFramePr>
+            <a:graphicFrameLocks noGrp="1"/>
+          </p:cNvGraphicFramePr>
+          <p:nvPr/>
+        </p:nvGraphicFramePr>
+        <p:xfrm>
+          <a:off x="658368" y="1901952"/>
+          <a:ext cx="10881360" cy="3584448"/>
+        </p:xfrm>
+        <a:graphic>
+          <a:graphicData uri="http://schemas.openxmlformats.org/drawingml/2006/table">
+            <a:tbl>
+              <a:tblPr firstRow="1" bandRow="1">
+                <a:tableStyleId>{5C22544A-7EE6-4342-B048-85BDC9FD1C3A}</a:tableStyleId>
+              </a:tblPr>
+              <a:tblGrid>
+                <a:gridCol w="2720340"/>
+                <a:gridCol w="2720340"/>
+                <a:gridCol w="2720340"/>
+                <a:gridCol w="2720340"/>
+              </a:tblGrid>
+              <a:tr h="716889">
                 <a:tc>
                   <a:txBody>
                     <a:bodyPr/>
@@ -4824,7 +7011,7 @@
                   </a:tcPr>
                 </a:tc>
               </a:tr>
-              <a:tr h="896112">
+              <a:tr h="716889">
                 <a:tc>
                   <a:txBody>
                     <a:bodyPr/>
@@ -4922,7 +7109,7 @@
                   </a:tcPr>
                 </a:tc>
               </a:tr>
-              <a:tr h="896112">
+              <a:tr h="716889">
                 <a:tc>
                   <a:txBody>
                     <a:bodyPr/>
@@ -5020,7 +7207,7 @@
                   </a:tcPr>
                 </a:tc>
               </a:tr>
-              <a:tr h="896112">
+              <a:tr h="716889">
                 <a:tc>
                   <a:txBody>
                     <a:bodyPr/>
@@ -5118,6 +7305,104 @@
                   </a:tcPr>
                 </a:tc>
               </a:tr>
+              <a:tr h="716892">
+                <a:tc>
+                  <a:txBody>
+                    <a:bodyPr/>
+                    <a:lstStyle/>
+                    <a:p>
+                      <a:pPr algn="l"/>
+                      <a:r>
+                        <a:rPr sz="1050" b="0" lang="ko-KR">
+                          <a:solidFill>
+                            <a:srgbClr val="F3F7FD"/>
+                          </a:solidFill>
+                          <a:latin typeface="Noto Sans KR"/>
+                          <a:ea typeface="Noto Sans KR"/>
+                        </a:rPr>
+                        <a:t>EvidenceOps Agent</a:t>
+                      </a:r>
+                    </a:p>
+                  </a:txBody>
+                  <a:tcPr marL="82296" marR="82296" marT="45720" marB="45720">
+                    <a:solidFill>
+                      <a:srgbClr val="0E1D30"/>
+                    </a:solidFill>
+                  </a:tcPr>
+                </a:tc>
+                <a:tc>
+                  <a:txBody>
+                    <a:bodyPr/>
+                    <a:lstStyle/>
+                    <a:p>
+                      <a:pPr algn="ctr"/>
+                      <a:r>
+                        <a:rPr sz="1050" b="0" lang="ko-KR">
+                          <a:solidFill>
+                            <a:srgbClr val="9AF56D"/>
+                          </a:solidFill>
+                          <a:latin typeface="DejaVu Sans Mono"/>
+                          <a:ea typeface="DejaVu Sans Mono"/>
+                        </a:rPr>
+                        <a:t>12 tests + 6/6 jobs PASS</a:t>
+                      </a:r>
+                    </a:p>
+                  </a:txBody>
+                  <a:tcPr marL="82296" marR="82296" marT="45720" marB="45720">
+                    <a:solidFill>
+                      <a:srgbClr val="0E1D30"/>
+                    </a:solidFill>
+                  </a:tcPr>
+                </a:tc>
+                <a:tc>
+                  <a:txBody>
+                    <a:bodyPr/>
+                    <a:lstStyle/>
+                    <a:p>
+                      <a:pPr algn="ctr"/>
+                      <a:r>
+                        <a:rPr sz="1050" b="0" lang="ko-KR">
+                          <a:solidFill>
+                            <a:srgbClr val="9AF56D"/>
+                          </a:solidFill>
+                          <a:latin typeface="DejaVu Sans Mono"/>
+                          <a:ea typeface="DejaVu Sans Mono"/>
+                        </a:rPr>
+                        <a:t>HTML · PPTX · evidence JSON</a:t>
+                      </a:r>
+                    </a:p>
+                  </a:txBody>
+                  <a:tcPr marL="82296" marR="82296" marT="45720" marB="45720">
+                    <a:solidFill>
+                      <a:srgbClr val="0E1D30"/>
+                    </a:solidFill>
+                  </a:tcPr>
+                </a:tc>
+                <a:tc>
+                  <a:txBody>
+                    <a:bodyPr/>
+                    <a:lstStyle/>
+                    <a:p>
+                      <a:pPr algn="ctr"/>
+                      <a:r>
+                        <a:rPr sz="1050" b="0" lang="ko-KR">
+                          <a:solidFill>
+                            <a:srgbClr val="9AF56D"/>
+                          </a:solidFill>
+                          <a:latin typeface="DejaVu Sans Mono"/>
+                          <a:ea typeface="DejaVu Sans Mono"/>
+                        </a:rPr>
+                        <a:t>local main</a:t>
+                      </a:r>
+                    </a:p>
+                  </a:txBody>
+                  <a:tcPr marL="82296" marR="82296" marT="45720" marB="45720">
+                    <a:solidFill>
+                      <a:srgbClr val="0E1D30"/>
+                    </a:solidFill>
+                  </a:tcPr>
+                </a:tc>
+              </a:tr>
             </a:tbl>
           </a:graphicData>
         </a:graphic>
@@ -5205,7 +7490,7 @@
                 <a:latin typeface="Noto Sans KR"/>
                 <a:ea typeface="Noto Sans KR"/>
               </a:rPr>
-              <a:t>K-VoiceBench는 새 GitHub 저장소 생성 후 원격만 연결하면 되는 상태</a:t>
+              <a:t>K-VoiceBench와 EvidenceOps는 나중에 GitHub 저장소를 만든 뒤 원격만 연결하면 되는 상태</a:t>
             </a:r>
           </a:p>
         </p:txBody>
@@ -5291,7 +7576,7 @@
                 <a:latin typeface="DejaVu Sans Mono"/>
                 <a:ea typeface="DejaVu Sans Mono"/>
               </a:rPr>
-              <a:t>11</a:t>
+              <a:t>13</a:t>
             </a:r>
           </a:p>
         </p:txBody>
@@ -5304,7 +7589,7 @@
 </p:sld>
 </file>
 
-<file path=ppt/slides/slide12.xml><?xml version="1.0" encoding="utf-8"?>
+<file path=ppt/slides/slide14.xml><?xml version="1.0" encoding="utf-8"?>
 <p:sld xmlns:a="http://schemas.openxmlformats.org/drawingml/2006/main" xmlns:p="http://schemas.openxmlformats.org/presentationml/2006/main" xmlns:r="http://schemas.openxmlformats.org/officeDocument/2006/relationships">
   <p:cSld>
     <p:bg>
@@ -5403,7 +7688,7 @@
                 <a:latin typeface="Noto Sans KR"/>
                 <a:ea typeface="Noto Sans KR"/>
               </a:rPr>
-              <a:t>Build · Measure · Operate</a:t>
+              <a:t>Build · Measure · Operate · Automate</a:t>
             </a:r>
           </a:p>
         </p:txBody>
@@ -5446,7 +7731,7 @@
                 <a:latin typeface="Noto Sans KR"/>
                 <a:ea typeface="Noto Sans KR"/>
               </a:rPr>
-              <a:t>금융 LLMOps에서 시작해 양자화 원인 분석과 한국어 음성 추론 평가까지, 제한된 GPU에서 운영 가능한 AI를 만들었습니다.</a:t>
+              <a:t>금융 LLMOps, 양자화 원인 분석, 한국어 음성 평가를 거쳐 제한된 GPU의 AI 실험을 정책과 증거로 자동화했습니다.</a:t>
             </a:r>
           </a:p>
         </p:txBody>
@@ -5717,7 +8002,95 @@
       </p:sp>
       <p:sp>
         <p:nvSpPr>
-          <p:cNvPr id="11" name="TextBox 10"/>
+          <p:cNvPr id="11" name="Rounded Rectangle 10"/>
+          <p:cNvSpPr/>
+          <p:nvPr/>
+        </p:nvSpPr>
+        <p:spPr>
+          <a:xfrm>
+            <a:off x="6208776" y="4919472"/>
+            <a:ext cx="1645920" cy="393192"/>
+          </a:xfrm>
+          <a:prstGeom prst="roundRect">
+            <a:avLst/>
+          </a:prstGeom>
+          <a:solidFill>
+            <a:srgbClr val="07111F"/>
+          </a:solidFill>
+          <a:ln>
+            <a:solidFill>
+              <a:srgbClr val="203550"/>
+            </a:solidFill>
+          </a:ln>
+        </p:spPr>
+        <p:style>
+          <a:lnRef idx="1">
+            <a:schemeClr val="accent1"/>
+          </a:lnRef>
+          <a:fillRef idx="3">
+            <a:schemeClr val="accent1"/>
+          </a:fillRef>
+          <a:effectRef idx="2">
+            <a:schemeClr val="accent1"/>
+          </a:effectRef>
+          <a:fontRef idx="minor">
+            <a:schemeClr val="lt1"/>
+          </a:fontRef>
+        </p:style>
+        <p:txBody>
+          <a:bodyPr rtlCol="0" anchor="ctr"/>
+          <a:lstStyle/>
+          <a:p>
+            <a:pPr algn="ctr"/>
+          </a:p>
+        </p:txBody>
+      </p:sp>
+      <p:sp>
+        <p:nvSpPr>
+          <p:cNvPr id="12" name="TextBox 11"/>
+          <p:cNvSpPr txBox="1"/>
+          <p:nvPr/>
+        </p:nvSpPr>
+        <p:spPr>
+          <a:xfrm>
+            <a:off x="6309360" y="5038344"/>
+            <a:ext cx="1444752" cy="155448"/>
+          </a:xfrm>
+          <a:prstGeom prst="rect">
+            <a:avLst/>
+          </a:prstGeom>
+          <a:noFill/>
+        </p:spPr>
+        <p:txBody>
+          <a:bodyPr wrap="none" lIns="18288" rIns="18288" tIns="18288" bIns="18288" anchor="t">
+            <a:spAutoFit/>
+          </a:bodyPr>
+          <a:lstStyle/>
+          <a:p>
+            <a:pPr algn="ctr">
+              <a:lnSpc>
+                <a:spcPct val="105000"/>
+              </a:lnSpc>
+              <a:spcAft>
+                <a:spcPts val="0"/>
+              </a:spcAft>
+            </a:pPr>
+            <a:r>
+              <a:rPr sz="950" b="1" lang="ko-KR">
+                <a:solidFill>
+                  <a:srgbClr val="9AF56D"/>
+                </a:solidFill>
+                <a:latin typeface="Noto Sans KR"/>
+                <a:ea typeface="Noto Sans KR"/>
+              </a:rPr>
+              <a:t>Agent Engineer</a:t>
+            </a:r>
+          </a:p>
+        </p:txBody>
+      </p:sp>
+      <p:sp>
+        <p:nvSpPr>
+          <p:cNvPr id="13" name="TextBox 12"/>
           <p:cNvSpPr txBox="1"/>
           <p:nvPr/>
         </p:nvSpPr>
@@ -5865,7 +8238,7 @@
                 <a:latin typeface="Noto Sans KR"/>
                 <a:ea typeface="Noto Sans KR"/>
               </a:rPr>
-              <a:t>세 프로젝트가 답하는 질문</a:t>
+              <a:t>네 프로젝트가 답하는 질문</a:t>
             </a:r>
           </a:p>
         </p:txBody>
@@ -5908,7 +8281,7 @@
                 <a:latin typeface="Noto Sans KR"/>
                 <a:ea typeface="Noto Sans KR"/>
               </a:rPr>
-              <a:t>모델 데모보다 요구사항 → 측정 → 선택 → 운영의 닫힌 고리를 만들었습니다.</a:t>
+              <a:t>모델 데모보다 요구사항 → 측정 → 선택 → 운영 → 자동화의 닫힌 고리를 만들었습니다.</a:t>
             </a:r>
           </a:p>
         </p:txBody>
@@ -5964,8 +8337,8 @@
         </p:nvSpPr>
         <p:spPr>
           <a:xfrm>
-            <a:off x="658368" y="2011680"/>
-            <a:ext cx="3502152" cy="3246120"/>
+            <a:off x="658368" y="1901952"/>
+            <a:ext cx="5349240" cy="1572768"/>
           </a:xfrm>
           <a:prstGeom prst="roundRect">
             <a:avLst/>
@@ -6009,8 +8382,8 @@
         </p:nvSpPr>
         <p:spPr>
           <a:xfrm>
-            <a:off x="868680" y="2258568"/>
-            <a:ext cx="3063240" cy="228600"/>
+            <a:off x="868680" y="2103120"/>
+            <a:ext cx="4928616" cy="201168"/>
           </a:xfrm>
           <a:prstGeom prst="rect">
             <a:avLst/>
@@ -6032,7 +8405,7 @@
               </a:spcAft>
             </a:pPr>
             <a:r>
-              <a:rPr sz="1000" b="1" lang="ko-KR">
+              <a:rPr sz="950" b="1" lang="ko-KR">
                 <a:solidFill>
                   <a:srgbClr val="38D6FF"/>
                 </a:solidFill>
@@ -6052,8 +8425,8 @@
         </p:nvSpPr>
         <p:spPr>
           <a:xfrm>
-            <a:off x="868680" y="2788920"/>
-            <a:ext cx="3063240" cy="475488"/>
+            <a:off x="868680" y="2432304"/>
+            <a:ext cx="1371600" cy="310896"/>
           </a:xfrm>
           <a:prstGeom prst="rect">
             <a:avLst/>
@@ -6075,7 +8448,7 @@
               </a:spcAft>
             </a:pPr>
             <a:r>
-              <a:rPr sz="2700" b="1" lang="ko-KR">
+              <a:rPr sz="1900" b="1" lang="ko-KR">
                 <a:solidFill>
                   <a:srgbClr val="F3F7FD"/>
                 </a:solidFill>
@@ -6095,8 +8468,8 @@
         </p:nvSpPr>
         <p:spPr>
           <a:xfrm>
-            <a:off x="868680" y="3502152"/>
-            <a:ext cx="3017520" cy="1078992"/>
+            <a:off x="2258568" y="2386584"/>
+            <a:ext cx="3538727" cy="731520"/>
           </a:xfrm>
           <a:prstGeom prst="rect">
             <a:avLst/>
@@ -6118,7 +8491,7 @@
               </a:spcAft>
             </a:pPr>
             <a:r>
-              <a:rPr sz="1500" b="0" lang="ko-KR">
+              <a:rPr sz="1150" b="0" lang="ko-KR">
                 <a:solidFill>
                   <a:srgbClr val="9DB0C7"/>
                 </a:solidFill>
@@ -6138,8 +8511,8 @@
         </p:nvSpPr>
         <p:spPr>
           <a:xfrm>
-            <a:off x="868680" y="4873752"/>
-            <a:ext cx="914400" cy="45720"/>
+            <a:off x="868680" y="3246120"/>
+            <a:ext cx="786384" cy="36576"/>
           </a:xfrm>
           <a:prstGeom prst="rect">
             <a:avLst/>
@@ -6183,8 +8556,8 @@
         </p:nvSpPr>
         <p:spPr>
           <a:xfrm>
-            <a:off x="4343400" y="2011680"/>
-            <a:ext cx="3502152" cy="3246120"/>
+            <a:off x="6190488" y="1901952"/>
+            <a:ext cx="5349240" cy="1572768"/>
           </a:xfrm>
           <a:prstGeom prst="roundRect">
             <a:avLst/>
@@ -6228,8 +8601,8 @@
         </p:nvSpPr>
         <p:spPr>
           <a:xfrm>
-            <a:off x="4553712" y="2258568"/>
-            <a:ext cx="3063240" cy="228600"/>
+            <a:off x="6400800" y="2103120"/>
+            <a:ext cx="4928616" cy="201168"/>
           </a:xfrm>
           <a:prstGeom prst="rect">
             <a:avLst/>
@@ -6251,7 +8624,7 @@
               </a:spcAft>
             </a:pPr>
             <a:r>
-              <a:rPr sz="1000" b="1" lang="ko-KR">
+              <a:rPr sz="950" b="1" lang="ko-KR">
                 <a:solidFill>
                   <a:srgbClr val="9AF56D"/>
                 </a:solidFill>
@@ -6271,8 +8644,8 @@
         </p:nvSpPr>
         <p:spPr>
           <a:xfrm>
-            <a:off x="4553712" y="2788920"/>
-            <a:ext cx="3063240" cy="475488"/>
+            <a:off x="6400800" y="2432304"/>
+            <a:ext cx="1371600" cy="310896"/>
           </a:xfrm>
           <a:prstGeom prst="rect">
             <a:avLst/>
@@ -6294,7 +8667,7 @@
               </a:spcAft>
             </a:pPr>
             <a:r>
-              <a:rPr sz="2700" b="1" lang="ko-KR">
+              <a:rPr sz="1900" b="1" lang="ko-KR">
                 <a:solidFill>
                   <a:srgbClr val="F3F7FD"/>
                 </a:solidFill>
@@ -6314,8 +8687,8 @@
         </p:nvSpPr>
         <p:spPr>
           <a:xfrm>
-            <a:off x="4553712" y="3502152"/>
-            <a:ext cx="3017520" cy="1078992"/>
+            <a:off x="7790688" y="2386584"/>
+            <a:ext cx="3538727" cy="731520"/>
           </a:xfrm>
           <a:prstGeom prst="rect">
             <a:avLst/>
@@ -6337,7 +8710,7 @@
               </a:spcAft>
             </a:pPr>
             <a:r>
-              <a:rPr sz="1500" b="0" lang="ko-KR">
+              <a:rPr sz="1150" b="0" lang="ko-KR">
                 <a:solidFill>
                   <a:srgbClr val="9DB0C7"/>
                 </a:solidFill>
@@ -6357,8 +8730,8 @@
         </p:nvSpPr>
         <p:spPr>
           <a:xfrm>
-            <a:off x="4553712" y="4873752"/>
-            <a:ext cx="914400" cy="45720"/>
+            <a:off x="6400800" y="3246120"/>
+            <a:ext cx="786384" cy="36576"/>
           </a:xfrm>
           <a:prstGeom prst="rect">
             <a:avLst/>
@@ -6402,8 +8775,8 @@
         </p:nvSpPr>
         <p:spPr>
           <a:xfrm>
-            <a:off x="8028432" y="2011680"/>
-            <a:ext cx="3502152" cy="3246120"/>
+            <a:off x="658368" y="3730752"/>
+            <a:ext cx="5349240" cy="1572768"/>
           </a:xfrm>
           <a:prstGeom prst="roundRect">
             <a:avLst/>
@@ -6447,8 +8820,8 @@
         </p:nvSpPr>
         <p:spPr>
           <a:xfrm>
-            <a:off x="8238744" y="2258568"/>
-            <a:ext cx="3063240" cy="228600"/>
+            <a:off x="868680" y="3931920"/>
+            <a:ext cx="4928616" cy="201168"/>
           </a:xfrm>
           <a:prstGeom prst="rect">
             <a:avLst/>
@@ -6470,7 +8843,7 @@
               </a:spcAft>
             </a:pPr>
             <a:r>
-              <a:rPr sz="1000" b="1" lang="ko-KR">
+              <a:rPr sz="950" b="1" lang="ko-KR">
                 <a:solidFill>
                   <a:srgbClr val="FFC857"/>
                 </a:solidFill>
@@ -6490,8 +8863,8 @@
         </p:nvSpPr>
         <p:spPr>
           <a:xfrm>
-            <a:off x="8238744" y="2788920"/>
-            <a:ext cx="3063240" cy="475488"/>
+            <a:off x="868680" y="4261104"/>
+            <a:ext cx="1371600" cy="310896"/>
           </a:xfrm>
           <a:prstGeom prst="rect">
             <a:avLst/>
@@ -6513,7 +8886,7 @@
               </a:spcAft>
             </a:pPr>
             <a:r>
-              <a:rPr sz="2700" b="1" lang="ko-KR">
+              <a:rPr sz="1900" b="1" lang="ko-KR">
                 <a:solidFill>
                   <a:srgbClr val="F3F7FD"/>
                 </a:solidFill>
@@ -6533,8 +8906,8 @@
         </p:nvSpPr>
         <p:spPr>
           <a:xfrm>
-            <a:off x="8238744" y="3502152"/>
-            <a:ext cx="3017520" cy="1078992"/>
+            <a:off x="2258568" y="4215384"/>
+            <a:ext cx="3538727" cy="731520"/>
           </a:xfrm>
           <a:prstGeom prst="rect">
             <a:avLst/>
@@ -6556,7 +8929,7 @@
               </a:spcAft>
             </a:pPr>
             <a:r>
-              <a:rPr sz="1500" b="0" lang="ko-KR">
+              <a:rPr sz="1150" b="0" lang="ko-KR">
                 <a:solidFill>
                   <a:srgbClr val="9DB0C7"/>
                 </a:solidFill>
@@ -6576,8 +8949,8 @@
         </p:nvSpPr>
         <p:spPr>
           <a:xfrm>
-            <a:off x="8238744" y="4873752"/>
-            <a:ext cx="914400" cy="45720"/>
+            <a:off x="868680" y="5074920"/>
+            <a:ext cx="786384" cy="36576"/>
           </a:xfrm>
           <a:prstGeom prst="rect">
             <a:avLst/>
@@ -6615,7 +8988,226 @@
       </p:sp>
       <p:sp>
         <p:nvSpPr>
-          <p:cNvPr id="21" name="TextBox 20"/>
+          <p:cNvPr id="21" name="Rounded Rectangle 20"/>
+          <p:cNvSpPr/>
+          <p:nvPr/>
+        </p:nvSpPr>
+        <p:spPr>
+          <a:xfrm>
+            <a:off x="6190488" y="3730752"/>
+            <a:ext cx="5349240" cy="1572768"/>
+          </a:xfrm>
+          <a:prstGeom prst="roundRect">
+            <a:avLst/>
+          </a:prstGeom>
+          <a:solidFill>
+            <a:srgbClr val="10263A"/>
+          </a:solidFill>
+          <a:ln>
+            <a:solidFill>
+              <a:srgbClr val="203550"/>
+            </a:solidFill>
+          </a:ln>
+        </p:spPr>
+        <p:style>
+          <a:lnRef idx="1">
+            <a:schemeClr val="accent1"/>
+          </a:lnRef>
+          <a:fillRef idx="3">
+            <a:schemeClr val="accent1"/>
+          </a:fillRef>
+          <a:effectRef idx="2">
+            <a:schemeClr val="accent1"/>
+          </a:effectRef>
+          <a:fontRef idx="minor">
+            <a:schemeClr val="lt1"/>
+          </a:fontRef>
+        </p:style>
+        <p:txBody>
+          <a:bodyPr rtlCol="0" anchor="ctr"/>
+          <a:lstStyle/>
+          <a:p>
+            <a:pPr algn="ctr"/>
+          </a:p>
+        </p:txBody>
+      </p:sp>
+      <p:sp>
+        <p:nvSpPr>
+          <p:cNvPr id="22" name="TextBox 21"/>
+          <p:cNvSpPr txBox="1"/>
+          <p:nvPr/>
+        </p:nvSpPr>
+        <p:spPr>
+          <a:xfrm>
+            <a:off x="6400800" y="3931920"/>
+            <a:ext cx="4928616" cy="201168"/>
+          </a:xfrm>
+          <a:prstGeom prst="rect">
+            <a:avLst/>
+          </a:prstGeom>
+          <a:noFill/>
+        </p:spPr>
+        <p:txBody>
+          <a:bodyPr wrap="none" lIns="18288" rIns="18288" tIns="18288" bIns="18288" anchor="t">
+            <a:spAutoFit/>
+          </a:bodyPr>
+          <a:lstStyle/>
+          <a:p>
+            <a:pPr algn="l">
+              <a:lnSpc>
+                <a:spcPct val="105000"/>
+              </a:lnSpc>
+              <a:spcAft>
+                <a:spcPts val="0"/>
+              </a:spcAft>
+            </a:pPr>
+            <a:r>
+              <a:rPr sz="950" b="1" lang="ko-KR">
+                <a:solidFill>
+                  <a:srgbClr val="38D6FF"/>
+                </a:solidFill>
+                <a:latin typeface="Noto Sans KR"/>
+                <a:ea typeface="Noto Sans KR"/>
+              </a:rPr>
+              <a:t>04 EvidenceOps Agent</a:t>
+            </a:r>
+          </a:p>
+        </p:txBody>
+      </p:sp>
+      <p:sp>
+        <p:nvSpPr>
+          <p:cNvPr id="23" name="TextBox 22"/>
+          <p:cNvSpPr txBox="1"/>
+          <p:nvPr/>
+        </p:nvSpPr>
+        <p:spPr>
+          <a:xfrm>
+            <a:off x="6400800" y="4261104"/>
+            <a:ext cx="1371600" cy="310896"/>
+          </a:xfrm>
+          <a:prstGeom prst="rect">
+            <a:avLst/>
+          </a:prstGeom>
+          <a:noFill/>
+        </p:spPr>
+        <p:txBody>
+          <a:bodyPr wrap="none" lIns="18288" rIns="18288" tIns="18288" bIns="18288" anchor="t">
+            <a:spAutoFit/>
+          </a:bodyPr>
+          <a:lstStyle/>
+          <a:p>
+            <a:pPr algn="l">
+              <a:lnSpc>
+                <a:spcPct val="105000"/>
+              </a:lnSpc>
+              <a:spcAft>
+                <a:spcPts val="0"/>
+              </a:spcAft>
+            </a:pPr>
+            <a:r>
+              <a:rPr sz="1900" b="1" lang="ko-KR">
+                <a:solidFill>
+                  <a:srgbClr val="F3F7FD"/>
+                </a:solidFill>
+                <a:latin typeface="Noto Sans KR"/>
+                <a:ea typeface="Noto Sans KR"/>
+              </a:rPr>
+              <a:t>자동화</a:t>
+            </a:r>
+          </a:p>
+        </p:txBody>
+      </p:sp>
+      <p:sp>
+        <p:nvSpPr>
+          <p:cNvPr id="24" name="TextBox 23"/>
+          <p:cNvSpPr txBox="1"/>
+          <p:nvPr/>
+        </p:nvSpPr>
+        <p:spPr>
+          <a:xfrm>
+            <a:off x="7790688" y="4215384"/>
+            <a:ext cx="3538727" cy="731520"/>
+          </a:xfrm>
+          <a:prstGeom prst="rect">
+            <a:avLst/>
+          </a:prstGeom>
+          <a:noFill/>
+        </p:spPr>
+        <p:txBody>
+          <a:bodyPr wrap="none" lIns="18288" rIns="18288" tIns="18288" bIns="18288" anchor="t">
+            <a:spAutoFit/>
+          </a:bodyPr>
+          <a:lstStyle/>
+          <a:p>
+            <a:pPr algn="l">
+              <a:lnSpc>
+                <a:spcPct val="105000"/>
+              </a:lnSpc>
+              <a:spcAft>
+                <a:spcPts val="0"/>
+              </a:spcAft>
+            </a:pPr>
+            <a:r>
+              <a:rPr sz="1150" b="0" lang="ko-KR">
+                <a:solidFill>
+                  <a:srgbClr val="9DB0C7"/>
+                </a:solidFill>
+                <a:latin typeface="Noto Sans KR"/>
+                <a:ea typeface="Noto Sans KR"/>
+              </a:rPr>
+              <a:t>긴 AI 실험을 사람이 밤새 지키지 않아도 정책·큐·증거로 어떻게 운영할까?</a:t>
+            </a:r>
+          </a:p>
+        </p:txBody>
+      </p:sp>
+      <p:sp>
+        <p:nvSpPr>
+          <p:cNvPr id="25" name="Rectangle 24"/>
+          <p:cNvSpPr/>
+          <p:nvPr/>
+        </p:nvSpPr>
+        <p:spPr>
+          <a:xfrm>
+            <a:off x="6400800" y="5074920"/>
+            <a:ext cx="786384" cy="36576"/>
+          </a:xfrm>
+          <a:prstGeom prst="rect">
+            <a:avLst/>
+          </a:prstGeom>
+          <a:solidFill>
+            <a:srgbClr val="38D6FF"/>
+          </a:solidFill>
+          <a:ln>
+            <a:solidFill>
+              <a:srgbClr val="38D6FF"/>
+            </a:solidFill>
+          </a:ln>
+        </p:spPr>
+        <p:style>
+          <a:lnRef idx="1">
+            <a:schemeClr val="accent1"/>
+          </a:lnRef>
+          <a:fillRef idx="3">
+            <a:schemeClr val="accent1"/>
+          </a:fillRef>
+          <a:effectRef idx="2">
+            <a:schemeClr val="accent1"/>
+          </a:effectRef>
+          <a:fontRef idx="minor">
+            <a:schemeClr val="lt1"/>
+          </a:fontRef>
+        </p:style>
+        <p:txBody>
+          <a:bodyPr rtlCol="0" anchor="ctr"/>
+          <a:lstStyle/>
+          <a:p>
+            <a:pPr algn="ctr"/>
+          </a:p>
+        </p:txBody>
+      </p:sp>
+      <p:sp>
+        <p:nvSpPr>
+          <p:cNvPr id="26" name="TextBox 25"/>
           <p:cNvSpPr txBox="1"/>
           <p:nvPr/>
         </p:nvSpPr>
@@ -6658,7 +9250,7 @@
       </p:sp>
       <p:sp>
         <p:nvSpPr>
-          <p:cNvPr id="22" name="TextBox 21"/>
+          <p:cNvPr id="27" name="TextBox 26"/>
           <p:cNvSpPr txBox="1"/>
           <p:nvPr/>
         </p:nvSpPr>
@@ -15314,7 +17906,7 @@
                 <a:latin typeface="Noto Sans KR"/>
                 <a:ea typeface="Noto Sans KR"/>
               </a:rPr>
-              <a:t>ENGINEERING CONTRACTS</a:t>
+              <a:t>PROJECT 04 · EVIDENCEOPS AGENT</a:t>
             </a:r>
           </a:p>
         </p:txBody>
@@ -15357,7 +17949,7 @@
                 <a:latin typeface="Noto Sans KR"/>
                 <a:ea typeface="Noto Sans KR"/>
               </a:rPr>
-              <a:t>재현성을 코드로 강제</a:t>
+              <a:t>AI 실험 운영을 사람의 밤샘에서 분리</a:t>
             </a:r>
           </a:p>
         </p:txBody>
@@ -15400,7 +17992,7 @@
                 <a:latin typeface="Noto Sans KR"/>
                 <a:ea typeface="Noto Sans KR"/>
               </a:rPr>
-              <a:t>좋은 숫자보다 그 숫자가 어디서 왔는지 다시 확인할 수 있게 만들었습니다.</a:t>
+              <a:t>허용된 도구만 순차 실행하고 interruption 이후 checkpoint에서 재개합니다.</a:t>
             </a:r>
           </a:p>
         </p:txBody>
@@ -15448,429 +18040,1276 @@
           </a:p>
         </p:txBody>
       </p:sp>
-      <p:graphicFrame>
-        <p:nvGraphicFramePr>
-          <p:cNvPr id="6" name="Table 5"/>
-          <p:cNvGraphicFramePr>
-            <a:graphicFrameLocks noGrp="1"/>
-          </p:cNvGraphicFramePr>
-          <p:nvPr/>
-        </p:nvGraphicFramePr>
-        <p:xfrm>
-          <a:off x="658368" y="1901952"/>
-          <a:ext cx="10881360" cy="3584448"/>
-        </p:xfrm>
-        <a:graphic>
-          <a:graphicData uri="http://schemas.openxmlformats.org/drawingml/2006/table">
-            <a:tbl>
-              <a:tblPr firstRow="1" bandRow="1">
-                <a:tableStyleId>{5C22544A-7EE6-4342-B048-85BDC9FD1C3A}</a:tableStyleId>
-              </a:tblPr>
-              <a:tblGrid>
-                <a:gridCol w="2720340"/>
-                <a:gridCol w="2720340"/>
-                <a:gridCol w="2720340"/>
-                <a:gridCol w="2720340"/>
-              </a:tblGrid>
-              <a:tr h="896112">
-                <a:tc>
-                  <a:txBody>
-                    <a:bodyPr/>
-                    <a:lstStyle/>
-                    <a:p>
-                      <a:pPr algn="l"/>
-                      <a:r>
-                        <a:rPr sz="1050" b="1" lang="ko-KR">
-                          <a:solidFill>
-                            <a:srgbClr val="F3F7FD"/>
-                          </a:solidFill>
-                          <a:latin typeface="Noto Sans KR"/>
-                          <a:ea typeface="Noto Sans KR"/>
-                        </a:rPr>
-                        <a:t>프로젝트</a:t>
-                      </a:r>
-                    </a:p>
-                  </a:txBody>
-                  <a:tcPr marL="82296" marR="82296" marT="45720" marB="45720">
-                    <a:solidFill>
-                      <a:srgbClr val="10263A"/>
-                    </a:solidFill>
-                  </a:tcPr>
-                </a:tc>
-                <a:tc>
-                  <a:txBody>
-                    <a:bodyPr/>
-                    <a:lstStyle/>
-                    <a:p>
-                      <a:pPr algn="ctr"/>
-                      <a:r>
-                        <a:rPr sz="1050" b="1" lang="ko-KR">
-                          <a:solidFill>
-                            <a:srgbClr val="F3F7FD"/>
-                          </a:solidFill>
-                          <a:latin typeface="DejaVu Sans Mono"/>
-                          <a:ea typeface="DejaVu Sans Mono"/>
-                        </a:rPr>
-                        <a:t>입력 계약</a:t>
-                      </a:r>
-                    </a:p>
-                  </a:txBody>
-                  <a:tcPr marL="82296" marR="82296" marT="45720" marB="45720">
-                    <a:solidFill>
-                      <a:srgbClr val="10263A"/>
-                    </a:solidFill>
-                  </a:tcPr>
-                </a:tc>
-                <a:tc>
-                  <a:txBody>
-                    <a:bodyPr/>
-                    <a:lstStyle/>
-                    <a:p>
-                      <a:pPr algn="ctr"/>
-                      <a:r>
-                        <a:rPr sz="1050" b="1" lang="ko-KR">
-                          <a:solidFill>
-                            <a:srgbClr val="F3F7FD"/>
-                          </a:solidFill>
-                          <a:latin typeface="DejaVu Sans Mono"/>
-                          <a:ea typeface="DejaVu Sans Mono"/>
-                        </a:rPr>
-                        <a:t>검증</a:t>
-                      </a:r>
-                    </a:p>
-                  </a:txBody>
-                  <a:tcPr marL="82296" marR="82296" marT="45720" marB="45720">
-                    <a:solidFill>
-                      <a:srgbClr val="10263A"/>
-                    </a:solidFill>
-                  </a:tcPr>
-                </a:tc>
-                <a:tc>
-                  <a:txBody>
-                    <a:bodyPr/>
-                    <a:lstStyle/>
-                    <a:p>
-                      <a:pPr algn="ctr"/>
-                      <a:r>
-                        <a:rPr sz="1050" b="1" lang="ko-KR">
-                          <a:solidFill>
-                            <a:srgbClr val="F3F7FD"/>
-                          </a:solidFill>
-                          <a:latin typeface="DejaVu Sans Mono"/>
-                          <a:ea typeface="DejaVu Sans Mono"/>
-                        </a:rPr>
-                        <a:t>산출물</a:t>
-                      </a:r>
-                    </a:p>
-                  </a:txBody>
-                  <a:tcPr marL="82296" marR="82296" marT="45720" marB="45720">
-                    <a:solidFill>
-                      <a:srgbClr val="10263A"/>
-                    </a:solidFill>
-                  </a:tcPr>
-                </a:tc>
-              </a:tr>
-              <a:tr h="896112">
-                <a:tc>
-                  <a:txBody>
-                    <a:bodyPr/>
-                    <a:lstStyle/>
-                    <a:p>
-                      <a:pPr algn="l"/>
-                      <a:r>
-                        <a:rPr sz="1050" b="0" lang="ko-KR">
-                          <a:solidFill>
-                            <a:srgbClr val="F3F7FD"/>
-                          </a:solidFill>
-                          <a:latin typeface="Noto Sans KR"/>
-                          <a:ea typeface="Noto Sans KR"/>
-                        </a:rPr>
-                        <a:t>FinLLM Lab</a:t>
-                      </a:r>
-                    </a:p>
-                  </a:txBody>
-                  <a:tcPr marL="82296" marR="82296" marT="45720" marB="45720">
-                    <a:solidFill>
-                      <a:srgbClr val="0E1D30"/>
-                    </a:solidFill>
-                  </a:tcPr>
-                </a:tc>
-                <a:tc>
-                  <a:txBody>
-                    <a:bodyPr/>
-                    <a:lstStyle/>
-                    <a:p>
-                      <a:pPr algn="ctr"/>
-                      <a:r>
-                        <a:rPr sz="1050" b="0" lang="ko-KR">
-                          <a:solidFill>
-                            <a:srgbClr val="9AF56D"/>
-                          </a:solidFill>
-                          <a:latin typeface="DejaVu Sans Mono"/>
-                          <a:ea typeface="DejaVu Sans Mono"/>
-                        </a:rPr>
-                        <a:t>model·tokenizer revision, ACL corpus</a:t>
-                      </a:r>
-                    </a:p>
-                  </a:txBody>
-                  <a:tcPr marL="82296" marR="82296" marT="45720" marB="45720">
-                    <a:solidFill>
-                      <a:srgbClr val="0E1D30"/>
-                    </a:solidFill>
-                  </a:tcPr>
-                </a:tc>
-                <a:tc>
-                  <a:txBody>
-                    <a:bodyPr/>
-                    <a:lstStyle/>
-                    <a:p>
-                      <a:pPr algn="ctr"/>
-                      <a:r>
-                        <a:rPr sz="1050" b="0" lang="ko-KR">
-                          <a:solidFill>
-                            <a:srgbClr val="9AF56D"/>
-                          </a:solidFill>
-                          <a:latin typeface="DejaVu Sans Mono"/>
-                          <a:ea typeface="DejaVu Sans Mono"/>
-                        </a:rPr>
-                        <a:t>schema + 11-stage gate</a:t>
-                      </a:r>
-                    </a:p>
-                  </a:txBody>
-                  <a:tcPr marL="82296" marR="82296" marT="45720" marB="45720">
-                    <a:solidFill>
-                      <a:srgbClr val="0E1D30"/>
-                    </a:solidFill>
-                  </a:tcPr>
-                </a:tc>
-                <a:tc>
-                  <a:txBody>
-                    <a:bodyPr/>
-                    <a:lstStyle/>
-                    <a:p>
-                      <a:pPr algn="ctr"/>
-                      <a:r>
-                        <a:rPr sz="1050" b="0" lang="ko-KR">
-                          <a:solidFill>
-                            <a:srgbClr val="9AF56D"/>
-                          </a:solidFill>
-                          <a:latin typeface="DejaVu Sans Mono"/>
-                          <a:ea typeface="DejaVu Sans Mono"/>
-                        </a:rPr>
-                        <a:t>result JSON · ADR · incident</a:t>
-                      </a:r>
-                    </a:p>
-                  </a:txBody>
-                  <a:tcPr marL="82296" marR="82296" marT="45720" marB="45720">
-                    <a:solidFill>
-                      <a:srgbClr val="0E1D30"/>
-                    </a:solidFill>
-                  </a:tcPr>
-                </a:tc>
-              </a:tr>
-              <a:tr h="896112">
-                <a:tc>
-                  <a:txBody>
-                    <a:bodyPr/>
-                    <a:lstStyle/>
-                    <a:p>
-                      <a:pPr algn="l"/>
-                      <a:r>
-                        <a:rPr sz="1050" b="0" lang="ko-KR">
-                          <a:solidFill>
-                            <a:srgbClr val="F3F7FD"/>
-                          </a:solidFill>
-                          <a:latin typeface="Noto Sans KR"/>
-                          <a:ea typeface="Noto Sans KR"/>
-                        </a:rPr>
-                        <a:t>Quantization Autopsy</a:t>
-                      </a:r>
-                    </a:p>
-                  </a:txBody>
-                  <a:tcPr marL="82296" marR="82296" marT="45720" marB="45720">
-                    <a:solidFill>
-                      <a:srgbClr val="0E1D30"/>
-                    </a:solidFill>
-                  </a:tcPr>
-                </a:tc>
-                <a:tc>
-                  <a:txBody>
-                    <a:bodyPr/>
-                    <a:lstStyle/>
-                    <a:p>
-                      <a:pPr algn="ctr"/>
-                      <a:r>
-                        <a:rPr sz="1050" b="0" lang="ko-KR">
-                          <a:solidFill>
-                            <a:srgbClr val="9AF56D"/>
-                          </a:solidFill>
-                          <a:latin typeface="DejaVu Sans Mono"/>
-                          <a:ea typeface="DejaVu Sans Mono"/>
-                        </a:rPr>
-                        <a:t>18 immutable runs</a:t>
-                      </a:r>
-                    </a:p>
-                  </a:txBody>
-                  <a:tcPr marL="82296" marR="82296" marT="45720" marB="45720">
-                    <a:solidFill>
-                      <a:srgbClr val="0E1D30"/>
-                    </a:solidFill>
-                  </a:tcPr>
-                </a:tc>
-                <a:tc>
-                  <a:txBody>
-                    <a:bodyPr/>
-                    <a:lstStyle/>
-                    <a:p>
-                      <a:pPr algn="ctr"/>
-                      <a:r>
-                        <a:rPr sz="1050" b="0" lang="ko-KR">
-                          <a:solidFill>
-                            <a:srgbClr val="9AF56D"/>
-                          </a:solidFill>
-                          <a:latin typeface="DejaVu Sans Mono"/>
-                          <a:ea typeface="DejaVu Sans Mono"/>
-                        </a:rPr>
-                        <a:t>3회 반복·provenance</a:t>
-                      </a:r>
-                    </a:p>
-                  </a:txBody>
-                  <a:tcPr marL="82296" marR="82296" marT="45720" marB="45720">
-                    <a:solidFill>
-                      <a:srgbClr val="0E1D30"/>
-                    </a:solidFill>
-                  </a:tcPr>
-                </a:tc>
-                <a:tc>
-                  <a:txBody>
-                    <a:bodyPr/>
-                    <a:lstStyle/>
-                    <a:p>
-                      <a:pPr algn="ctr"/>
-                      <a:r>
-                        <a:rPr sz="1050" b="0" lang="ko-KR">
-                          <a:solidFill>
-                            <a:srgbClr val="9AF56D"/>
-                          </a:solidFill>
-                          <a:latin typeface="DejaVu Sans Mono"/>
-                          <a:ea typeface="DejaVu Sans Mono"/>
-                        </a:rPr>
-                        <a:t>JSON · CSV · Markdown · HTML</a:t>
-                      </a:r>
-                    </a:p>
-                  </a:txBody>
-                  <a:tcPr marL="82296" marR="82296" marT="45720" marB="45720">
-                    <a:solidFill>
-                      <a:srgbClr val="0E1D30"/>
-                    </a:solidFill>
-                  </a:tcPr>
-                </a:tc>
-              </a:tr>
-              <a:tr h="896112">
-                <a:tc>
-                  <a:txBody>
-                    <a:bodyPr/>
-                    <a:lstStyle/>
-                    <a:p>
-                      <a:pPr algn="l"/>
-                      <a:r>
-                        <a:rPr sz="1050" b="0" lang="ko-KR">
-                          <a:solidFill>
-                            <a:srgbClr val="F3F7FD"/>
-                          </a:solidFill>
-                          <a:latin typeface="Noto Sans KR"/>
-                          <a:ea typeface="Noto Sans KR"/>
-                        </a:rPr>
-                        <a:t>K-VoiceBench</a:t>
-                      </a:r>
-                    </a:p>
-                  </a:txBody>
-                  <a:tcPr marL="82296" marR="82296" marT="45720" marB="45720">
-                    <a:solidFill>
-                      <a:srgbClr val="0E1D30"/>
-                    </a:solidFill>
-                  </a:tcPr>
-                </a:tc>
-                <a:tc>
-                  <a:txBody>
-                    <a:bodyPr/>
-                    <a:lstStyle/>
-                    <a:p>
-                      <a:pPr algn="ctr"/>
-                      <a:r>
-                        <a:rPr sz="1050" b="0" lang="ko-KR">
-                          <a:solidFill>
-                            <a:srgbClr val="9AF56D"/>
-                          </a:solidFill>
-                          <a:latin typeface="DejaVu Sans Mono"/>
-                          <a:ea typeface="DejaVu Sans Mono"/>
-                        </a:rPr>
-                        <a:t>audio manifest·GPU visibility</a:t>
-                      </a:r>
-                    </a:p>
-                  </a:txBody>
-                  <a:tcPr marL="82296" marR="82296" marT="45720" marB="45720">
-                    <a:solidFill>
-                      <a:srgbClr val="0E1D30"/>
-                    </a:solidFill>
-                  </a:tcPr>
-                </a:tc>
-                <a:tc>
-                  <a:txBody>
-                    <a:bodyPr/>
-                    <a:lstStyle/>
-                    <a:p>
-                      <a:pPr algn="ctr"/>
-                      <a:r>
-                        <a:rPr sz="1050" b="0" lang="ko-KR">
-                          <a:solidFill>
-                            <a:srgbClr val="9AF56D"/>
-                          </a:solidFill>
-                          <a:latin typeface="DejaVu Sans Mono"/>
-                          <a:ea typeface="DejaVu Sans Mono"/>
-                        </a:rPr>
-                        <a:t>WER/CER/entity contract</a:t>
-                      </a:r>
-                    </a:p>
-                  </a:txBody>
-                  <a:tcPr marL="82296" marR="82296" marT="45720" marB="45720">
-                    <a:solidFill>
-                      <a:srgbClr val="0E1D30"/>
-                    </a:solidFill>
-                  </a:tcPr>
-                </a:tc>
-                <a:tc>
-                  <a:txBody>
-                    <a:bodyPr/>
-                    <a:lstStyle/>
-                    <a:p>
-                      <a:pPr algn="ctr"/>
-                      <a:r>
-                        <a:rPr sz="1050" b="0" lang="ko-KR">
-                          <a:solidFill>
-                            <a:srgbClr val="9AF56D"/>
-                          </a:solidFill>
-                          <a:latin typeface="DejaVu Sans Mono"/>
-                          <a:ea typeface="DejaVu Sans Mono"/>
-                        </a:rPr>
-                        <a:t>result JSON · HTML · CI</a:t>
-                      </a:r>
-                    </a:p>
-                  </a:txBody>
-                  <a:tcPr marL="82296" marR="82296" marT="45720" marB="45720">
-                    <a:solidFill>
-                      <a:srgbClr val="0E1D30"/>
-                    </a:solidFill>
-                  </a:tcPr>
-                </a:tc>
-              </a:tr>
-            </a:tbl>
-          </a:graphicData>
-        </a:graphic>
-      </p:graphicFrame>
-      <p:sp>
-        <p:nvSpPr>
-          <p:cNvPr id="7" name="Rounded Rectangle 6"/>
+      <p:sp>
+        <p:nvSpPr>
+          <p:cNvPr id="6" name="Rounded Rectangle 5"/>
+          <p:cNvSpPr/>
+          <p:nvPr/>
+        </p:nvSpPr>
+        <p:spPr>
+          <a:xfrm>
+            <a:off x="658368" y="1975104"/>
+            <a:ext cx="1714500" cy="1078992"/>
+          </a:xfrm>
+          <a:prstGeom prst="roundRect">
+            <a:avLst/>
+          </a:prstGeom>
+          <a:solidFill>
+            <a:srgbClr val="10263A"/>
+          </a:solidFill>
+          <a:ln>
+            <a:solidFill>
+              <a:srgbClr val="203550"/>
+            </a:solidFill>
+          </a:ln>
+        </p:spPr>
+        <p:style>
+          <a:lnRef idx="1">
+            <a:schemeClr val="accent1"/>
+          </a:lnRef>
+          <a:fillRef idx="3">
+            <a:schemeClr val="accent1"/>
+          </a:fillRef>
+          <a:effectRef idx="2">
+            <a:schemeClr val="accent1"/>
+          </a:effectRef>
+          <a:fontRef idx="minor">
+            <a:schemeClr val="lt1"/>
+          </a:fontRef>
+        </p:style>
+        <p:txBody>
+          <a:bodyPr rtlCol="0" anchor="ctr"/>
+          <a:lstStyle/>
+          <a:p>
+            <a:pPr algn="ctr"/>
+          </a:p>
+        </p:txBody>
+      </p:sp>
+      <p:sp>
+        <p:nvSpPr>
+          <p:cNvPr id="7" name="TextBox 6"/>
+          <p:cNvSpPr txBox="1"/>
+          <p:nvPr/>
+        </p:nvSpPr>
+        <p:spPr>
+          <a:xfrm>
+            <a:off x="731519" y="2249424"/>
+            <a:ext cx="1568196" cy="530352"/>
+          </a:xfrm>
+          <a:prstGeom prst="rect">
+            <a:avLst/>
+          </a:prstGeom>
+          <a:noFill/>
+        </p:spPr>
+        <p:txBody>
+          <a:bodyPr wrap="none" lIns="18288" rIns="18288" tIns="18288" bIns="18288" anchor="ctr">
+            <a:spAutoFit/>
+          </a:bodyPr>
+          <a:lstStyle/>
+          <a:p>
+            <a:pPr algn="ctr">
+              <a:lnSpc>
+                <a:spcPct val="105000"/>
+              </a:lnSpc>
+              <a:spcAft>
+                <a:spcPts val="0"/>
+              </a:spcAft>
+            </a:pPr>
+            <a:r>
+              <a:rPr sz="1250" b="1" lang="ko-KR">
+                <a:solidFill>
+                  <a:srgbClr val="F3F7FD"/>
+                </a:solidFill>
+                <a:latin typeface="Noto Sans KR"/>
+                <a:ea typeface="Noto Sans KR"/>
+              </a:rPr>
+              <a:t>Discover</a:t>
+            </a:r>
+          </a:p>
+        </p:txBody>
+      </p:sp>
+      <p:sp>
+        <p:nvSpPr>
+          <p:cNvPr id="8" name="TextBox 7"/>
+          <p:cNvSpPr txBox="1"/>
+          <p:nvPr/>
+        </p:nvSpPr>
+        <p:spPr>
+          <a:xfrm>
+            <a:off x="2354579" y="2386584"/>
+            <a:ext cx="155448" cy="219456"/>
+          </a:xfrm>
+          <a:prstGeom prst="rect">
+            <a:avLst/>
+          </a:prstGeom>
+          <a:noFill/>
+        </p:spPr>
+        <p:txBody>
+          <a:bodyPr wrap="none" lIns="18288" rIns="18288" tIns="18288" bIns="18288" anchor="t">
+            <a:spAutoFit/>
+          </a:bodyPr>
+          <a:lstStyle/>
+          <a:p>
+            <a:pPr algn="ctr">
+              <a:lnSpc>
+                <a:spcPct val="105000"/>
+              </a:lnSpc>
+              <a:spcAft>
+                <a:spcPts val="0"/>
+              </a:spcAft>
+            </a:pPr>
+            <a:r>
+              <a:rPr sz="1400" b="1" lang="ko-KR">
+                <a:solidFill>
+                  <a:srgbClr val="38D6FF"/>
+                </a:solidFill>
+                <a:latin typeface="Noto Sans KR"/>
+                <a:ea typeface="Noto Sans KR"/>
+              </a:rPr>
+              <a:t>→</a:t>
+            </a:r>
+          </a:p>
+        </p:txBody>
+      </p:sp>
+      <p:sp>
+        <p:nvSpPr>
+          <p:cNvPr id="9" name="Rounded Rectangle 8"/>
+          <p:cNvSpPr/>
+          <p:nvPr/>
+        </p:nvSpPr>
+        <p:spPr>
+          <a:xfrm>
+            <a:off x="2491739" y="1975104"/>
+            <a:ext cx="1714500" cy="1078992"/>
+          </a:xfrm>
+          <a:prstGeom prst="roundRect">
+            <a:avLst/>
+          </a:prstGeom>
+          <a:solidFill>
+            <a:srgbClr val="10263A"/>
+          </a:solidFill>
+          <a:ln>
+            <a:solidFill>
+              <a:srgbClr val="203550"/>
+            </a:solidFill>
+          </a:ln>
+        </p:spPr>
+        <p:style>
+          <a:lnRef idx="1">
+            <a:schemeClr val="accent1"/>
+          </a:lnRef>
+          <a:fillRef idx="3">
+            <a:schemeClr val="accent1"/>
+          </a:fillRef>
+          <a:effectRef idx="2">
+            <a:schemeClr val="accent1"/>
+          </a:effectRef>
+          <a:fontRef idx="minor">
+            <a:schemeClr val="lt1"/>
+          </a:fontRef>
+        </p:style>
+        <p:txBody>
+          <a:bodyPr rtlCol="0" anchor="ctr"/>
+          <a:lstStyle/>
+          <a:p>
+            <a:pPr algn="ctr"/>
+          </a:p>
+        </p:txBody>
+      </p:sp>
+      <p:sp>
+        <p:nvSpPr>
+          <p:cNvPr id="10" name="TextBox 9"/>
+          <p:cNvSpPr txBox="1"/>
+          <p:nvPr/>
+        </p:nvSpPr>
+        <p:spPr>
+          <a:xfrm>
+            <a:off x="2564891" y="2249424"/>
+            <a:ext cx="1568196" cy="530352"/>
+          </a:xfrm>
+          <a:prstGeom prst="rect">
+            <a:avLst/>
+          </a:prstGeom>
+          <a:noFill/>
+        </p:spPr>
+        <p:txBody>
+          <a:bodyPr wrap="none" lIns="18288" rIns="18288" tIns="18288" bIns="18288" anchor="ctr">
+            <a:spAutoFit/>
+          </a:bodyPr>
+          <a:lstStyle/>
+          <a:p>
+            <a:pPr algn="ctr">
+              <a:lnSpc>
+                <a:spcPct val="105000"/>
+              </a:lnSpc>
+              <a:spcAft>
+                <a:spcPts val="0"/>
+              </a:spcAft>
+            </a:pPr>
+            <a:r>
+              <a:rPr sz="1250" b="1" lang="ko-KR">
+                <a:solidFill>
+                  <a:srgbClr val="F3F7FD"/>
+                </a:solidFill>
+                <a:latin typeface="Noto Sans KR"/>
+                <a:ea typeface="Noto Sans KR"/>
+              </a:rPr>
+              <a:t>Policy Gate</a:t>
+            </a:r>
+          </a:p>
+        </p:txBody>
+      </p:sp>
+      <p:sp>
+        <p:nvSpPr>
+          <p:cNvPr id="11" name="TextBox 10"/>
+          <p:cNvSpPr txBox="1"/>
+          <p:nvPr/>
+        </p:nvSpPr>
+        <p:spPr>
+          <a:xfrm>
+            <a:off x="4187952" y="2386584"/>
+            <a:ext cx="155448" cy="219456"/>
+          </a:xfrm>
+          <a:prstGeom prst="rect">
+            <a:avLst/>
+          </a:prstGeom>
+          <a:noFill/>
+        </p:spPr>
+        <p:txBody>
+          <a:bodyPr wrap="none" lIns="18288" rIns="18288" tIns="18288" bIns="18288" anchor="t">
+            <a:spAutoFit/>
+          </a:bodyPr>
+          <a:lstStyle/>
+          <a:p>
+            <a:pPr algn="ctr">
+              <a:lnSpc>
+                <a:spcPct val="105000"/>
+              </a:lnSpc>
+              <a:spcAft>
+                <a:spcPts val="0"/>
+              </a:spcAft>
+            </a:pPr>
+            <a:r>
+              <a:rPr sz="1400" b="1" lang="ko-KR">
+                <a:solidFill>
+                  <a:srgbClr val="38D6FF"/>
+                </a:solidFill>
+                <a:latin typeface="Noto Sans KR"/>
+                <a:ea typeface="Noto Sans KR"/>
+              </a:rPr>
+              <a:t>→</a:t>
+            </a:r>
+          </a:p>
+        </p:txBody>
+      </p:sp>
+      <p:sp>
+        <p:nvSpPr>
+          <p:cNvPr id="12" name="Rounded Rectangle 11"/>
+          <p:cNvSpPr/>
+          <p:nvPr/>
+        </p:nvSpPr>
+        <p:spPr>
+          <a:xfrm>
+            <a:off x="4325112" y="1975104"/>
+            <a:ext cx="1714500" cy="1078992"/>
+          </a:xfrm>
+          <a:prstGeom prst="roundRect">
+            <a:avLst/>
+          </a:prstGeom>
+          <a:solidFill>
+            <a:srgbClr val="10263A"/>
+          </a:solidFill>
+          <a:ln>
+            <a:solidFill>
+              <a:srgbClr val="203550"/>
+            </a:solidFill>
+          </a:ln>
+        </p:spPr>
+        <p:style>
+          <a:lnRef idx="1">
+            <a:schemeClr val="accent1"/>
+          </a:lnRef>
+          <a:fillRef idx="3">
+            <a:schemeClr val="accent1"/>
+          </a:fillRef>
+          <a:effectRef idx="2">
+            <a:schemeClr val="accent1"/>
+          </a:effectRef>
+          <a:fontRef idx="minor">
+            <a:schemeClr val="lt1"/>
+          </a:fontRef>
+        </p:style>
+        <p:txBody>
+          <a:bodyPr rtlCol="0" anchor="ctr"/>
+          <a:lstStyle/>
+          <a:p>
+            <a:pPr algn="ctr"/>
+          </a:p>
+        </p:txBody>
+      </p:sp>
+      <p:sp>
+        <p:nvSpPr>
+          <p:cNvPr id="13" name="TextBox 12"/>
+          <p:cNvSpPr txBox="1"/>
+          <p:nvPr/>
+        </p:nvSpPr>
+        <p:spPr>
+          <a:xfrm>
+            <a:off x="4398264" y="2249424"/>
+            <a:ext cx="1568196" cy="530352"/>
+          </a:xfrm>
+          <a:prstGeom prst="rect">
+            <a:avLst/>
+          </a:prstGeom>
+          <a:noFill/>
+        </p:spPr>
+        <p:txBody>
+          <a:bodyPr wrap="none" lIns="18288" rIns="18288" tIns="18288" bIns="18288" anchor="ctr">
+            <a:spAutoFit/>
+          </a:bodyPr>
+          <a:lstStyle/>
+          <a:p>
+            <a:pPr algn="ctr">
+              <a:lnSpc>
+                <a:spcPct val="105000"/>
+              </a:lnSpc>
+              <a:spcAft>
+                <a:spcPts val="0"/>
+              </a:spcAft>
+            </a:pPr>
+            <a:r>
+              <a:rPr sz="1250" b="1" lang="ko-KR">
+                <a:solidFill>
+                  <a:srgbClr val="F3F7FD"/>
+                </a:solidFill>
+                <a:latin typeface="Noto Sans KR"/>
+                <a:ea typeface="Noto Sans KR"/>
+              </a:rPr>
+              <a:t>Sequential Queue</a:t>
+            </a:r>
+          </a:p>
+        </p:txBody>
+      </p:sp>
+      <p:sp>
+        <p:nvSpPr>
+          <p:cNvPr id="14" name="TextBox 13"/>
+          <p:cNvSpPr txBox="1"/>
+          <p:nvPr/>
+        </p:nvSpPr>
+        <p:spPr>
+          <a:xfrm>
+            <a:off x="6021324" y="2386584"/>
+            <a:ext cx="155448" cy="219456"/>
+          </a:xfrm>
+          <a:prstGeom prst="rect">
+            <a:avLst/>
+          </a:prstGeom>
+          <a:noFill/>
+        </p:spPr>
+        <p:txBody>
+          <a:bodyPr wrap="none" lIns="18288" rIns="18288" tIns="18288" bIns="18288" anchor="t">
+            <a:spAutoFit/>
+          </a:bodyPr>
+          <a:lstStyle/>
+          <a:p>
+            <a:pPr algn="ctr">
+              <a:lnSpc>
+                <a:spcPct val="105000"/>
+              </a:lnSpc>
+              <a:spcAft>
+                <a:spcPts val="0"/>
+              </a:spcAft>
+            </a:pPr>
+            <a:r>
+              <a:rPr sz="1400" b="1" lang="ko-KR">
+                <a:solidFill>
+                  <a:srgbClr val="38D6FF"/>
+                </a:solidFill>
+                <a:latin typeface="Noto Sans KR"/>
+                <a:ea typeface="Noto Sans KR"/>
+              </a:rPr>
+              <a:t>→</a:t>
+            </a:r>
+          </a:p>
+        </p:txBody>
+      </p:sp>
+      <p:sp>
+        <p:nvSpPr>
+          <p:cNvPr id="15" name="Rounded Rectangle 14"/>
+          <p:cNvSpPr/>
+          <p:nvPr/>
+        </p:nvSpPr>
+        <p:spPr>
+          <a:xfrm>
+            <a:off x="6158483" y="1975104"/>
+            <a:ext cx="1714500" cy="1078992"/>
+          </a:xfrm>
+          <a:prstGeom prst="roundRect">
+            <a:avLst/>
+          </a:prstGeom>
+          <a:solidFill>
+            <a:srgbClr val="10263A"/>
+          </a:solidFill>
+          <a:ln>
+            <a:solidFill>
+              <a:srgbClr val="203550"/>
+            </a:solidFill>
+          </a:ln>
+        </p:spPr>
+        <p:style>
+          <a:lnRef idx="1">
+            <a:schemeClr val="accent1"/>
+          </a:lnRef>
+          <a:fillRef idx="3">
+            <a:schemeClr val="accent1"/>
+          </a:fillRef>
+          <a:effectRef idx="2">
+            <a:schemeClr val="accent1"/>
+          </a:effectRef>
+          <a:fontRef idx="minor">
+            <a:schemeClr val="lt1"/>
+          </a:fontRef>
+        </p:style>
+        <p:txBody>
+          <a:bodyPr rtlCol="0" anchor="ctr"/>
+          <a:lstStyle/>
+          <a:p>
+            <a:pPr algn="ctr"/>
+          </a:p>
+        </p:txBody>
+      </p:sp>
+      <p:sp>
+        <p:nvSpPr>
+          <p:cNvPr id="16" name="TextBox 15"/>
+          <p:cNvSpPr txBox="1"/>
+          <p:nvPr/>
+        </p:nvSpPr>
+        <p:spPr>
+          <a:xfrm>
+            <a:off x="6231636" y="2249424"/>
+            <a:ext cx="1568196" cy="530352"/>
+          </a:xfrm>
+          <a:prstGeom prst="rect">
+            <a:avLst/>
+          </a:prstGeom>
+          <a:noFill/>
+        </p:spPr>
+        <p:txBody>
+          <a:bodyPr wrap="none" lIns="18288" rIns="18288" tIns="18288" bIns="18288" anchor="ctr">
+            <a:spAutoFit/>
+          </a:bodyPr>
+          <a:lstStyle/>
+          <a:p>
+            <a:pPr algn="ctr">
+              <a:lnSpc>
+                <a:spcPct val="105000"/>
+              </a:lnSpc>
+              <a:spcAft>
+                <a:spcPts val="0"/>
+              </a:spcAft>
+            </a:pPr>
+            <a:r>
+              <a:rPr sz="1250" b="1" lang="ko-KR">
+                <a:solidFill>
+                  <a:srgbClr val="F3F7FD"/>
+                </a:solidFill>
+                <a:latin typeface="Noto Sans KR"/>
+                <a:ea typeface="Noto Sans KR"/>
+              </a:rPr>
+              <a:t>Execute</a:t>
+            </a:r>
+          </a:p>
+        </p:txBody>
+      </p:sp>
+      <p:sp>
+        <p:nvSpPr>
+          <p:cNvPr id="17" name="TextBox 16"/>
+          <p:cNvSpPr txBox="1"/>
+          <p:nvPr/>
+        </p:nvSpPr>
+        <p:spPr>
+          <a:xfrm>
+            <a:off x="7854696" y="2386584"/>
+            <a:ext cx="155448" cy="219456"/>
+          </a:xfrm>
+          <a:prstGeom prst="rect">
+            <a:avLst/>
+          </a:prstGeom>
+          <a:noFill/>
+        </p:spPr>
+        <p:txBody>
+          <a:bodyPr wrap="none" lIns="18288" rIns="18288" tIns="18288" bIns="18288" anchor="t">
+            <a:spAutoFit/>
+          </a:bodyPr>
+          <a:lstStyle/>
+          <a:p>
+            <a:pPr algn="ctr">
+              <a:lnSpc>
+                <a:spcPct val="105000"/>
+              </a:lnSpc>
+              <a:spcAft>
+                <a:spcPts val="0"/>
+              </a:spcAft>
+            </a:pPr>
+            <a:r>
+              <a:rPr sz="1400" b="1" lang="ko-KR">
+                <a:solidFill>
+                  <a:srgbClr val="38D6FF"/>
+                </a:solidFill>
+                <a:latin typeface="Noto Sans KR"/>
+                <a:ea typeface="Noto Sans KR"/>
+              </a:rPr>
+              <a:t>→</a:t>
+            </a:r>
+          </a:p>
+        </p:txBody>
+      </p:sp>
+      <p:sp>
+        <p:nvSpPr>
+          <p:cNvPr id="18" name="Rounded Rectangle 17"/>
+          <p:cNvSpPr/>
+          <p:nvPr/>
+        </p:nvSpPr>
+        <p:spPr>
+          <a:xfrm>
+            <a:off x="7991856" y="1975104"/>
+            <a:ext cx="1714500" cy="1078992"/>
+          </a:xfrm>
+          <a:prstGeom prst="roundRect">
+            <a:avLst/>
+          </a:prstGeom>
+          <a:solidFill>
+            <a:srgbClr val="10263A"/>
+          </a:solidFill>
+          <a:ln>
+            <a:solidFill>
+              <a:srgbClr val="203550"/>
+            </a:solidFill>
+          </a:ln>
+        </p:spPr>
+        <p:style>
+          <a:lnRef idx="1">
+            <a:schemeClr val="accent1"/>
+          </a:lnRef>
+          <a:fillRef idx="3">
+            <a:schemeClr val="accent1"/>
+          </a:fillRef>
+          <a:effectRef idx="2">
+            <a:schemeClr val="accent1"/>
+          </a:effectRef>
+          <a:fontRef idx="minor">
+            <a:schemeClr val="lt1"/>
+          </a:fontRef>
+        </p:style>
+        <p:txBody>
+          <a:bodyPr rtlCol="0" anchor="ctr"/>
+          <a:lstStyle/>
+          <a:p>
+            <a:pPr algn="ctr"/>
+          </a:p>
+        </p:txBody>
+      </p:sp>
+      <p:sp>
+        <p:nvSpPr>
+          <p:cNvPr id="19" name="TextBox 18"/>
+          <p:cNvSpPr txBox="1"/>
+          <p:nvPr/>
+        </p:nvSpPr>
+        <p:spPr>
+          <a:xfrm>
+            <a:off x="8065008" y="2249424"/>
+            <a:ext cx="1568196" cy="530352"/>
+          </a:xfrm>
+          <a:prstGeom prst="rect">
+            <a:avLst/>
+          </a:prstGeom>
+          <a:noFill/>
+        </p:spPr>
+        <p:txBody>
+          <a:bodyPr wrap="none" lIns="18288" rIns="18288" tIns="18288" bIns="18288" anchor="ctr">
+            <a:spAutoFit/>
+          </a:bodyPr>
+          <a:lstStyle/>
+          <a:p>
+            <a:pPr algn="ctr">
+              <a:lnSpc>
+                <a:spcPct val="105000"/>
+              </a:lnSpc>
+              <a:spcAft>
+                <a:spcPts val="0"/>
+              </a:spcAft>
+            </a:pPr>
+            <a:r>
+              <a:rPr sz="1250" b="1" lang="ko-KR">
+                <a:solidFill>
+                  <a:srgbClr val="F3F7FD"/>
+                </a:solidFill>
+                <a:latin typeface="Noto Sans KR"/>
+                <a:ea typeface="Noto Sans KR"/>
+              </a:rPr>
+              <a:t>Observe·Triage</a:t>
+            </a:r>
+          </a:p>
+        </p:txBody>
+      </p:sp>
+      <p:sp>
+        <p:nvSpPr>
+          <p:cNvPr id="20" name="TextBox 19"/>
+          <p:cNvSpPr txBox="1"/>
+          <p:nvPr/>
+        </p:nvSpPr>
+        <p:spPr>
+          <a:xfrm>
+            <a:off x="9688068" y="2386584"/>
+            <a:ext cx="155448" cy="219456"/>
+          </a:xfrm>
+          <a:prstGeom prst="rect">
+            <a:avLst/>
+          </a:prstGeom>
+          <a:noFill/>
+        </p:spPr>
+        <p:txBody>
+          <a:bodyPr wrap="none" lIns="18288" rIns="18288" tIns="18288" bIns="18288" anchor="t">
+            <a:spAutoFit/>
+          </a:bodyPr>
+          <a:lstStyle/>
+          <a:p>
+            <a:pPr algn="ctr">
+              <a:lnSpc>
+                <a:spcPct val="105000"/>
+              </a:lnSpc>
+              <a:spcAft>
+                <a:spcPts val="0"/>
+              </a:spcAft>
+            </a:pPr>
+            <a:r>
+              <a:rPr sz="1400" b="1" lang="ko-KR">
+                <a:solidFill>
+                  <a:srgbClr val="38D6FF"/>
+                </a:solidFill>
+                <a:latin typeface="Noto Sans KR"/>
+                <a:ea typeface="Noto Sans KR"/>
+              </a:rPr>
+              <a:t>→</a:t>
+            </a:r>
+          </a:p>
+        </p:txBody>
+      </p:sp>
+      <p:sp>
+        <p:nvSpPr>
+          <p:cNvPr id="21" name="Rounded Rectangle 20"/>
+          <p:cNvSpPr/>
+          <p:nvPr/>
+        </p:nvSpPr>
+        <p:spPr>
+          <a:xfrm>
+            <a:off x="9825228" y="1975104"/>
+            <a:ext cx="1714500" cy="1078992"/>
+          </a:xfrm>
+          <a:prstGeom prst="roundRect">
+            <a:avLst/>
+          </a:prstGeom>
+          <a:solidFill>
+            <a:srgbClr val="10263A"/>
+          </a:solidFill>
+          <a:ln>
+            <a:solidFill>
+              <a:srgbClr val="203550"/>
+            </a:solidFill>
+          </a:ln>
+        </p:spPr>
+        <p:style>
+          <a:lnRef idx="1">
+            <a:schemeClr val="accent1"/>
+          </a:lnRef>
+          <a:fillRef idx="3">
+            <a:schemeClr val="accent1"/>
+          </a:fillRef>
+          <a:effectRef idx="2">
+            <a:schemeClr val="accent1"/>
+          </a:effectRef>
+          <a:fontRef idx="minor">
+            <a:schemeClr val="lt1"/>
+          </a:fontRef>
+        </p:style>
+        <p:txBody>
+          <a:bodyPr rtlCol="0" anchor="ctr"/>
+          <a:lstStyle/>
+          <a:p>
+            <a:pPr algn="ctr"/>
+          </a:p>
+        </p:txBody>
+      </p:sp>
+      <p:sp>
+        <p:nvSpPr>
+          <p:cNvPr id="22" name="TextBox 21"/>
+          <p:cNvSpPr txBox="1"/>
+          <p:nvPr/>
+        </p:nvSpPr>
+        <p:spPr>
+          <a:xfrm>
+            <a:off x="9898380" y="2249424"/>
+            <a:ext cx="1568196" cy="530352"/>
+          </a:xfrm>
+          <a:prstGeom prst="rect">
+            <a:avLst/>
+          </a:prstGeom>
+          <a:noFill/>
+        </p:spPr>
+        <p:txBody>
+          <a:bodyPr wrap="none" lIns="18288" rIns="18288" tIns="18288" bIns="18288" anchor="ctr">
+            <a:spAutoFit/>
+          </a:bodyPr>
+          <a:lstStyle/>
+          <a:p>
+            <a:pPr algn="ctr">
+              <a:lnSpc>
+                <a:spcPct val="105000"/>
+              </a:lnSpc>
+              <a:spcAft>
+                <a:spcPts val="0"/>
+              </a:spcAft>
+            </a:pPr>
+            <a:r>
+              <a:rPr sz="1250" b="1" lang="ko-KR">
+                <a:solidFill>
+                  <a:srgbClr val="F3F7FD"/>
+                </a:solidFill>
+                <a:latin typeface="Noto Sans KR"/>
+                <a:ea typeface="Noto Sans KR"/>
+              </a:rPr>
+              <a:t>Evidence Pack</a:t>
+            </a:r>
+          </a:p>
+        </p:txBody>
+      </p:sp>
+      <p:sp>
+        <p:nvSpPr>
+          <p:cNvPr id="23" name="Rounded Rectangle 22"/>
+          <p:cNvSpPr/>
+          <p:nvPr/>
+        </p:nvSpPr>
+        <p:spPr>
+          <a:xfrm>
+            <a:off x="658368" y="3712463"/>
+            <a:ext cx="2631186" cy="914400"/>
+          </a:xfrm>
+          <a:prstGeom prst="roundRect">
+            <a:avLst/>
+          </a:prstGeom>
+          <a:solidFill>
+            <a:srgbClr val="0E1D30"/>
+          </a:solidFill>
+          <a:ln>
+            <a:solidFill>
+              <a:srgbClr val="203550"/>
+            </a:solidFill>
+          </a:ln>
+        </p:spPr>
+        <p:style>
+          <a:lnRef idx="1">
+            <a:schemeClr val="accent1"/>
+          </a:lnRef>
+          <a:fillRef idx="3">
+            <a:schemeClr val="accent1"/>
+          </a:fillRef>
+          <a:effectRef idx="2">
+            <a:schemeClr val="accent1"/>
+          </a:effectRef>
+          <a:fontRef idx="minor">
+            <a:schemeClr val="lt1"/>
+          </a:fontRef>
+        </p:style>
+        <p:txBody>
+          <a:bodyPr rtlCol="0" anchor="ctr"/>
+          <a:lstStyle/>
+          <a:p>
+            <a:pPr algn="ctr"/>
+          </a:p>
+        </p:txBody>
+      </p:sp>
+      <p:sp>
+        <p:nvSpPr>
+          <p:cNvPr id="24" name="TextBox 23"/>
+          <p:cNvSpPr txBox="1"/>
+          <p:nvPr/>
+        </p:nvSpPr>
+        <p:spPr>
+          <a:xfrm>
+            <a:off x="804672" y="3840479"/>
+            <a:ext cx="2338578" cy="201168"/>
+          </a:xfrm>
+          <a:prstGeom prst="rect">
+            <a:avLst/>
+          </a:prstGeom>
+          <a:noFill/>
+        </p:spPr>
+        <p:txBody>
+          <a:bodyPr wrap="none" lIns="18288" rIns="18288" tIns="18288" bIns="18288" anchor="t">
+            <a:spAutoFit/>
+          </a:bodyPr>
+          <a:lstStyle/>
+          <a:p>
+            <a:pPr algn="l">
+              <a:lnSpc>
+                <a:spcPct val="105000"/>
+              </a:lnSpc>
+              <a:spcAft>
+                <a:spcPts val="0"/>
+              </a:spcAft>
+            </a:pPr>
+            <a:r>
+              <a:rPr sz="1000" b="0" lang="ko-KR">
+                <a:solidFill>
+                  <a:srgbClr val="9DB0C7"/>
+                </a:solidFill>
+                <a:latin typeface="Noto Sans KR"/>
+                <a:ea typeface="Noto Sans KR"/>
+              </a:rPr>
+              <a:t>Portfolio jobs</a:t>
+            </a:r>
+          </a:p>
+        </p:txBody>
+      </p:sp>
+      <p:sp>
+        <p:nvSpPr>
+          <p:cNvPr id="25" name="TextBox 24"/>
+          <p:cNvSpPr txBox="1"/>
+          <p:nvPr/>
+        </p:nvSpPr>
+        <p:spPr>
+          <a:xfrm>
+            <a:off x="804672" y="4105655"/>
+            <a:ext cx="2338578" cy="329184"/>
+          </a:xfrm>
+          <a:prstGeom prst="rect">
+            <a:avLst/>
+          </a:prstGeom>
+          <a:noFill/>
+        </p:spPr>
+        <p:txBody>
+          <a:bodyPr wrap="none" lIns="18288" rIns="18288" tIns="18288" bIns="18288" anchor="t">
+            <a:spAutoFit/>
+          </a:bodyPr>
+          <a:lstStyle/>
+          <a:p>
+            <a:pPr algn="l">
+              <a:lnSpc>
+                <a:spcPct val="105000"/>
+              </a:lnSpc>
+              <a:spcAft>
+                <a:spcPts val="0"/>
+              </a:spcAft>
+            </a:pPr>
+            <a:r>
+              <a:rPr sz="2000" b="1" lang="ko-KR">
+                <a:solidFill>
+                  <a:srgbClr val="9AF56D"/>
+                </a:solidFill>
+                <a:latin typeface="DejaVu Sans Mono"/>
+                <a:ea typeface="DejaVu Sans Mono"/>
+              </a:rPr>
+              <a:t>6 / 6 PASS</a:t>
+            </a:r>
+          </a:p>
+        </p:txBody>
+      </p:sp>
+      <p:sp>
+        <p:nvSpPr>
+          <p:cNvPr id="26" name="Rounded Rectangle 25"/>
+          <p:cNvSpPr/>
+          <p:nvPr/>
+        </p:nvSpPr>
+        <p:spPr>
+          <a:xfrm>
+            <a:off x="3408426" y="3712463"/>
+            <a:ext cx="2631186" cy="914400"/>
+          </a:xfrm>
+          <a:prstGeom prst="roundRect">
+            <a:avLst/>
+          </a:prstGeom>
+          <a:solidFill>
+            <a:srgbClr val="0E1D30"/>
+          </a:solidFill>
+          <a:ln>
+            <a:solidFill>
+              <a:srgbClr val="203550"/>
+            </a:solidFill>
+          </a:ln>
+        </p:spPr>
+        <p:style>
+          <a:lnRef idx="1">
+            <a:schemeClr val="accent1"/>
+          </a:lnRef>
+          <a:fillRef idx="3">
+            <a:schemeClr val="accent1"/>
+          </a:fillRef>
+          <a:effectRef idx="2">
+            <a:schemeClr val="accent1"/>
+          </a:effectRef>
+          <a:fontRef idx="minor">
+            <a:schemeClr val="lt1"/>
+          </a:fontRef>
+        </p:style>
+        <p:txBody>
+          <a:bodyPr rtlCol="0" anchor="ctr"/>
+          <a:lstStyle/>
+          <a:p>
+            <a:pPr algn="ctr"/>
+          </a:p>
+        </p:txBody>
+      </p:sp>
+      <p:sp>
+        <p:nvSpPr>
+          <p:cNvPr id="27" name="TextBox 26"/>
+          <p:cNvSpPr txBox="1"/>
+          <p:nvPr/>
+        </p:nvSpPr>
+        <p:spPr>
+          <a:xfrm>
+            <a:off x="3554730" y="3840479"/>
+            <a:ext cx="2338578" cy="201168"/>
+          </a:xfrm>
+          <a:prstGeom prst="rect">
+            <a:avLst/>
+          </a:prstGeom>
+          <a:noFill/>
+        </p:spPr>
+        <p:txBody>
+          <a:bodyPr wrap="none" lIns="18288" rIns="18288" tIns="18288" bIns="18288" anchor="t">
+            <a:spAutoFit/>
+          </a:bodyPr>
+          <a:lstStyle/>
+          <a:p>
+            <a:pPr algn="l">
+              <a:lnSpc>
+                <a:spcPct val="105000"/>
+              </a:lnSpc>
+              <a:spcAft>
+                <a:spcPts val="0"/>
+              </a:spcAft>
+            </a:pPr>
+            <a:r>
+              <a:rPr sz="1000" b="0" lang="ko-KR">
+                <a:solidFill>
+                  <a:srgbClr val="9DB0C7"/>
+                </a:solidFill>
+                <a:latin typeface="Noto Sans KR"/>
+                <a:ea typeface="Noto Sans KR"/>
+              </a:rPr>
+              <a:t>Unit tests</a:t>
+            </a:r>
+          </a:p>
+        </p:txBody>
+      </p:sp>
+      <p:sp>
+        <p:nvSpPr>
+          <p:cNvPr id="28" name="TextBox 27"/>
+          <p:cNvSpPr txBox="1"/>
+          <p:nvPr/>
+        </p:nvSpPr>
+        <p:spPr>
+          <a:xfrm>
+            <a:off x="3554730" y="4105655"/>
+            <a:ext cx="2338578" cy="329184"/>
+          </a:xfrm>
+          <a:prstGeom prst="rect">
+            <a:avLst/>
+          </a:prstGeom>
+          <a:noFill/>
+        </p:spPr>
+        <p:txBody>
+          <a:bodyPr wrap="none" lIns="18288" rIns="18288" tIns="18288" bIns="18288" anchor="t">
+            <a:spAutoFit/>
+          </a:bodyPr>
+          <a:lstStyle/>
+          <a:p>
+            <a:pPr algn="l">
+              <a:lnSpc>
+                <a:spcPct val="105000"/>
+              </a:lnSpc>
+              <a:spcAft>
+                <a:spcPts val="0"/>
+              </a:spcAft>
+            </a:pPr>
+            <a:r>
+              <a:rPr sz="2000" b="1" lang="ko-KR">
+                <a:solidFill>
+                  <a:srgbClr val="9AF56D"/>
+                </a:solidFill>
+                <a:latin typeface="DejaVu Sans Mono"/>
+                <a:ea typeface="DejaVu Sans Mono"/>
+              </a:rPr>
+              <a:t>12</a:t>
+            </a:r>
+          </a:p>
+        </p:txBody>
+      </p:sp>
+      <p:sp>
+        <p:nvSpPr>
+          <p:cNvPr id="29" name="Rounded Rectangle 28"/>
+          <p:cNvSpPr/>
+          <p:nvPr/>
+        </p:nvSpPr>
+        <p:spPr>
+          <a:xfrm>
+            <a:off x="6158483" y="3712463"/>
+            <a:ext cx="2631186" cy="914400"/>
+          </a:xfrm>
+          <a:prstGeom prst="roundRect">
+            <a:avLst/>
+          </a:prstGeom>
+          <a:solidFill>
+            <a:srgbClr val="0E1D30"/>
+          </a:solidFill>
+          <a:ln>
+            <a:solidFill>
+              <a:srgbClr val="203550"/>
+            </a:solidFill>
+          </a:ln>
+        </p:spPr>
+        <p:style>
+          <a:lnRef idx="1">
+            <a:schemeClr val="accent1"/>
+          </a:lnRef>
+          <a:fillRef idx="3">
+            <a:schemeClr val="accent1"/>
+          </a:fillRef>
+          <a:effectRef idx="2">
+            <a:schemeClr val="accent1"/>
+          </a:effectRef>
+          <a:fontRef idx="minor">
+            <a:schemeClr val="lt1"/>
+          </a:fontRef>
+        </p:style>
+        <p:txBody>
+          <a:bodyPr rtlCol="0" anchor="ctr"/>
+          <a:lstStyle/>
+          <a:p>
+            <a:pPr algn="ctr"/>
+          </a:p>
+        </p:txBody>
+      </p:sp>
+      <p:sp>
+        <p:nvSpPr>
+          <p:cNvPr id="30" name="TextBox 29"/>
+          <p:cNvSpPr txBox="1"/>
+          <p:nvPr/>
+        </p:nvSpPr>
+        <p:spPr>
+          <a:xfrm>
+            <a:off x="6304788" y="3840479"/>
+            <a:ext cx="2338578" cy="201168"/>
+          </a:xfrm>
+          <a:prstGeom prst="rect">
+            <a:avLst/>
+          </a:prstGeom>
+          <a:noFill/>
+        </p:spPr>
+        <p:txBody>
+          <a:bodyPr wrap="none" lIns="18288" rIns="18288" tIns="18288" bIns="18288" anchor="t">
+            <a:spAutoFit/>
+          </a:bodyPr>
+          <a:lstStyle/>
+          <a:p>
+            <a:pPr algn="l">
+              <a:lnSpc>
+                <a:spcPct val="105000"/>
+              </a:lnSpc>
+              <a:spcAft>
+                <a:spcPts val="0"/>
+              </a:spcAft>
+            </a:pPr>
+            <a:r>
+              <a:rPr sz="1000" b="0" lang="ko-KR">
+                <a:solidFill>
+                  <a:srgbClr val="9DB0C7"/>
+                </a:solidFill>
+                <a:latin typeface="Noto Sans KR"/>
+                <a:ea typeface="Noto Sans KR"/>
+              </a:rPr>
+              <a:t>GPU policy</a:t>
+            </a:r>
+          </a:p>
+        </p:txBody>
+      </p:sp>
+      <p:sp>
+        <p:nvSpPr>
+          <p:cNvPr id="31" name="TextBox 30"/>
+          <p:cNvSpPr txBox="1"/>
+          <p:nvPr/>
+        </p:nvSpPr>
+        <p:spPr>
+          <a:xfrm>
+            <a:off x="6304788" y="4105655"/>
+            <a:ext cx="2338578" cy="329184"/>
+          </a:xfrm>
+          <a:prstGeom prst="rect">
+            <a:avLst/>
+          </a:prstGeom>
+          <a:noFill/>
+        </p:spPr>
+        <p:txBody>
+          <a:bodyPr wrap="none" lIns="18288" rIns="18288" tIns="18288" bIns="18288" anchor="t">
+            <a:spAutoFit/>
+          </a:bodyPr>
+          <a:lstStyle/>
+          <a:p>
+            <a:pPr algn="l">
+              <a:lnSpc>
+                <a:spcPct val="105000"/>
+              </a:lnSpc>
+              <a:spcAft>
+                <a:spcPts val="0"/>
+              </a:spcAft>
+            </a:pPr>
+            <a:r>
+              <a:rPr sz="2000" b="1" lang="ko-KR">
+                <a:solidFill>
+                  <a:srgbClr val="9AF56D"/>
+                </a:solidFill>
+                <a:latin typeface="DejaVu Sans Mono"/>
+                <a:ea typeface="DejaVu Sans Mono"/>
+              </a:rPr>
+              <a:t>GPU 1 only</a:t>
+            </a:r>
+          </a:p>
+        </p:txBody>
+      </p:sp>
+      <p:sp>
+        <p:nvSpPr>
+          <p:cNvPr id="32" name="Rounded Rectangle 31"/>
+          <p:cNvSpPr/>
+          <p:nvPr/>
+        </p:nvSpPr>
+        <p:spPr>
+          <a:xfrm>
+            <a:off x="8908542" y="3712463"/>
+            <a:ext cx="2631186" cy="914400"/>
+          </a:xfrm>
+          <a:prstGeom prst="roundRect">
+            <a:avLst/>
+          </a:prstGeom>
+          <a:solidFill>
+            <a:srgbClr val="0E1D30"/>
+          </a:solidFill>
+          <a:ln>
+            <a:solidFill>
+              <a:srgbClr val="203550"/>
+            </a:solidFill>
+          </a:ln>
+        </p:spPr>
+        <p:style>
+          <a:lnRef idx="1">
+            <a:schemeClr val="accent1"/>
+          </a:lnRef>
+          <a:fillRef idx="3">
+            <a:schemeClr val="accent1"/>
+          </a:fillRef>
+          <a:effectRef idx="2">
+            <a:schemeClr val="accent1"/>
+          </a:effectRef>
+          <a:fontRef idx="minor">
+            <a:schemeClr val="lt1"/>
+          </a:fontRef>
+        </p:style>
+        <p:txBody>
+          <a:bodyPr rtlCol="0" anchor="ctr"/>
+          <a:lstStyle/>
+          <a:p>
+            <a:pPr algn="ctr"/>
+          </a:p>
+        </p:txBody>
+      </p:sp>
+      <p:sp>
+        <p:nvSpPr>
+          <p:cNvPr id="33" name="TextBox 32"/>
+          <p:cNvSpPr txBox="1"/>
+          <p:nvPr/>
+        </p:nvSpPr>
+        <p:spPr>
+          <a:xfrm>
+            <a:off x="9054846" y="3840479"/>
+            <a:ext cx="2338578" cy="201168"/>
+          </a:xfrm>
+          <a:prstGeom prst="rect">
+            <a:avLst/>
+          </a:prstGeom>
+          <a:noFill/>
+        </p:spPr>
+        <p:txBody>
+          <a:bodyPr wrap="none" lIns="18288" rIns="18288" tIns="18288" bIns="18288" anchor="t">
+            <a:spAutoFit/>
+          </a:bodyPr>
+          <a:lstStyle/>
+          <a:p>
+            <a:pPr algn="l">
+              <a:lnSpc>
+                <a:spcPct val="105000"/>
+              </a:lnSpc>
+              <a:spcAft>
+                <a:spcPts val="0"/>
+              </a:spcAft>
+            </a:pPr>
+            <a:r>
+              <a:rPr sz="1000" b="0" lang="ko-KR">
+                <a:solidFill>
+                  <a:srgbClr val="9DB0C7"/>
+                </a:solidFill>
+                <a:latin typeface="Noto Sans KR"/>
+                <a:ea typeface="Noto Sans KR"/>
+              </a:rPr>
+              <a:t>LLM action</a:t>
+            </a:r>
+          </a:p>
+        </p:txBody>
+      </p:sp>
+      <p:sp>
+        <p:nvSpPr>
+          <p:cNvPr id="34" name="TextBox 33"/>
+          <p:cNvSpPr txBox="1"/>
+          <p:nvPr/>
+        </p:nvSpPr>
+        <p:spPr>
+          <a:xfrm>
+            <a:off x="9054846" y="4105655"/>
+            <a:ext cx="2338578" cy="329184"/>
+          </a:xfrm>
+          <a:prstGeom prst="rect">
+            <a:avLst/>
+          </a:prstGeom>
+          <a:noFill/>
+        </p:spPr>
+        <p:txBody>
+          <a:bodyPr wrap="none" lIns="18288" rIns="18288" tIns="18288" bIns="18288" anchor="t">
+            <a:spAutoFit/>
+          </a:bodyPr>
+          <a:lstStyle/>
+          <a:p>
+            <a:pPr algn="l">
+              <a:lnSpc>
+                <a:spcPct val="105000"/>
+              </a:lnSpc>
+              <a:spcAft>
+                <a:spcPts val="0"/>
+              </a:spcAft>
+            </a:pPr>
+            <a:r>
+              <a:rPr sz="2000" b="1" lang="ko-KR">
+                <a:solidFill>
+                  <a:srgbClr val="9AF56D"/>
+                </a:solidFill>
+                <a:latin typeface="DejaVu Sans Mono"/>
+                <a:ea typeface="DejaVu Sans Mono"/>
+              </a:rPr>
+              <a:t>Advisory</a:t>
+            </a:r>
+          </a:p>
+        </p:txBody>
+      </p:sp>
+      <p:sp>
+        <p:nvSpPr>
+          <p:cNvPr id="35" name="Rounded Rectangle 34"/>
           <p:cNvSpPr/>
           <p:nvPr/>
         </p:nvSpPr>
@@ -15915,7 +19354,7 @@
       </p:sp>
       <p:sp>
         <p:nvSpPr>
-          <p:cNvPr id="8" name="TextBox 7"/>
+          <p:cNvPr id="36" name="TextBox 35"/>
           <p:cNvSpPr txBox="1"/>
           <p:nvPr/>
         </p:nvSpPr>
@@ -15951,14 +19390,14 @@
                 <a:latin typeface="Noto Sans KR"/>
                 <a:ea typeface="Noto Sans KR"/>
               </a:rPr>
-              <a:t>미실행 항목은 PASS로 바꾸지 않고 NOT_EXECUTED / NOT_EVALUATED로 남김</a:t>
-            </a:r>
-          </a:p>
-        </p:txBody>
-      </p:sp>
-      <p:sp>
-        <p:nvSpPr>
-          <p:cNvPr id="9" name="TextBox 8"/>
+              <a:t>CPU job은 CUDA를 볼 수 없고 GPU job은 물리 GPU 1번 exclusive lock</a:t>
+            </a:r>
+          </a:p>
+        </p:txBody>
+      </p:sp>
+      <p:sp>
+        <p:nvSpPr>
+          <p:cNvPr id="37" name="TextBox 36"/>
           <p:cNvSpPr txBox="1"/>
           <p:nvPr/>
         </p:nvSpPr>
@@ -16001,7 +19440,7 @@
       </p:sp>
       <p:sp>
         <p:nvSpPr>
-          <p:cNvPr id="10" name="TextBox 9"/>
+          <p:cNvPr id="38" name="TextBox 37"/>
           <p:cNvSpPr txBox="1"/>
           <p:nvPr/>
         </p:nvSpPr>

--- a/artifacts/AI-Inference-Developer-Portfolio.pptx
+++ b/artifacts/AI-Inference-Developer-Portfolio.pptx
@@ -3531,7 +3531,7 @@
         <p:spPr>
           <a:xfrm>
             <a:off x="6592824" y="4919472"/>
-            <a:ext cx="1645920" cy="393192"/>
+            <a:ext cx="1824228" cy="393192"/>
           </a:xfrm>
           <a:prstGeom prst="roundRect">
             <a:avLst/>
@@ -3576,7 +3576,7 @@
         <p:spPr>
           <a:xfrm>
             <a:off x="6693408" y="5038344"/>
-            <a:ext cx="1444752" cy="155448"/>
+            <a:ext cx="1623060" cy="155448"/>
           </a:xfrm>
           <a:prstGeom prst="rect">
             <a:avLst/>
@@ -3605,7 +3605,7 @@
                 <a:latin typeface="Noto Sans KR"/>
                 <a:ea typeface="Noto Sans KR"/>
               </a:rPr>
-              <a:t>EvidenceOps Agent</a:t>
+              <a:t>FinCompliance Agent</a:t>
             </a:r>
           </a:p>
         </p:txBody>
@@ -3717,7 +3717,7 @@
                 <a:latin typeface="Noto Sans KR"/>
                 <a:ea typeface="Noto Sans KR"/>
               </a:rPr>
-              <a:t>EVIDENCEOPS · VERIFIED RESULT</a:t>
+              <a:t>FINCOMPLIANCE · VERIFIED CONTROLS</a:t>
             </a:r>
           </a:p>
         </p:txBody>
@@ -3760,7 +3760,7 @@
                 <a:latin typeface="Noto Sans KR"/>
                 <a:ea typeface="Noto Sans KR"/>
               </a:rPr>
-              <a:t>실행보다 중요한 것은 증거와 중단 경계</a:t>
+              <a:t>Tool hallucination과 권한 경계를 회귀 테스트</a:t>
             </a:r>
           </a:p>
         </p:txBody>
@@ -3803,7 +3803,7 @@
                 <a:latin typeface="Noto Sans KR"/>
                 <a:ea typeface="Noto Sans KR"/>
               </a:rPr>
-              <a:t>세 프로젝트의 계약을 한 큐에서 검증하고 실행 사건을 SHA-256 hash chain으로 연결했습니다.</a:t>
+              <a:t>모델 선택을 결정적으로 재생하되 실제 tool registry·state·guardrail 경로를 그대로 통과시켰습니다.</a:t>
             </a:r>
           </a:p>
         </p:txBody>
@@ -3938,7 +3938,7 @@
                           <a:latin typeface="DejaVu Sans Mono"/>
                           <a:ea typeface="DejaVu Sans Mono"/>
                         </a:rPr>
-                        <a:t>실측 결과</a:t>
+                        <a:t>검증 결과</a:t>
                       </a:r>
                     </a:p>
                   </a:txBody>
@@ -3988,7 +3988,7 @@
                           <a:latin typeface="Noto Sans KR"/>
                           <a:ea typeface="Noto Sans KR"/>
                         </a:rPr>
-                        <a:t>Agent run</a:t>
+                        <a:t>Tool call</a:t>
                       </a:r>
                     </a:p>
                   </a:txBody>
@@ -4012,7 +4012,7 @@
                           <a:latin typeface="DejaVu Sans Mono"/>
                           <a:ea typeface="DejaVu Sans Mono"/>
                         </a:rPr>
-                        <a:t>10-state machine + checkpoint</a:t>
+                        <a:t>allowlist + strict JSON schema</a:t>
                       </a:r>
                     </a:p>
                   </a:txBody>
@@ -4036,7 +4036,7 @@
                           <a:latin typeface="DejaVu Sans Mono"/>
                           <a:ea typeface="DejaVu Sans Mono"/>
                         </a:rPr>
-                        <a:t>6 / 6 jobs PASS</a:t>
+                        <a:t>12 / 12 control PASS</a:t>
                       </a:r>
                     </a:p>
                   </a:txBody>
@@ -4060,203 +4060,7 @@
                           <a:latin typeface="DejaVu Sans Mono"/>
                           <a:ea typeface="DejaVu Sans Mono"/>
                         </a:rPr>
-                        <a:t>완료 job 재실행 금지</a:t>
-                      </a:r>
-                    </a:p>
-                  </a:txBody>
-                  <a:tcPr marL="82296" marR="82296" marT="45720" marB="45720">
-                    <a:solidFill>
-                      <a:srgbClr val="0E1D30"/>
-                    </a:solidFill>
-                  </a:tcPr>
-                </a:tc>
-              </a:tr>
-              <a:tr h="597408">
-                <a:tc>
-                  <a:txBody>
-                    <a:bodyPr/>
-                    <a:lstStyle/>
-                    <a:p>
-                      <a:pPr algn="l"/>
-                      <a:r>
-                        <a:rPr sz="1050" b="0" lang="ko-KR">
-                          <a:solidFill>
-                            <a:srgbClr val="F3F7FD"/>
-                          </a:solidFill>
-                          <a:latin typeface="Noto Sans KR"/>
-                          <a:ea typeface="Noto Sans KR"/>
-                        </a:rPr>
-                        <a:t>Execution</a:t>
-                      </a:r>
-                    </a:p>
-                  </a:txBody>
-                  <a:tcPr marL="82296" marR="82296" marT="45720" marB="45720">
-                    <a:solidFill>
-                      <a:srgbClr val="0E1D30"/>
-                    </a:solidFill>
-                  </a:tcPr>
-                </a:tc>
-                <a:tc>
-                  <a:txBody>
-                    <a:bodyPr/>
-                    <a:lstStyle/>
-                    <a:p>
-                      <a:pPr algn="ctr"/>
-                      <a:r>
-                        <a:rPr sz="1050" b="0" lang="ko-KR">
-                          <a:solidFill>
-                            <a:srgbClr val="9AF56D"/>
-                          </a:solidFill>
-                          <a:latin typeface="DejaVu Sans Mono"/>
-                          <a:ea typeface="DejaVu Sans Mono"/>
-                        </a:rPr>
-                        <a:t>sequential queue + detach</a:t>
-                      </a:r>
-                    </a:p>
-                  </a:txBody>
-                  <a:tcPr marL="82296" marR="82296" marT="45720" marB="45720">
-                    <a:solidFill>
-                      <a:srgbClr val="0E1D30"/>
-                    </a:solidFill>
-                  </a:tcPr>
-                </a:tc>
-                <a:tc>
-                  <a:txBody>
-                    <a:bodyPr/>
-                    <a:lstStyle/>
-                    <a:p>
-                      <a:pPr algn="ctr"/>
-                      <a:r>
-                        <a:rPr sz="1050" b="0" lang="ko-KR">
-                          <a:solidFill>
-                            <a:srgbClr val="9AF56D"/>
-                          </a:solidFill>
-                          <a:latin typeface="DejaVu Sans Mono"/>
-                          <a:ea typeface="DejaVu Sans Mono"/>
-                        </a:rPr>
-                        <a:t>14.460s</a:t>
-                      </a:r>
-                    </a:p>
-                  </a:txBody>
-                  <a:tcPr marL="82296" marR="82296" marT="45720" marB="45720">
-                    <a:solidFill>
-                      <a:srgbClr val="0E1D30"/>
-                    </a:solidFill>
-                  </a:tcPr>
-                </a:tc>
-                <a:tc>
-                  <a:txBody>
-                    <a:bodyPr/>
-                    <a:lstStyle/>
-                    <a:p>
-                      <a:pPr algn="ctr"/>
-                      <a:r>
-                        <a:rPr sz="1050" b="0" lang="ko-KR">
-                          <a:solidFill>
-                            <a:srgbClr val="9AF56D"/>
-                          </a:solidFill>
-                          <a:latin typeface="DejaVu Sans Mono"/>
-                          <a:ea typeface="DejaVu Sans Mono"/>
-                        </a:rPr>
-                        <a:t>interruption 후 resume</a:t>
-                      </a:r>
-                    </a:p>
-                  </a:txBody>
-                  <a:tcPr marL="82296" marR="82296" marT="45720" marB="45720">
-                    <a:solidFill>
-                      <a:srgbClr val="0E1D30"/>
-                    </a:solidFill>
-                  </a:tcPr>
-                </a:tc>
-              </a:tr>
-              <a:tr h="597408">
-                <a:tc>
-                  <a:txBody>
-                    <a:bodyPr/>
-                    <a:lstStyle/>
-                    <a:p>
-                      <a:pPr algn="l"/>
-                      <a:r>
-                        <a:rPr sz="1050" b="0" lang="ko-KR">
-                          <a:solidFill>
-                            <a:srgbClr val="F3F7FD"/>
-                          </a:solidFill>
-                          <a:latin typeface="Noto Sans KR"/>
-                          <a:ea typeface="Noto Sans KR"/>
-                        </a:rPr>
-                        <a:t>Resource</a:t>
-                      </a:r>
-                    </a:p>
-                  </a:txBody>
-                  <a:tcPr marL="82296" marR="82296" marT="45720" marB="45720">
-                    <a:solidFill>
-                      <a:srgbClr val="0E1D30"/>
-                    </a:solidFill>
-                  </a:tcPr>
-                </a:tc>
-                <a:tc>
-                  <a:txBody>
-                    <a:bodyPr/>
-                    <a:lstStyle/>
-                    <a:p>
-                      <a:pPr algn="ctr"/>
-                      <a:r>
-                        <a:rPr sz="1050" b="0" lang="ko-KR">
-                          <a:solidFill>
-                            <a:srgbClr val="9AF56D"/>
-                          </a:solidFill>
-                          <a:latin typeface="DejaVu Sans Mono"/>
-                          <a:ea typeface="DejaVu Sans Mono"/>
-                        </a:rPr>
-                        <a:t>physical GPU 1 exclusive</a:t>
-                      </a:r>
-                    </a:p>
-                  </a:txBody>
-                  <a:tcPr marL="82296" marR="82296" marT="45720" marB="45720">
-                    <a:solidFill>
-                      <a:srgbClr val="0E1D30"/>
-                    </a:solidFill>
-                  </a:tcPr>
-                </a:tc>
-                <a:tc>
-                  <a:txBody>
-                    <a:bodyPr/>
-                    <a:lstStyle/>
-                    <a:p>
-                      <a:pPr algn="ctr"/>
-                      <a:r>
-                        <a:rPr sz="1050" b="0" lang="ko-KR">
-                          <a:solidFill>
-                            <a:srgbClr val="9AF56D"/>
-                          </a:solidFill>
-                          <a:latin typeface="DejaVu Sans Mono"/>
-                          <a:ea typeface="DejaVu Sans Mono"/>
-                        </a:rPr>
-                        <a:t>GPU executions 0</a:t>
-                      </a:r>
-                    </a:p>
-                  </a:txBody>
-                  <a:tcPr marL="82296" marR="82296" marT="45720" marB="45720">
-                    <a:solidFill>
-                      <a:srgbClr val="0E1D30"/>
-                    </a:solidFill>
-                  </a:tcPr>
-                </a:tc>
-                <a:tc>
-                  <a:txBody>
-                    <a:bodyPr/>
-                    <a:lstStyle/>
-                    <a:p>
-                      <a:pPr algn="ctr"/>
-                      <a:r>
-                        <a:rPr sz="1050" b="0" lang="ko-KR">
-                          <a:solidFill>
-                            <a:srgbClr val="9AF56D"/>
-                          </a:solidFill>
-                          <a:latin typeface="DejaVu Sans Mono"/>
-                          <a:ea typeface="DejaVu Sans Mono"/>
-                        </a:rPr>
-                        <a:t>CPU에서 CUDA 비노출</a:t>
+                        <a:t>없는 도구·인자 차단</a:t>
                       </a:r>
                     </a:p>
                   </a:txBody>
@@ -4306,7 +4110,7 @@
                           <a:latin typeface="DejaVu Sans Mono"/>
                           <a:ea typeface="DejaVu Sans Mono"/>
                         </a:rPr>
-                        <a:t>log hash + audit chain</a:t>
+                        <a:t>returned citation allowlist</a:t>
                       </a:r>
                     </a:p>
                   </a:txBody>
@@ -4330,7 +4134,7 @@
                           <a:latin typeface="DejaVu Sans Mono"/>
                           <a:ea typeface="DejaVu Sans Mono"/>
                         </a:rPr>
-                        <a:t>VERIFIED</a:t>
+                        <a:t>grounded normal flow</a:t>
                       </a:r>
                     </a:p>
                   </a:txBody>
@@ -4354,7 +4158,7 @@
                           <a:latin typeface="DejaVu Sans Mono"/>
                           <a:ea typeface="DejaVu Sans Mono"/>
                         </a:rPr>
-                        <a:t>변조 시 chain 검증 실패</a:t>
+                        <a:t>가짜 규정 ID 탐지</a:t>
                       </a:r>
                     </a:p>
                   </a:txBody>
@@ -4380,7 +4184,7 @@
                           <a:latin typeface="Noto Sans KR"/>
                           <a:ea typeface="Noto Sans KR"/>
                         </a:rPr>
-                        <a:t>Interface</a:t>
+                        <a:t>Security</a:t>
                       </a:r>
                     </a:p>
                   </a:txBody>
@@ -4404,7 +4208,7 @@
                           <a:latin typeface="DejaVu Sans Mono"/>
                           <a:ea typeface="DejaVu Sans Mono"/>
                         </a:rPr>
-                        <a:t>CLI + MCP v2</a:t>
+                        <a:t>untrusted output sanitizer</a:t>
                       </a:r>
                     </a:p>
                   </a:txBody>
@@ -4428,7 +4232,7 @@
                           <a:latin typeface="DejaVu Sans Mono"/>
                           <a:ea typeface="DejaVu Sans Mono"/>
                         </a:rPr>
-                        <a:t>7 tools</a:t>
+                        <a:t>injection neutralized</a:t>
                       </a:r>
                     </a:p>
                   </a:txBody>
@@ -4452,7 +4256,203 @@
                           <a:latin typeface="DejaVu Sans Mono"/>
                           <a:ea typeface="DejaVu Sans Mono"/>
                         </a:rPr>
-                        <a:t>policy 우회 경로 없음</a:t>
+                        <a:t>도구 출력 명령 미실행</a:t>
+                      </a:r>
+                    </a:p>
+                  </a:txBody>
+                  <a:tcPr marL="82296" marR="82296" marT="45720" marB="45720">
+                    <a:solidFill>
+                      <a:srgbClr val="0E1D30"/>
+                    </a:solidFill>
+                  </a:tcPr>
+                </a:tc>
+              </a:tr>
+              <a:tr h="597408">
+                <a:tc>
+                  <a:txBody>
+                    <a:bodyPr/>
+                    <a:lstStyle/>
+                    <a:p>
+                      <a:pPr algn="l"/>
+                      <a:r>
+                        <a:rPr sz="1050" b="0" lang="ko-KR">
+                          <a:solidFill>
+                            <a:srgbClr val="F3F7FD"/>
+                          </a:solidFill>
+                          <a:latin typeface="Noto Sans KR"/>
+                          <a:ea typeface="Noto Sans KR"/>
+                        </a:rPr>
+                        <a:t>Authority</a:t>
+                      </a:r>
+                    </a:p>
+                  </a:txBody>
+                  <a:tcPr marL="82296" marR="82296" marT="45720" marB="45720">
+                    <a:solidFill>
+                      <a:srgbClr val="0E1D30"/>
+                    </a:solidFill>
+                  </a:tcPr>
+                </a:tc>
+                <a:tc>
+                  <a:txBody>
+                    <a:bodyPr/>
+                    <a:lstStyle/>
+                    <a:p>
+                      <a:pPr algn="ctr"/>
+                      <a:r>
+                        <a:rPr sz="1050" b="0" lang="ko-KR">
+                          <a:solidFill>
+                            <a:srgbClr val="9AF56D"/>
+                          </a:solidFill>
+                          <a:latin typeface="DejaVu Sans Mono"/>
+                          <a:ea typeface="DejaVu Sans Mono"/>
+                        </a:rPr>
+                        <a:t>out-of-band single-use token</a:t>
+                      </a:r>
+                    </a:p>
+                  </a:txBody>
+                  <a:tcPr marL="82296" marR="82296" marT="45720" marB="45720">
+                    <a:solidFill>
+                      <a:srgbClr val="0E1D30"/>
+                    </a:solidFill>
+                  </a:tcPr>
+                </a:tc>
+                <a:tc>
+                  <a:txBody>
+                    <a:bodyPr/>
+                    <a:lstStyle/>
+                    <a:p>
+                      <a:pPr algn="ctr"/>
+                      <a:r>
+                        <a:rPr sz="1050" b="0" lang="ko-KR">
+                          <a:solidFill>
+                            <a:srgbClr val="9AF56D"/>
+                          </a:solidFill>
+                          <a:latin typeface="DejaVu Sans Mono"/>
+                          <a:ea typeface="DejaVu Sans Mono"/>
+                        </a:rPr>
+                        <a:t>unauthorized finalize 0</a:t>
+                      </a:r>
+                    </a:p>
+                  </a:txBody>
+                  <a:tcPr marL="82296" marR="82296" marT="45720" marB="45720">
+                    <a:solidFill>
+                      <a:srgbClr val="0E1D30"/>
+                    </a:solidFill>
+                  </a:tcPr>
+                </a:tc>
+                <a:tc>
+                  <a:txBody>
+                    <a:bodyPr/>
+                    <a:lstStyle/>
+                    <a:p>
+                      <a:pPr algn="ctr"/>
+                      <a:r>
+                        <a:rPr sz="1050" b="0" lang="ko-KR">
+                          <a:solidFill>
+                            <a:srgbClr val="9AF56D"/>
+                          </a:solidFill>
+                          <a:latin typeface="DejaVu Sans Mono"/>
+                          <a:ea typeface="DejaVu Sans Mono"/>
+                        </a:rPr>
+                        <a:t>모델이 승인 생성 불가</a:t>
+                      </a:r>
+                    </a:p>
+                  </a:txBody>
+                  <a:tcPr marL="82296" marR="82296" marT="45720" marB="45720">
+                    <a:solidFill>
+                      <a:srgbClr val="0E1D30"/>
+                    </a:solidFill>
+                  </a:tcPr>
+                </a:tc>
+              </a:tr>
+              <a:tr h="597408">
+                <a:tc>
+                  <a:txBody>
+                    <a:bodyPr/>
+                    <a:lstStyle/>
+                    <a:p>
+                      <a:pPr algn="l"/>
+                      <a:r>
+                        <a:rPr sz="1050" b="0" lang="ko-KR">
+                          <a:solidFill>
+                            <a:srgbClr val="F3F7FD"/>
+                          </a:solidFill>
+                          <a:latin typeface="Noto Sans KR"/>
+                          <a:ea typeface="Noto Sans KR"/>
+                        </a:rPr>
+                        <a:t>Delivery</a:t>
+                      </a:r>
+                    </a:p>
+                  </a:txBody>
+                  <a:tcPr marL="82296" marR="82296" marT="45720" marB="45720">
+                    <a:solidFill>
+                      <a:srgbClr val="0E1D30"/>
+                    </a:solidFill>
+                  </a:tcPr>
+                </a:tc>
+                <a:tc>
+                  <a:txBody>
+                    <a:bodyPr/>
+                    <a:lstStyle/>
+                    <a:p>
+                      <a:pPr algn="ctr"/>
+                      <a:r>
+                        <a:rPr sz="1050" b="0" lang="ko-KR">
+                          <a:solidFill>
+                            <a:srgbClr val="9AF56D"/>
+                          </a:solidFill>
+                          <a:latin typeface="DejaVu Sans Mono"/>
+                          <a:ea typeface="DejaVu Sans Mono"/>
+                        </a:rPr>
+                        <a:t>FastAPI + Docker + CI + trace</a:t>
+                      </a:r>
+                    </a:p>
+                  </a:txBody>
+                  <a:tcPr marL="82296" marR="82296" marT="45720" marB="45720">
+                    <a:solidFill>
+                      <a:srgbClr val="0E1D30"/>
+                    </a:solidFill>
+                  </a:tcPr>
+                </a:tc>
+                <a:tc>
+                  <a:txBody>
+                    <a:bodyPr/>
+                    <a:lstStyle/>
+                    <a:p>
+                      <a:pPr algn="ctr"/>
+                      <a:r>
+                        <a:rPr sz="1050" b="0" lang="ko-KR">
+                          <a:solidFill>
+                            <a:srgbClr val="9AF56D"/>
+                          </a:solidFill>
+                          <a:latin typeface="DejaVu Sans Mono"/>
+                          <a:ea typeface="DejaVu Sans Mono"/>
+                        </a:rPr>
+                        <a:t>container smoke PASS</a:t>
+                      </a:r>
+                    </a:p>
+                  </a:txBody>
+                  <a:tcPr marL="82296" marR="82296" marT="45720" marB="45720">
+                    <a:solidFill>
+                      <a:srgbClr val="0E1D30"/>
+                    </a:solidFill>
+                  </a:tcPr>
+                </a:tc>
+                <a:tc>
+                  <a:txBody>
+                    <a:bodyPr/>
+                    <a:lstStyle/>
+                    <a:p>
+                      <a:pPr algn="ctr"/>
+                      <a:r>
+                        <a:rPr sz="1050" b="0" lang="ko-KR">
+                          <a:solidFill>
+                            <a:srgbClr val="9AF56D"/>
+                          </a:solidFill>
+                          <a:latin typeface="DejaVu Sans Mono"/>
+                          <a:ea typeface="DejaVu Sans Mono"/>
+                        </a:rPr>
+                        <a:t>trace_id replay</a:t>
                       </a:r>
                     </a:p>
                   </a:txBody>
@@ -4550,7 +4550,7 @@
                 <a:latin typeface="Noto Sans KR"/>
                 <a:ea typeface="Noto Sans KR"/>
               </a:rPr>
-              <a:t>NEEDS_ATTENTION은 자동 재시도하지 않으며 사람이 확인 · LLM triage NOT_NEEDED</a:t>
+              <a:t>Control PASS는 금융 법률 정확도 100%가 아니라 expected block/recovery가 관찰됐다는 의미</a:t>
             </a:r>
           </a:p>
         </p:txBody>
@@ -5270,7 +5270,7 @@
                           <a:latin typeface="Noto Sans KR"/>
                           <a:ea typeface="Noto Sans KR"/>
                         </a:rPr>
-                        <a:t>EvidenceOps Agent</a:t>
+                        <a:t>FinCompliance Agent</a:t>
                       </a:r>
                     </a:p>
                   </a:txBody>
@@ -5294,7 +5294,7 @@
                           <a:latin typeface="DejaVu Sans Mono"/>
                           <a:ea typeface="DejaVu Sans Mono"/>
                         </a:rPr>
-                        <a:t>experiment spec·argv allowlist</a:t>
+                        <a:t>strict tool schema·synthetic evidence</a:t>
                       </a:r>
                     </a:p>
                   </a:txBody>
@@ -5318,7 +5318,7 @@
                           <a:latin typeface="DejaVu Sans Mono"/>
                           <a:ea typeface="DejaVu Sans Mono"/>
                         </a:rPr>
-                        <a:t>checkpoint + hash chain</a:t>
+                        <a:t>12 adversarial controls</a:t>
                       </a:r>
                     </a:p>
                   </a:txBody>
@@ -5342,7 +5342,7 @@
                           <a:latin typeface="DejaVu Sans Mono"/>
                           <a:ea typeface="DejaVu Sans Mono"/>
                         </a:rPr>
-                        <a:t>JSON · HTML · MCP · CI</a:t>
+                        <a:t>JSON trace · API · HTML · PPTX</a:t>
                       </a:r>
                     </a:p>
                   </a:txBody>
@@ -6469,7 +6469,7 @@
                 <a:latin typeface="Noto Sans KR"/>
                 <a:ea typeface="Noto Sans KR"/>
               </a:rPr>
-              <a:t>AgentOps</a:t>
+              <a:t>Agent</a:t>
             </a:r>
           </a:p>
         </p:txBody>
@@ -6512,7 +6512,7 @@
                 <a:latin typeface="Noto Sans KR"/>
                 <a:ea typeface="Noto Sans KR"/>
               </a:rPr>
-              <a:t>Automation</a:t>
+              <a:t>Tool Use</a:t>
             </a:r>
           </a:p>
         </p:txBody>
@@ -6555,7 +6555,7 @@
                 <a:latin typeface="Noto Sans KR"/>
                 <a:ea typeface="Noto Sans KR"/>
               </a:rPr>
-              <a:t>policy gate, state machine, checkpoint·resume, MCP, tamper-evident audit</a:t>
+              <a:t>function calling loop, strict guardrails, prompt-injection defense, out-of-band HITL</a:t>
             </a:r>
           </a:p>
         </p:txBody>
@@ -7320,7 +7320,7 @@
                           <a:latin typeface="Noto Sans KR"/>
                           <a:ea typeface="Noto Sans KR"/>
                         </a:rPr>
-                        <a:t>EvidenceOps Agent</a:t>
+                        <a:t>FinCompliance Agent</a:t>
                       </a:r>
                     </a:p>
                   </a:txBody>
@@ -7344,7 +7344,7 @@
                           <a:latin typeface="DejaVu Sans Mono"/>
                           <a:ea typeface="DejaVu Sans Mono"/>
                         </a:rPr>
-                        <a:t>12 tests + 6/6 jobs PASS</a:t>
+                        <a:t>12 tests + 12/12 controls PASS</a:t>
                       </a:r>
                     </a:p>
                   </a:txBody>
@@ -7368,7 +7368,7 @@
                           <a:latin typeface="DejaVu Sans Mono"/>
                           <a:ea typeface="DejaVu Sans Mono"/>
                         </a:rPr>
-                        <a:t>HTML · PPTX · evidence JSON</a:t>
+                        <a:t>HTML · PPTX · trace JSON</a:t>
                       </a:r>
                     </a:p>
                   </a:txBody>
@@ -7392,7 +7392,7 @@
                           <a:latin typeface="DejaVu Sans Mono"/>
                           <a:ea typeface="DejaVu Sans Mono"/>
                         </a:rPr>
-                        <a:t>local main</a:t>
+                        <a:t>public main</a:t>
                       </a:r>
                     </a:p>
                   </a:txBody>
@@ -7490,7 +7490,7 @@
                 <a:latin typeface="Noto Sans KR"/>
                 <a:ea typeface="Noto Sans KR"/>
               </a:rPr>
-              <a:t>K-VoiceBench와 EvidenceOps는 나중에 GitHub 저장소를 만든 뒤 원격만 연결하면 되는 상태</a:t>
+              <a:t>FinCompliance Agent는 public main · K-VoiceBench와 EvidenceOps는 원격 연결 대기</a:t>
             </a:r>
           </a:p>
         </p:txBody>
@@ -7688,7 +7688,7 @@
                 <a:latin typeface="Noto Sans KR"/>
                 <a:ea typeface="Noto Sans KR"/>
               </a:rPr>
-              <a:t>Build · Measure · Operate · Automate</a:t>
+              <a:t>Build · Measure · Operate · Act</a:t>
             </a:r>
           </a:p>
         </p:txBody>
@@ -7731,7 +7731,7 @@
                 <a:latin typeface="Noto Sans KR"/>
                 <a:ea typeface="Noto Sans KR"/>
               </a:rPr>
-              <a:t>금융 LLMOps, 양자화 원인 분석, 한국어 음성 평가를 거쳐 제한된 GPU의 AI 실험을 정책과 증거로 자동화했습니다.</a:t>
+              <a:t>금융 LLMOps, 양자화 원인 분석, 한국어 음성 평가를 거쳐 모델이 근거와 권한 안에서 행동하는 Agent를 구현했습니다.</a:t>
             </a:r>
           </a:p>
         </p:txBody>
@@ -9069,7 +9069,7 @@
                 <a:latin typeface="Noto Sans KR"/>
                 <a:ea typeface="Noto Sans KR"/>
               </a:rPr>
-              <a:t>04 EvidenceOps Agent</a:t>
+              <a:t>04 FinCompliance Agent</a:t>
             </a:r>
           </a:p>
         </p:txBody>
@@ -9112,7 +9112,7 @@
                 <a:latin typeface="Noto Sans KR"/>
                 <a:ea typeface="Noto Sans KR"/>
               </a:rPr>
-              <a:t>자동화</a:t>
+              <a:t>행동</a:t>
             </a:r>
           </a:p>
         </p:txBody>
@@ -9155,7 +9155,7 @@
                 <a:latin typeface="Noto Sans KR"/>
                 <a:ea typeface="Noto Sans KR"/>
               </a:rPr>
-              <a:t>긴 AI 실험을 사람이 밤새 지키지 않아도 정책·큐·증거로 어떻게 운영할까?</a:t>
+              <a:t>금융 준법 검토에서 모델이 도구를 선택하되 권한과 근거를 코드로 어떻게 강제할까?</a:t>
             </a:r>
           </a:p>
         </p:txBody>
@@ -17906,7 +17906,7 @@
                 <a:latin typeface="Noto Sans KR"/>
                 <a:ea typeface="Noto Sans KR"/>
               </a:rPr>
-              <a:t>PROJECT 04 · EVIDENCEOPS AGENT</a:t>
+              <a:t>PROJECT 04 · FINCOMPLIANCE AGENT</a:t>
             </a:r>
           </a:p>
         </p:txBody>
@@ -17949,7 +17949,7 @@
                 <a:latin typeface="Noto Sans KR"/>
                 <a:ea typeface="Noto Sans KR"/>
               </a:rPr>
-              <a:t>AI 실험 운영을 사람의 밤샘에서 분리</a:t>
+              <a:t>모델이 선택하고 애플리케이션이 통제</a:t>
             </a:r>
           </a:p>
         </p:txBody>
@@ -17992,7 +17992,7 @@
                 <a:latin typeface="Noto Sans KR"/>
                 <a:ea typeface="Noto Sans KR"/>
               </a:rPr>
-              <a:t>허용된 도구만 순차 실행하고 interruption 이후 checkpoint에서 재개합니다.</a:t>
+              <a:t>LLM이 도구 결과를 관찰해 다음 행동을 고르지만 실행 권한은 policy engine이 강제합니다.</a:t>
             </a:r>
           </a:p>
         </p:txBody>
@@ -18123,7 +18123,7 @@
                 <a:latin typeface="Noto Sans KR"/>
                 <a:ea typeface="Noto Sans KR"/>
               </a:rPr>
-              <a:t>Discover</a:t>
+              <a:t>Request</a:t>
             </a:r>
           </a:p>
         </p:txBody>
@@ -18254,7 +18254,7 @@
                 <a:latin typeface="Noto Sans KR"/>
                 <a:ea typeface="Noto Sans KR"/>
               </a:rPr>
-              <a:t>Policy Gate</a:t>
+              <a:t>LLM Chooses</a:t>
             </a:r>
           </a:p>
         </p:txBody>
@@ -18385,7 +18385,7 @@
                 <a:latin typeface="Noto Sans KR"/>
                 <a:ea typeface="Noto Sans KR"/>
               </a:rPr>
-              <a:t>Sequential Queue</a:t>
+              <a:t>Strict Policy</a:t>
             </a:r>
           </a:p>
         </p:txBody>
@@ -18647,7 +18647,7 @@
                 <a:latin typeface="Noto Sans KR"/>
                 <a:ea typeface="Noto Sans KR"/>
               </a:rPr>
-              <a:t>Observe·Triage</a:t>
+              <a:t>Observe·Replan</a:t>
             </a:r>
           </a:p>
         </p:txBody>
@@ -18778,7 +18778,7 @@
                 <a:latin typeface="Noto Sans KR"/>
                 <a:ea typeface="Noto Sans KR"/>
               </a:rPr>
-              <a:t>Evidence Pack</a:t>
+              <a:t>HITL</a:t>
             </a:r>
           </a:p>
         </p:txBody>
@@ -18866,7 +18866,7 @@
                 <a:latin typeface="Noto Sans KR"/>
                 <a:ea typeface="Noto Sans KR"/>
               </a:rPr>
-              <a:t>Portfolio jobs</a:t>
+              <a:t>Strict tools</a:t>
             </a:r>
           </a:p>
         </p:txBody>
@@ -18909,7 +18909,7 @@
                 <a:latin typeface="DejaVu Sans Mono"/>
                 <a:ea typeface="DejaVu Sans Mono"/>
               </a:rPr>
-              <a:t>6 / 6 PASS</a:t>
+              <a:t>9</a:t>
             </a:r>
           </a:p>
         </p:txBody>
@@ -18997,7 +18997,7 @@
                 <a:latin typeface="Noto Sans KR"/>
                 <a:ea typeface="Noto Sans KR"/>
               </a:rPr>
-              <a:t>Unit tests</a:t>
+              <a:t>Policy eval</a:t>
             </a:r>
           </a:p>
         </p:txBody>
@@ -19040,7 +19040,7 @@
                 <a:latin typeface="DejaVu Sans Mono"/>
                 <a:ea typeface="DejaVu Sans Mono"/>
               </a:rPr>
-              <a:t>12</a:t>
+              <a:t>12 / 12 PASS</a:t>
             </a:r>
           </a:p>
         </p:txBody>
@@ -19128,7 +19128,7 @@
                 <a:latin typeface="Noto Sans KR"/>
                 <a:ea typeface="Noto Sans KR"/>
               </a:rPr>
-              <a:t>GPU policy</a:t>
+              <a:t>Automated tests</a:t>
             </a:r>
           </a:p>
         </p:txBody>
@@ -19171,7 +19171,7 @@
                 <a:latin typeface="DejaVu Sans Mono"/>
                 <a:ea typeface="DejaVu Sans Mono"/>
               </a:rPr>
-              <a:t>GPU 1 only</a:t>
+              <a:t>12 / 12</a:t>
             </a:r>
           </a:p>
         </p:txBody>
@@ -19259,7 +19259,7 @@
                 <a:latin typeface="Noto Sans KR"/>
                 <a:ea typeface="Noto Sans KR"/>
               </a:rPr>
-              <a:t>LLM action</a:t>
+              <a:t>Unauthorized finalize</a:t>
             </a:r>
           </a:p>
         </p:txBody>
@@ -19302,7 +19302,7 @@
                 <a:latin typeface="DejaVu Sans Mono"/>
                 <a:ea typeface="DejaVu Sans Mono"/>
               </a:rPr>
-              <a:t>Advisory</a:t>
+              <a:t>0</a:t>
             </a:r>
           </a:p>
         </p:txBody>
@@ -19390,7 +19390,7 @@
                 <a:latin typeface="Noto Sans KR"/>
                 <a:ea typeface="Noto Sans KR"/>
               </a:rPr>
-              <a:t>CPU job은 CUDA를 볼 수 없고 GPU job은 물리 GPU 1번 exclusive lock</a:t>
+              <a:t>실제 OpenAI model lane은 API key 미설정으로 NOT_EXECUTED · deterministic control lane 완료</a:t>
             </a:r>
           </a:p>
         </p:txBody>
